--- a/기획/몬스터 기획서_Ghost.pptx
+++ b/기획/몬스터 기획서_Ghost.pptx
@@ -5,20 +5,19 @@
     <p:sldMasterId id="2147483648" r:id="rId1"/>
   </p:sldMasterIdLst>
   <p:notesMasterIdLst>
-    <p:notesMasterId r:id="rId10"/>
+    <p:notesMasterId r:id="rId9"/>
   </p:notesMasterIdLst>
   <p:handoutMasterIdLst>
-    <p:handoutMasterId r:id="rId11"/>
+    <p:handoutMasterId r:id="rId10"/>
   </p:handoutMasterIdLst>
   <p:sldIdLst>
     <p:sldId id="256" r:id="rId2"/>
     <p:sldId id="288" r:id="rId3"/>
     <p:sldId id="276" r:id="rId4"/>
     <p:sldId id="283" r:id="rId5"/>
-    <p:sldId id="284" r:id="rId6"/>
-    <p:sldId id="285" r:id="rId7"/>
-    <p:sldId id="286" r:id="rId8"/>
-    <p:sldId id="287" r:id="rId9"/>
+    <p:sldId id="289" r:id="rId6"/>
+    <p:sldId id="286" r:id="rId7"/>
+    <p:sldId id="287" r:id="rId8"/>
   </p:sldIdLst>
   <p:sldSz cx="12192000" cy="6858000"/>
   <p:notesSz cx="6858000" cy="9144000"/>
@@ -233,7 +232,7 @@
           <a:p>
             <a:fld id="{90ADBB8C-8191-4AEC-B0E4-021A6DCC5E88}" type="datetimeFigureOut">
               <a:rPr lang="ko-KR" altLang="en-US" smtClean="0"/>
-              <a:t>2026-04-14</a:t>
+              <a:t>2026-05-09</a:t>
             </a:fld>
             <a:endParaRPr lang="ko-KR" altLang="en-US"/>
           </a:p>
@@ -410,7 +409,7 @@
           <a:p>
             <a:fld id="{9A139F74-74AF-4C37-AE84-1000E0D0E51D}" type="datetimeFigureOut">
               <a:rPr lang="ko-KR" altLang="en-US" smtClean="0"/>
-              <a:t>2026-04-14</a:t>
+              <a:t>2026-05-09</a:t>
             </a:fld>
             <a:endParaRPr lang="ko-KR" altLang="en-US"/>
           </a:p>
@@ -682,220 +681,6 @@
   <p:cSld>
     <p:spTree>
       <p:nvGrpSpPr>
-        <p:cNvPr id="1" name=""/>
-        <p:cNvGrpSpPr/>
-        <p:nvPr/>
-      </p:nvGrpSpPr>
-      <p:grpSpPr>
-        <a:xfrm>
-          <a:off x="0" y="0"/>
-          <a:ext cx="0" cy="0"/>
-          <a:chOff x="0" y="0"/>
-          <a:chExt cx="0" cy="0"/>
-        </a:xfrm>
-      </p:grpSpPr>
-      <p:sp>
-        <p:nvSpPr>
-          <p:cNvPr id="2" name="슬라이드 이미지 개체 틀 1"/>
-          <p:cNvSpPr>
-            <a:spLocks noGrp="1" noRot="1" noChangeAspect="1"/>
-          </p:cNvSpPr>
-          <p:nvPr>
-            <p:ph type="sldImg"/>
-          </p:nvPr>
-        </p:nvSpPr>
-        <p:spPr/>
-      </p:sp>
-      <p:sp>
-        <p:nvSpPr>
-          <p:cNvPr id="3" name="슬라이드 노트 개체 틀 2"/>
-          <p:cNvSpPr>
-            <a:spLocks noGrp="1"/>
-          </p:cNvSpPr>
-          <p:nvPr>
-            <p:ph type="body" idx="1"/>
-          </p:nvPr>
-        </p:nvSpPr>
-        <p:spPr/>
-        <p:txBody>
-          <a:bodyPr/>
-          <a:lstStyle/>
-          <a:p>
-            <a:r>
-              <a:rPr lang="ko-KR" altLang="en-US" dirty="0"/>
-              <a:t>타겟 지정 방식</a:t>
-            </a:r>
-            <a:r>
-              <a:rPr lang="en-US" altLang="ko-KR" dirty="0"/>
-              <a:t>, </a:t>
-            </a:r>
-            <a:r>
-              <a:rPr lang="ko-KR" altLang="en-US" dirty="0"/>
-              <a:t>목적지 탐색 방식</a:t>
-            </a:r>
-          </a:p>
-        </p:txBody>
-      </p:sp>
-      <p:sp>
-        <p:nvSpPr>
-          <p:cNvPr id="4" name="슬라이드 번호 개체 틀 3"/>
-          <p:cNvSpPr>
-            <a:spLocks noGrp="1"/>
-          </p:cNvSpPr>
-          <p:nvPr>
-            <p:ph type="sldNum" sz="quarter" idx="5"/>
-          </p:nvPr>
-        </p:nvSpPr>
-        <p:spPr/>
-        <p:txBody>
-          <a:bodyPr/>
-          <a:lstStyle/>
-          <a:p>
-            <a:fld id="{76F76A66-B71B-41D7-B3D7-EDD47844D175}" type="slidenum">
-              <a:rPr lang="ko-KR" altLang="en-US" smtClean="0"/>
-              <a:t>5</a:t>
-            </a:fld>
-            <a:endParaRPr lang="ko-KR" altLang="en-US"/>
-          </a:p>
-        </p:txBody>
-      </p:sp>
-    </p:spTree>
-    <p:extLst>
-      <p:ext uri="{BB962C8B-B14F-4D97-AF65-F5344CB8AC3E}">
-        <p14:creationId xmlns:p14="http://schemas.microsoft.com/office/powerpoint/2010/main" val="2050236125"/>
-      </p:ext>
-    </p:extLst>
-  </p:cSld>
-  <p:clrMapOvr>
-    <a:masterClrMapping/>
-  </p:clrMapOvr>
-</p:notes>
-</file>
-
-<file path=ppt/notesSlides/notesSlide2.xml><?xml version="1.0" encoding="utf-8"?>
-<p:notes xmlns:a="http://schemas.openxmlformats.org/drawingml/2006/main" xmlns:r="http://schemas.openxmlformats.org/officeDocument/2006/relationships" xmlns:p="http://schemas.openxmlformats.org/presentationml/2006/main">
-  <p:cSld>
-    <p:spTree>
-      <p:nvGrpSpPr>
-        <p:cNvPr id="1" name="">
-          <a:extLst>
-            <a:ext uri="{FF2B5EF4-FFF2-40B4-BE49-F238E27FC236}">
-              <a16:creationId xmlns:a16="http://schemas.microsoft.com/office/drawing/2014/main" id="{004D5A81-EC0A-1447-561C-EB9B52096391}"/>
-            </a:ext>
-          </a:extLst>
-        </p:cNvPr>
-        <p:cNvGrpSpPr/>
-        <p:nvPr/>
-      </p:nvGrpSpPr>
-      <p:grpSpPr>
-        <a:xfrm>
-          <a:off x="0" y="0"/>
-          <a:ext cx="0" cy="0"/>
-          <a:chOff x="0" y="0"/>
-          <a:chExt cx="0" cy="0"/>
-        </a:xfrm>
-      </p:grpSpPr>
-      <p:sp>
-        <p:nvSpPr>
-          <p:cNvPr id="2" name="슬라이드 이미지 개체 틀 1">
-            <a:extLst>
-              <a:ext uri="{FF2B5EF4-FFF2-40B4-BE49-F238E27FC236}">
-                <a16:creationId xmlns:a16="http://schemas.microsoft.com/office/drawing/2014/main" id="{C488C88E-7F32-40EE-5E9F-4E7D7B593F2C}"/>
-              </a:ext>
-            </a:extLst>
-          </p:cNvPr>
-          <p:cNvSpPr>
-            <a:spLocks noGrp="1" noRot="1" noChangeAspect="1"/>
-          </p:cNvSpPr>
-          <p:nvPr>
-            <p:ph type="sldImg"/>
-          </p:nvPr>
-        </p:nvSpPr>
-        <p:spPr/>
-      </p:sp>
-      <p:sp>
-        <p:nvSpPr>
-          <p:cNvPr id="3" name="슬라이드 노트 개체 틀 2">
-            <a:extLst>
-              <a:ext uri="{FF2B5EF4-FFF2-40B4-BE49-F238E27FC236}">
-                <a16:creationId xmlns:a16="http://schemas.microsoft.com/office/drawing/2014/main" id="{7C3FC8EA-6FC1-258F-043A-ECC0CD83796B}"/>
-              </a:ext>
-            </a:extLst>
-          </p:cNvPr>
-          <p:cNvSpPr>
-            <a:spLocks noGrp="1"/>
-          </p:cNvSpPr>
-          <p:nvPr>
-            <p:ph type="body" idx="1"/>
-          </p:nvPr>
-        </p:nvSpPr>
-        <p:spPr/>
-        <p:txBody>
-          <a:bodyPr/>
-          <a:lstStyle/>
-          <a:p>
-            <a:r>
-              <a:rPr lang="ko-KR" altLang="en-US" dirty="0"/>
-              <a:t>타겟 지정 방식</a:t>
-            </a:r>
-            <a:r>
-              <a:rPr lang="en-US" altLang="ko-KR" dirty="0"/>
-              <a:t>, </a:t>
-            </a:r>
-            <a:r>
-              <a:rPr lang="ko-KR" altLang="en-US" dirty="0"/>
-              <a:t>목적지 탐색 방식</a:t>
-            </a:r>
-          </a:p>
-        </p:txBody>
-      </p:sp>
-      <p:sp>
-        <p:nvSpPr>
-          <p:cNvPr id="4" name="슬라이드 번호 개체 틀 3">
-            <a:extLst>
-              <a:ext uri="{FF2B5EF4-FFF2-40B4-BE49-F238E27FC236}">
-                <a16:creationId xmlns:a16="http://schemas.microsoft.com/office/drawing/2014/main" id="{73D56519-A82E-1A89-2AB7-73C5F9799C6C}"/>
-              </a:ext>
-            </a:extLst>
-          </p:cNvPr>
-          <p:cNvSpPr>
-            <a:spLocks noGrp="1"/>
-          </p:cNvSpPr>
-          <p:nvPr>
-            <p:ph type="sldNum" sz="quarter" idx="5"/>
-          </p:nvPr>
-        </p:nvSpPr>
-        <p:spPr/>
-        <p:txBody>
-          <a:bodyPr/>
-          <a:lstStyle/>
-          <a:p>
-            <a:fld id="{76F76A66-B71B-41D7-B3D7-EDD47844D175}" type="slidenum">
-              <a:rPr lang="ko-KR" altLang="en-US" smtClean="0"/>
-              <a:t>6</a:t>
-            </a:fld>
-            <a:endParaRPr lang="ko-KR" altLang="en-US"/>
-          </a:p>
-        </p:txBody>
-      </p:sp>
-    </p:spTree>
-    <p:extLst>
-      <p:ext uri="{BB962C8B-B14F-4D97-AF65-F5344CB8AC3E}">
-        <p14:creationId xmlns:p14="http://schemas.microsoft.com/office/powerpoint/2010/main" val="1245221074"/>
-      </p:ext>
-    </p:extLst>
-  </p:cSld>
-  <p:clrMapOvr>
-    <a:masterClrMapping/>
-  </p:clrMapOvr>
-</p:notes>
-</file>
-
-<file path=ppt/notesSlides/notesSlide3.xml><?xml version="1.0" encoding="utf-8"?>
-<p:notes xmlns:a="http://schemas.openxmlformats.org/drawingml/2006/main" xmlns:r="http://schemas.openxmlformats.org/officeDocument/2006/relationships" xmlns:p="http://schemas.openxmlformats.org/presentationml/2006/main">
-  <p:cSld>
-    <p:spTree>
-      <p:nvGrpSpPr>
         <p:cNvPr id="1" name="">
           <a:extLst>
             <a:ext uri="{FF2B5EF4-FFF2-40B4-BE49-F238E27FC236}">
@@ -991,7 +776,7 @@
           <a:p>
             <a:fld id="{76F76A66-B71B-41D7-B3D7-EDD47844D175}" type="slidenum">
               <a:rPr lang="ko-KR" altLang="en-US" smtClean="0"/>
-              <a:t>7</a:t>
+              <a:t>6</a:t>
             </a:fld>
             <a:endParaRPr lang="ko-KR" altLang="en-US"/>
           </a:p>
@@ -1010,7 +795,7 @@
 </p:notes>
 </file>
 
-<file path=ppt/notesSlides/notesSlide4.xml><?xml version="1.0" encoding="utf-8"?>
+<file path=ppt/notesSlides/notesSlide2.xml><?xml version="1.0" encoding="utf-8"?>
 <p:notes xmlns:a="http://schemas.openxmlformats.org/drawingml/2006/main" xmlns:r="http://schemas.openxmlformats.org/officeDocument/2006/relationships" xmlns:p="http://schemas.openxmlformats.org/presentationml/2006/main">
   <p:cSld>
     <p:spTree>
@@ -1110,7 +895,7 @@
           <a:p>
             <a:fld id="{76F76A66-B71B-41D7-B3D7-EDD47844D175}" type="slidenum">
               <a:rPr lang="ko-KR" altLang="en-US" smtClean="0"/>
-              <a:t>8</a:t>
+              <a:t>7</a:t>
             </a:fld>
             <a:endParaRPr lang="ko-KR" altLang="en-US"/>
           </a:p>
@@ -1276,7 +1061,7 @@
           <a:p>
             <a:fld id="{FBFF74CB-B97E-448A-8613-336F71D317F5}" type="datetime1">
               <a:rPr lang="ko-KR" altLang="en-US" smtClean="0"/>
-              <a:t>2026-04-14</a:t>
+              <a:t>2026-05-09</a:t>
             </a:fld>
             <a:endParaRPr lang="ko-KR" altLang="en-US"/>
           </a:p>
@@ -1567,7 +1352,7 @@
           <a:p>
             <a:fld id="{6D5A3F2E-880D-4AB2-BE87-1DABB4D9D36B}" type="datetime1">
               <a:rPr lang="ko-KR" altLang="en-US" smtClean="0"/>
-              <a:t>2026-04-14</a:t>
+              <a:t>2026-05-09</a:t>
             </a:fld>
             <a:endParaRPr lang="ko-KR" altLang="en-US"/>
           </a:p>
@@ -1765,7 +1550,7 @@
           <a:p>
             <a:fld id="{E225792B-2F2C-46B3-9536-A6BE584A3133}" type="datetime1">
               <a:rPr lang="ko-KR" altLang="en-US" smtClean="0"/>
-              <a:t>2026-04-14</a:t>
+              <a:t>2026-05-09</a:t>
             </a:fld>
             <a:endParaRPr lang="ko-KR" altLang="en-US"/>
           </a:p>
@@ -1973,7 +1758,7 @@
           <a:p>
             <a:fld id="{B959B1C4-1FB0-4ED1-88EC-81D9419D81DC}" type="datetime1">
               <a:rPr lang="ko-KR" altLang="en-US" smtClean="0"/>
-              <a:t>2026-04-14</a:t>
+              <a:t>2026-05-09</a:t>
             </a:fld>
             <a:endParaRPr lang="ko-KR" altLang="en-US"/>
           </a:p>
@@ -2244,7 +2029,7 @@
           <a:p>
             <a:fld id="{644DB65B-E6AE-4B39-8D08-8DC3DC9B3DE6}" type="datetime1">
               <a:rPr lang="ko-KR" altLang="en-US" smtClean="0"/>
-              <a:t>2026-04-14</a:t>
+              <a:t>2026-05-09</a:t>
             </a:fld>
             <a:endParaRPr lang="ko-KR" altLang="en-US"/>
           </a:p>
@@ -2515,7 +2300,7 @@
           <a:p>
             <a:fld id="{644DB65B-E6AE-4B39-8D08-8DC3DC9B3DE6}" type="datetime1">
               <a:rPr lang="ko-KR" altLang="en-US" smtClean="0"/>
-              <a:t>2026-04-14</a:t>
+              <a:t>2026-05-09</a:t>
             </a:fld>
             <a:endParaRPr lang="ko-KR" altLang="en-US"/>
           </a:p>
@@ -2827,7 +2612,7 @@
           <a:p>
             <a:fld id="{A80E6DAD-F59F-4DF2-B36E-B1403061A098}" type="datetime1">
               <a:rPr lang="ko-KR" altLang="en-US" smtClean="0"/>
-              <a:t>2026-04-14</a:t>
+              <a:t>2026-05-09</a:t>
             </a:fld>
             <a:endParaRPr lang="ko-KR" altLang="en-US"/>
           </a:p>
@@ -3092,7 +2877,7 @@
           <a:p>
             <a:fld id="{65E7A435-D09E-4012-8A5A-CB367CE86DE7}" type="datetime1">
               <a:rPr lang="ko-KR" altLang="en-US" smtClean="0"/>
-              <a:t>2026-04-14</a:t>
+              <a:t>2026-05-09</a:t>
             </a:fld>
             <a:endParaRPr lang="ko-KR" altLang="en-US"/>
           </a:p>
@@ -3504,7 +3289,7 @@
           <a:p>
             <a:fld id="{EAEE4FE5-8155-4A7B-B9F1-1277B556A678}" type="datetime1">
               <a:rPr lang="ko-KR" altLang="en-US" smtClean="0"/>
-              <a:t>2026-04-14</a:t>
+              <a:t>2026-05-09</a:t>
             </a:fld>
             <a:endParaRPr lang="ko-KR" altLang="en-US"/>
           </a:p>
@@ -3645,7 +3430,7 @@
           <a:p>
             <a:fld id="{A5DDFFB1-F462-49A1-A952-F86898531EFC}" type="datetime1">
               <a:rPr lang="ko-KR" altLang="en-US" smtClean="0"/>
-              <a:t>2026-04-14</a:t>
+              <a:t>2026-05-09</a:t>
             </a:fld>
             <a:endParaRPr lang="ko-KR" altLang="en-US"/>
           </a:p>
@@ -3758,7 +3543,7 @@
           <a:p>
             <a:fld id="{DF307744-A7EE-42A9-B4BD-A75049B592B9}" type="datetime1">
               <a:rPr lang="ko-KR" altLang="en-US" smtClean="0"/>
-              <a:t>2026-04-14</a:t>
+              <a:t>2026-05-09</a:t>
             </a:fld>
             <a:endParaRPr lang="ko-KR" altLang="en-US"/>
           </a:p>
@@ -4069,7 +3854,7 @@
           <a:p>
             <a:fld id="{DEB58597-5F16-46FB-9810-19206F29ADC7}" type="datetime1">
               <a:rPr lang="ko-KR" altLang="en-US" smtClean="0"/>
-              <a:t>2026-04-14</a:t>
+              <a:t>2026-05-09</a:t>
             </a:fld>
             <a:endParaRPr lang="ko-KR" altLang="en-US"/>
           </a:p>
@@ -4310,7 +4095,7 @@
           <a:p>
             <a:fld id="{F9163AAC-BAFF-4F5F-9CEA-0445F100C3E2}" type="datetime1">
               <a:rPr lang="ko-KR" altLang="en-US" smtClean="0"/>
-              <a:t>2026-04-14</a:t>
+              <a:t>2026-05-09</a:t>
             </a:fld>
             <a:endParaRPr lang="ko-KR" altLang="en-US"/>
           </a:p>
@@ -4832,11 +4617,14 @@
           <a:lstStyle/>
           <a:p>
             <a:r>
-              <a:rPr lang="en-US" altLang="ko-KR" dirty="0">
+              <a:rPr lang="en-US" altLang="ko-KR">
                 <a:ea typeface="맑은 고딕"/>
               </a:rPr>
-              <a:t>2026.04.12</a:t>
-            </a:r>
+              <a:t>2026.05.10</a:t>
+            </a:r>
+            <a:endParaRPr lang="en-US" altLang="ko-KR" dirty="0">
+              <a:ea typeface="맑은 고딕"/>
+            </a:endParaRPr>
           </a:p>
         </p:txBody>
       </p:sp>
@@ -5176,14 +4964,14 @@
           <p:nvPr>
             <p:extLst>
               <p:ext uri="{D42A27DB-BD31-4B8C-83A1-F6EECF244321}">
-                <p14:modId xmlns:p14="http://schemas.microsoft.com/office/powerpoint/2010/main" val="3221384105"/>
+                <p14:modId xmlns:p14="http://schemas.microsoft.com/office/powerpoint/2010/main" val="501449819"/>
               </p:ext>
             </p:extLst>
           </p:nvPr>
         </p:nvGraphicFramePr>
         <p:xfrm>
-          <a:off x="1892300" y="119158"/>
-          <a:ext cx="5876424" cy="3413760"/>
+          <a:off x="1892300" y="137130"/>
+          <a:ext cx="5876424" cy="2829172"/>
         </p:xfrm>
         <a:graphic>
           <a:graphicData uri="http://schemas.openxmlformats.org/drawingml/2006/table">
@@ -5215,14 +5003,14 @@
                     <a:p>
                       <a:pPr algn="ctr" latinLnBrk="0"/>
                       <a:r>
-                        <a:rPr lang="en-US" altLang="ko-KR" sz="1400" b="1" dirty="0">
+                        <a:rPr lang="en-US" altLang="ko-KR" sz="1100" b="1" dirty="0">
                           <a:solidFill>
                             <a:schemeClr val="tx1"/>
                           </a:solidFill>
                         </a:rPr>
                         <a:t>State</a:t>
                       </a:r>
-                      <a:endParaRPr lang="ko-KR" altLang="en-US" sz="1400" b="1" dirty="0">
+                      <a:endParaRPr lang="ko-KR" altLang="en-US" sz="1100" b="1" dirty="0">
                         <a:solidFill>
                           <a:schemeClr val="tx1"/>
                         </a:solidFill>
@@ -5342,14 +5130,14 @@
                     <a:p>
                       <a:pPr algn="ctr" latinLnBrk="0"/>
                       <a:r>
-                        <a:rPr lang="en-US" altLang="ko-KR" sz="1400" b="0" dirty="0">
+                        <a:rPr lang="en-US" altLang="ko-KR" sz="1100" b="0" dirty="0">
                           <a:solidFill>
                             <a:schemeClr val="tx1"/>
                           </a:solidFill>
                         </a:rPr>
                         <a:t>State</a:t>
                       </a:r>
-                      <a:endParaRPr lang="ko-KR" altLang="en-US" sz="1400" b="0" dirty="0">
+                      <a:endParaRPr lang="ko-KR" altLang="en-US" sz="1100" b="0" dirty="0">
                         <a:solidFill>
                           <a:schemeClr val="tx1"/>
                         </a:solidFill>
@@ -5407,7 +5195,7 @@
                     <a:p>
                       <a:pPr algn="ctr" latinLnBrk="0"/>
                       <a:r>
-                        <a:rPr lang="ko-KR" altLang="en-US" sz="1400" b="0" dirty="0">
+                        <a:rPr lang="ko-KR" altLang="en-US" sz="1100" b="0" dirty="0">
                           <a:solidFill>
                             <a:schemeClr val="tx1"/>
                           </a:solidFill>
@@ -5474,46 +5262,14 @@
                     <a:p>
                       <a:pPr algn="l" latinLnBrk="0"/>
                       <a:r>
-                        <a:rPr lang="en-US" altLang="ko-KR" sz="1400" b="1" dirty="0">
+                        <a:rPr lang="en-US" altLang="ko-KR" sz="1100" b="1" dirty="0">
                           <a:solidFill>
                             <a:schemeClr val="tx1"/>
                           </a:solidFill>
                         </a:rPr>
-                        <a:t>Absent</a:t>
+                        <a:t>Idle</a:t>
                       </a:r>
-                      <a:r>
-                        <a:rPr lang="ko-KR" altLang="en-US" sz="1400" b="1" dirty="0">
-                          <a:solidFill>
-                            <a:schemeClr val="tx1"/>
-                          </a:solidFill>
-                        </a:rPr>
-                        <a:t> </a:t>
-                      </a:r>
-                      <a:r>
-                        <a:rPr lang="en-US" altLang="ko-KR" sz="1400" b="1" dirty="0">
-                          <a:solidFill>
-                            <a:schemeClr val="tx1"/>
-                          </a:solidFill>
-                        </a:rPr>
-                        <a:t>(</a:t>
-                      </a:r>
-                      <a:r>
-                        <a:rPr lang="ko-KR" altLang="en-US" sz="1400" b="1" dirty="0">
-                          <a:solidFill>
-                            <a:schemeClr val="tx1"/>
-                          </a:solidFill>
-                        </a:rPr>
-                        <a:t>부재</a:t>
-                      </a:r>
-                      <a:r>
-                        <a:rPr lang="en-US" altLang="ko-KR" sz="1400" b="1" dirty="0">
-                          <a:solidFill>
-                            <a:schemeClr val="tx1"/>
-                          </a:solidFill>
-                        </a:rPr>
-                        <a:t>)</a:t>
-                      </a:r>
-                      <a:endParaRPr lang="ko-KR" altLang="en-US" sz="1400" b="1" dirty="0">
+                      <a:endParaRPr lang="ko-KR" altLang="en-US" sz="1100" b="1" dirty="0">
                         <a:solidFill>
                           <a:schemeClr val="tx1"/>
                         </a:solidFill>
@@ -5569,66 +5325,273 @@
                     <a:bodyPr/>
                     <a:lstStyle/>
                     <a:p>
-                      <a:pPr marL="285750" indent="-285750" algn="l" latinLnBrk="0">
-                        <a:buFontTx/>
-                        <a:buChar char="-"/>
+                      <a:pPr marL="171450" indent="-171450" algn="l" latinLnBrk="0">
+                        <a:buFont typeface="Arial" panose="020B0604020202020204" pitchFamily="34" charset="0"/>
+                        <a:buChar char="•"/>
                       </a:pPr>
                       <a:r>
-                        <a:rPr lang="en-US" altLang="ko-KR" sz="1400" b="0" dirty="0">
+                        <a:rPr lang="ko-KR" altLang="en-US" sz="1100" b="0" dirty="0">
                           <a:solidFill>
                             <a:schemeClr val="tx1"/>
                           </a:solidFill>
                         </a:rPr>
-                        <a:t>Absent </a:t>
+                        <a:t>다른 상태가 실행되기 전까지 대기</a:t>
                       </a:r>
+                      <a:endParaRPr lang="en-US" altLang="ko-KR" sz="1100" b="0" dirty="0">
+                        <a:solidFill>
+                          <a:schemeClr val="tx1"/>
+                        </a:solidFill>
+                      </a:endParaRPr>
+                    </a:p>
+                  </a:txBody>
+                  <a:tcPr anchor="ctr">
+                    <a:lnL w="12700" cap="flat" cmpd="sng" algn="ctr">
+                      <a:solidFill>
+                        <a:schemeClr val="tx1"/>
+                      </a:solidFill>
+                      <a:prstDash val="solid"/>
+                      <a:round/>
+                      <a:headEnd type="none" w="med" len="med"/>
+                      <a:tailEnd type="none" w="med" len="med"/>
+                    </a:lnL>
+                    <a:lnR w="12700" cap="flat" cmpd="sng" algn="ctr">
+                      <a:solidFill>
+                        <a:schemeClr val="tx1"/>
+                      </a:solidFill>
+                      <a:prstDash val="solid"/>
+                      <a:round/>
+                      <a:headEnd type="none" w="med" len="med"/>
+                      <a:tailEnd type="none" w="med" len="med"/>
+                    </a:lnR>
+                    <a:lnT w="12700" cap="flat" cmpd="sng" algn="ctr">
+                      <a:solidFill>
+                        <a:schemeClr val="tx1"/>
+                      </a:solidFill>
+                      <a:prstDash val="solid"/>
+                      <a:round/>
+                      <a:headEnd type="none" w="med" len="med"/>
+                      <a:tailEnd type="none" w="med" len="med"/>
+                    </a:lnT>
+                    <a:lnB w="12700" cap="flat" cmpd="sng" algn="ctr">
+                      <a:solidFill>
+                        <a:schemeClr val="tx1"/>
+                      </a:solidFill>
+                      <a:prstDash val="solid"/>
+                      <a:round/>
+                      <a:headEnd type="none" w="med" len="med"/>
+                      <a:tailEnd type="none" w="med" len="med"/>
+                    </a:lnB>
+                    <a:solidFill>
+                      <a:schemeClr val="bg1"/>
+                    </a:solidFill>
+                  </a:tcPr>
+                </a:tc>
+                <a:extLst>
+                  <a:ext uri="{0D108BD9-81ED-4DB2-BD59-A6C34878D82A}">
+                    <a16:rowId xmlns:a16="http://schemas.microsoft.com/office/drawing/2014/main" val="3743948956"/>
+                  </a:ext>
+                </a:extLst>
+              </a:tr>
+              <a:tr h="303433">
+                <a:tc>
+                  <a:txBody>
+                    <a:bodyPr/>
+                    <a:lstStyle/>
+                    <a:p>
+                      <a:pPr algn="l" latinLnBrk="0"/>
                       <a:r>
-                        <a:rPr lang="ko-KR" altLang="en-US" sz="1400" b="0" dirty="0">
+                        <a:rPr lang="en-US" altLang="ko-KR" sz="1100" b="1" dirty="0">
                           <a:solidFill>
                             <a:schemeClr val="tx1"/>
                           </a:solidFill>
                         </a:rPr>
-                        <a:t>타이머가 종료되면</a:t>
+                        <a:t>Absent</a:t>
                       </a:r>
                       <a:r>
-                        <a:rPr lang="en-US" altLang="ko-KR" sz="1400" b="0" dirty="0">
+                        <a:rPr lang="ko-KR" altLang="en-US" sz="1100" b="1" dirty="0">
                           <a:solidFill>
                             <a:schemeClr val="tx1"/>
                           </a:solidFill>
                         </a:rPr>
-                        <a:t>, 4</a:t>
+                        <a:t> </a:t>
                       </a:r>
                       <a:r>
-                        <a:rPr lang="ko-KR" altLang="en-US" sz="1400" b="0" dirty="0">
+                        <a:rPr lang="en-US" altLang="ko-KR" sz="1100" b="1" dirty="0">
                           <a:solidFill>
                             <a:schemeClr val="tx1"/>
                           </a:solidFill>
                         </a:rPr>
-                        <a:t>초에 한 번씩 </a:t>
+                        <a:t>(</a:t>
                       </a:r>
                       <a:r>
-                        <a:rPr lang="ko-KR" altLang="en-US" sz="1400" b="0" dirty="0" err="1">
+                        <a:rPr lang="ko-KR" altLang="en-US" sz="1100" b="1" dirty="0">
                           <a:solidFill>
                             <a:schemeClr val="tx1"/>
                           </a:solidFill>
                         </a:rPr>
-                        <a:t>스폰될</a:t>
+                        <a:t>부재</a:t>
                       </a:r>
                       <a:r>
-                        <a:rPr lang="ko-KR" altLang="en-US" sz="1400" b="0" dirty="0">
+                        <a:rPr lang="en-US" altLang="ko-KR" sz="1100" b="1" dirty="0">
                           <a:solidFill>
                             <a:schemeClr val="tx1"/>
                           </a:solidFill>
                         </a:rPr>
-                        <a:t> 목적지를 탐색한다</a:t>
+                        <a:t>)</a:t>
                       </a:r>
+                      <a:endParaRPr lang="ko-KR" altLang="en-US" sz="1100" b="1" dirty="0">
+                        <a:solidFill>
+                          <a:schemeClr val="tx1"/>
+                        </a:solidFill>
+                      </a:endParaRPr>
+                    </a:p>
+                  </a:txBody>
+                  <a:tcPr anchor="ctr">
+                    <a:lnL w="12700" cap="flat" cmpd="sng" algn="ctr">
+                      <a:solidFill>
+                        <a:schemeClr val="tx1"/>
+                      </a:solidFill>
+                      <a:prstDash val="solid"/>
+                      <a:round/>
+                      <a:headEnd type="none" w="med" len="med"/>
+                      <a:tailEnd type="none" w="med" len="med"/>
+                    </a:lnL>
+                    <a:lnR w="12700" cap="flat" cmpd="sng" algn="ctr">
+                      <a:solidFill>
+                        <a:schemeClr val="tx1"/>
+                      </a:solidFill>
+                      <a:prstDash val="solid"/>
+                      <a:round/>
+                      <a:headEnd type="none" w="med" len="med"/>
+                      <a:tailEnd type="none" w="med" len="med"/>
+                    </a:lnR>
+                    <a:lnT w="12700" cap="flat" cmpd="sng" algn="ctr">
+                      <a:solidFill>
+                        <a:schemeClr val="tx1"/>
+                      </a:solidFill>
+                      <a:prstDash val="solid"/>
+                      <a:round/>
+                      <a:headEnd type="none" w="med" len="med"/>
+                      <a:tailEnd type="none" w="med" len="med"/>
+                    </a:lnT>
+                    <a:lnB w="12700" cap="flat" cmpd="sng" algn="ctr">
+                      <a:solidFill>
+                        <a:schemeClr val="tx1"/>
+                      </a:solidFill>
+                      <a:prstDash val="solid"/>
+                      <a:round/>
+                      <a:headEnd type="none" w="med" len="med"/>
+                      <a:tailEnd type="none" w="med" len="med"/>
+                    </a:lnB>
+                    <a:solidFill>
+                      <a:schemeClr val="bg1">
+                        <a:lumMod val="85000"/>
+                      </a:schemeClr>
+                    </a:solidFill>
+                  </a:tcPr>
+                </a:tc>
+                <a:tc>
+                  <a:txBody>
+                    <a:bodyPr/>
+                    <a:lstStyle/>
+                    <a:p>
+                      <a:pPr marL="171450" indent="-171450" algn="l" latinLnBrk="0">
+                        <a:buFont typeface="Arial" panose="020B0604020202020204" pitchFamily="34" charset="0"/>
+                        <a:buChar char="•"/>
+                      </a:pPr>
                       <a:r>
-                        <a:rPr lang="en-US" altLang="ko-KR" sz="1400" b="0" dirty="0">
+                        <a:rPr lang="ko-KR" altLang="en-US" sz="1100" b="0" dirty="0">
                           <a:solidFill>
                             <a:schemeClr val="tx1"/>
                           </a:solidFill>
                         </a:rPr>
-                        <a:t>.</a:t>
+                        <a:t>타겟이 지정되어 있지 않다면</a:t>
                       </a:r>
+                      <a:r>
+                        <a:rPr lang="en-US" altLang="ko-KR" sz="1100" b="0" dirty="0">
+                          <a:solidFill>
+                            <a:schemeClr val="tx1"/>
+                          </a:solidFill>
+                        </a:rPr>
+                        <a:t>, </a:t>
+                      </a:r>
+                      <a:r>
+                        <a:rPr lang="ko-KR" altLang="en-US" sz="1100" b="0" dirty="0">
+                          <a:solidFill>
+                            <a:schemeClr val="tx1"/>
+                          </a:solidFill>
+                        </a:rPr>
+                        <a:t>타겟을 지정</a:t>
+                      </a:r>
+                      <a:endParaRPr lang="en-US" altLang="ko-KR" sz="1100" b="0" dirty="0">
+                        <a:solidFill>
+                          <a:schemeClr val="tx1"/>
+                        </a:solidFill>
+                      </a:endParaRPr>
+                    </a:p>
+                    <a:p>
+                      <a:pPr marL="171450" marR="0" lvl="0" indent="-171450" algn="l" defTabSz="914400" rtl="0" eaLnBrk="1" fontAlgn="auto" latinLnBrk="0" hangingPunct="1">
+                        <a:lnSpc>
+                          <a:spcPct val="100000"/>
+                        </a:lnSpc>
+                        <a:spcBef>
+                          <a:spcPts val="0"/>
+                        </a:spcBef>
+                        <a:spcAft>
+                          <a:spcPts val="0"/>
+                        </a:spcAft>
+                        <a:buClrTx/>
+                        <a:buSzTx/>
+                        <a:buFont typeface="Arial" panose="020B0604020202020204" pitchFamily="34" charset="0"/>
+                        <a:buChar char="•"/>
+                        <a:tabLst/>
+                        <a:defRPr/>
+                      </a:pPr>
+                      <a:r>
+                        <a:rPr lang="ko-KR" altLang="en-US" sz="1100" b="0" dirty="0">
+                          <a:solidFill>
+                            <a:schemeClr val="tx1"/>
+                          </a:solidFill>
+                        </a:rPr>
+                        <a:t>타겟이 지정되어 있으면</a:t>
+                      </a:r>
+                      <a:r>
+                        <a:rPr lang="en-US" altLang="ko-KR" sz="1100" b="0" dirty="0">
+                          <a:solidFill>
+                            <a:schemeClr val="tx1"/>
+                          </a:solidFill>
+                        </a:rPr>
+                        <a:t>, </a:t>
+                      </a:r>
+                      <a:r>
+                        <a:rPr lang="ko-KR" altLang="en-US" sz="1100" b="0" dirty="0">
+                          <a:solidFill>
+                            <a:schemeClr val="tx1"/>
+                          </a:solidFill>
+                        </a:rPr>
+                        <a:t>탐색에 성공할 때까지 </a:t>
+                      </a:r>
+                      <a:r>
+                        <a:rPr lang="en-US" altLang="ko-KR" sz="1100" b="0" dirty="0">
+                          <a:solidFill>
+                            <a:schemeClr val="tx1"/>
+                          </a:solidFill>
+                        </a:rPr>
+                        <a:t>4</a:t>
+                      </a:r>
+                      <a:r>
+                        <a:rPr lang="ko-KR" altLang="en-US" sz="1100" b="0" dirty="0">
+                          <a:solidFill>
+                            <a:schemeClr val="tx1"/>
+                          </a:solidFill>
+                        </a:rPr>
+                        <a:t>초에 한 번씩 목적지를 탐색</a:t>
+                      </a:r>
+                      <a:endParaRPr lang="en-US" altLang="ko-KR" sz="1100" b="0" dirty="0">
+                        <a:solidFill>
+                          <a:schemeClr val="tx1"/>
+                        </a:solidFill>
+                      </a:endParaRPr>
                     </a:p>
                   </a:txBody>
                   <a:tcPr anchor="ctr">
@@ -5687,7 +5650,7 @@
                     <a:p>
                       <a:pPr algn="l" latinLnBrk="0"/>
                       <a:r>
-                        <a:rPr lang="en-US" altLang="ko-KR" sz="1400" b="1" dirty="0">
+                        <a:rPr lang="en-US" altLang="ko-KR" sz="1100" b="1" dirty="0">
                           <a:solidFill>
                             <a:schemeClr val="tx1"/>
                           </a:solidFill>
@@ -5695,7 +5658,7 @@
                         <a:t>Staring</a:t>
                       </a:r>
                       <a:r>
-                        <a:rPr lang="ko-KR" altLang="en-US" sz="1400" b="1" dirty="0">
+                        <a:rPr lang="ko-KR" altLang="en-US" sz="1100" b="1" dirty="0">
                           <a:solidFill>
                             <a:schemeClr val="tx1"/>
                           </a:solidFill>
@@ -5703,7 +5666,7 @@
                         <a:t> </a:t>
                       </a:r>
                       <a:r>
-                        <a:rPr lang="en-US" altLang="ko-KR" sz="1400" b="1" dirty="0">
+                        <a:rPr lang="en-US" altLang="ko-KR" sz="1100" b="1" dirty="0">
                           <a:solidFill>
                             <a:schemeClr val="tx1"/>
                           </a:solidFill>
@@ -5711,7 +5674,7 @@
                         <a:t>(</a:t>
                       </a:r>
                       <a:r>
-                        <a:rPr lang="ko-KR" altLang="en-US" sz="1400" b="1" dirty="0">
+                        <a:rPr lang="ko-KR" altLang="en-US" sz="1100" b="1" dirty="0">
                           <a:solidFill>
                             <a:schemeClr val="tx1"/>
                           </a:solidFill>
@@ -5719,14 +5682,14 @@
                         <a:t>주시</a:t>
                       </a:r>
                       <a:r>
-                        <a:rPr lang="en-US" altLang="ko-KR" sz="1400" b="1" dirty="0">
+                        <a:rPr lang="en-US" altLang="ko-KR" sz="1100" b="1" dirty="0">
                           <a:solidFill>
                             <a:schemeClr val="tx1"/>
                           </a:solidFill>
                         </a:rPr>
                         <a:t>)</a:t>
                       </a:r>
-                      <a:endParaRPr lang="ko-KR" altLang="en-US" sz="1400" b="1" dirty="0">
+                      <a:endParaRPr lang="ko-KR" altLang="en-US" sz="1100" b="1" dirty="0">
                         <a:solidFill>
                           <a:schemeClr val="tx1"/>
                         </a:solidFill>
@@ -5782,9 +5745,12 @@
                     <a:bodyPr/>
                     <a:lstStyle/>
                     <a:p>
-                      <a:pPr algn="l" latinLnBrk="0"/>
+                      <a:pPr marL="171450" indent="-171450" algn="l" latinLnBrk="0">
+                        <a:buFont typeface="Arial" panose="020B0604020202020204" pitchFamily="34" charset="0"/>
+                        <a:buChar char="•"/>
+                      </a:pPr>
                       <a:r>
-                        <a:rPr lang="ko-KR" altLang="en-US" sz="1400" b="0" dirty="0">
+                        <a:rPr lang="ko-KR" altLang="en-US" sz="1100" b="0" dirty="0">
                           <a:solidFill>
                             <a:schemeClr val="tx1"/>
                           </a:solidFill>
@@ -5792,7 +5758,7 @@
                         <a:t>목적지에 </a:t>
                       </a:r>
                       <a:r>
-                        <a:rPr lang="ko-KR" altLang="en-US" sz="1400" b="0" dirty="0" err="1">
+                        <a:rPr lang="ko-KR" altLang="en-US" sz="1100" b="0" dirty="0" err="1">
                           <a:solidFill>
                             <a:schemeClr val="tx1"/>
                           </a:solidFill>
@@ -5800,21 +5766,18 @@
                         <a:t>스폰되어</a:t>
                       </a:r>
                       <a:r>
-                        <a:rPr lang="ko-KR" altLang="en-US" sz="1400" b="0" dirty="0">
+                        <a:rPr lang="ko-KR" altLang="en-US" sz="1100" b="0" dirty="0">
                           <a:solidFill>
                             <a:schemeClr val="tx1"/>
                           </a:solidFill>
                         </a:rPr>
-                        <a:t> 타겟을 주시한다</a:t>
+                        <a:t> 타겟을 주시</a:t>
                       </a:r>
-                      <a:r>
-                        <a:rPr lang="en-US" altLang="ko-KR" sz="1400" b="0" dirty="0">
-                          <a:solidFill>
-                            <a:schemeClr val="tx1"/>
-                          </a:solidFill>
-                        </a:rPr>
-                        <a:t>.</a:t>
-                      </a:r>
+                      <a:endParaRPr lang="en-US" altLang="ko-KR" sz="1100" b="0" dirty="0">
+                        <a:solidFill>
+                          <a:schemeClr val="tx1"/>
+                        </a:solidFill>
+                      </a:endParaRPr>
                     </a:p>
                   </a:txBody>
                   <a:tcPr anchor="ctr">
@@ -5873,30 +5836,46 @@
                     <a:p>
                       <a:pPr algn="l" latinLnBrk="0"/>
                       <a:r>
-                        <a:rPr lang="en-US" altLang="ko-KR" sz="1400" b="1" dirty="0">
+                        <a:rPr lang="en-US" altLang="ko-KR" sz="1100" b="1" dirty="0">
                           <a:solidFill>
                             <a:schemeClr val="tx1"/>
                           </a:solidFill>
                         </a:rPr>
-                        <a:t>Disappearing (</a:t>
+                        <a:t>Vanishing (</a:t>
                       </a:r>
                       <a:r>
-                        <a:rPr lang="ko-KR" altLang="en-US" sz="1400" b="1" dirty="0">
+                        <a:rPr lang="ko-KR" altLang="en-US" sz="1100" b="1" dirty="0">
                           <a:solidFill>
                             <a:schemeClr val="tx1"/>
                           </a:solidFill>
                         </a:rPr>
-                        <a:t>사라짐</a:t>
+                        <a:t>증발</a:t>
                       </a:r>
                       <a:r>
-                        <a:rPr lang="en-US" altLang="ko-KR" sz="1400" b="1" dirty="0">
+                        <a:rPr lang="en-US" altLang="ko-KR" sz="1100" b="1" dirty="0">
+                          <a:solidFill>
+                            <a:schemeClr val="tx1"/>
+                          </a:solidFill>
+                        </a:rPr>
+                        <a:t>, </a:t>
+                      </a:r>
+                      <a:r>
+                        <a:rPr lang="ko-KR" altLang="en-US" sz="1100" b="1" dirty="0">
+                          <a:solidFill>
+                            <a:schemeClr val="tx1"/>
+                          </a:solidFill>
+                        </a:rPr>
+                        <a:t>즉시 사라짐</a:t>
+                      </a:r>
+                      <a:r>
+                        <a:rPr lang="en-US" altLang="ko-KR" sz="1100" b="1" dirty="0">
                           <a:solidFill>
                             <a:schemeClr val="tx1"/>
                           </a:solidFill>
                         </a:rPr>
                         <a:t>)</a:t>
                       </a:r>
-                      <a:endParaRPr lang="ko-KR" altLang="en-US" sz="1400" b="1" dirty="0">
+                      <a:endParaRPr lang="ko-KR" altLang="en-US" sz="1100" b="1" dirty="0">
                         <a:solidFill>
                           <a:schemeClr val="tx1"/>
                         </a:solidFill>
@@ -5952,209 +5931,12 @@
                     <a:bodyPr/>
                     <a:lstStyle/>
                     <a:p>
-                      <a:pPr marL="285750" indent="-285750" algn="l" latinLnBrk="0">
-                        <a:buFontTx/>
-                        <a:buChar char="-"/>
+                      <a:pPr marL="171450" indent="-171450" algn="l" latinLnBrk="0">
+                        <a:buFont typeface="Arial" panose="020B0604020202020204" pitchFamily="34" charset="0"/>
+                        <a:buChar char="•"/>
                       </a:pPr>
                       <a:r>
-                        <a:rPr lang="ko-KR" altLang="en-US" sz="1400" b="0" dirty="0">
-                          <a:solidFill>
-                            <a:schemeClr val="tx1"/>
-                          </a:solidFill>
-                        </a:rPr>
-                        <a:t>목적지를 탐색한다</a:t>
-                      </a:r>
-                      <a:r>
-                        <a:rPr lang="en-US" altLang="ko-KR" sz="1400" b="0" dirty="0">
-                          <a:solidFill>
-                            <a:schemeClr val="tx1"/>
-                          </a:solidFill>
-                        </a:rPr>
-                        <a:t>.</a:t>
-                      </a:r>
-                    </a:p>
-                    <a:p>
-                      <a:pPr marL="285750" indent="-285750" algn="l" latinLnBrk="0">
-                        <a:buFontTx/>
-                        <a:buChar char="-"/>
-                      </a:pPr>
-                      <a:r>
-                        <a:rPr lang="ko-KR" altLang="en-US" sz="1400" b="0" dirty="0">
-                          <a:solidFill>
-                            <a:schemeClr val="tx1"/>
-                          </a:solidFill>
-                        </a:rPr>
-                        <a:t>목적지 탐색에 성공하여 목적지로 이동한다</a:t>
-                      </a:r>
-                      <a:r>
-                        <a:rPr lang="en-US" altLang="ko-KR" sz="1400" b="0" dirty="0">
-                          <a:solidFill>
-                            <a:schemeClr val="tx1"/>
-                          </a:solidFill>
-                        </a:rPr>
-                        <a:t>.</a:t>
-                      </a:r>
-                      <a:endParaRPr lang="ko-KR" altLang="en-US" sz="1400" b="0" dirty="0">
-                        <a:solidFill>
-                          <a:schemeClr val="tx1"/>
-                        </a:solidFill>
-                      </a:endParaRPr>
-                    </a:p>
-                  </a:txBody>
-                  <a:tcPr anchor="ctr">
-                    <a:lnL w="12700" cap="flat" cmpd="sng" algn="ctr">
-                      <a:solidFill>
-                        <a:schemeClr val="tx1"/>
-                      </a:solidFill>
-                      <a:prstDash val="solid"/>
-                      <a:round/>
-                      <a:headEnd type="none" w="med" len="med"/>
-                      <a:tailEnd type="none" w="med" len="med"/>
-                    </a:lnL>
-                    <a:lnR w="12700" cap="flat" cmpd="sng" algn="ctr">
-                      <a:solidFill>
-                        <a:schemeClr val="tx1"/>
-                      </a:solidFill>
-                      <a:prstDash val="solid"/>
-                      <a:round/>
-                      <a:headEnd type="none" w="med" len="med"/>
-                      <a:tailEnd type="none" w="med" len="med"/>
-                    </a:lnR>
-                    <a:lnT w="12700" cap="flat" cmpd="sng" algn="ctr">
-                      <a:solidFill>
-                        <a:schemeClr val="tx1"/>
-                      </a:solidFill>
-                      <a:prstDash val="solid"/>
-                      <a:round/>
-                      <a:headEnd type="none" w="med" len="med"/>
-                      <a:tailEnd type="none" w="med" len="med"/>
-                    </a:lnT>
-                    <a:lnB w="12700" cap="flat" cmpd="sng" algn="ctr">
-                      <a:solidFill>
-                        <a:schemeClr val="tx1"/>
-                      </a:solidFill>
-                      <a:prstDash val="solid"/>
-                      <a:round/>
-                      <a:headEnd type="none" w="med" len="med"/>
-                      <a:tailEnd type="none" w="med" len="med"/>
-                    </a:lnB>
-                    <a:solidFill>
-                      <a:schemeClr val="bg1"/>
-                    </a:solidFill>
-                  </a:tcPr>
-                </a:tc>
-                <a:extLst>
-                  <a:ext uri="{0D108BD9-81ED-4DB2-BD59-A6C34878D82A}">
-                    <a16:rowId xmlns:a16="http://schemas.microsoft.com/office/drawing/2014/main" val="2549169645"/>
-                  </a:ext>
-                </a:extLst>
-              </a:tr>
-              <a:tr h="303433">
-                <a:tc>
-                  <a:txBody>
-                    <a:bodyPr/>
-                    <a:lstStyle/>
-                    <a:p>
-                      <a:pPr algn="l" latinLnBrk="0"/>
-                      <a:r>
-                        <a:rPr lang="en-US" altLang="ko-KR" sz="1400" b="1" dirty="0">
-                          <a:solidFill>
-                            <a:schemeClr val="tx1"/>
-                          </a:solidFill>
-                        </a:rPr>
-                        <a:t>Vanishing (</a:t>
-                      </a:r>
-                      <a:r>
-                        <a:rPr lang="ko-KR" altLang="en-US" sz="1400" b="1" dirty="0">
-                          <a:solidFill>
-                            <a:schemeClr val="tx1"/>
-                          </a:solidFill>
-                        </a:rPr>
-                        <a:t>증발</a:t>
-                      </a:r>
-                      <a:r>
-                        <a:rPr lang="en-US" altLang="ko-KR" sz="1400" b="1" dirty="0">
-                          <a:solidFill>
-                            <a:schemeClr val="tx1"/>
-                          </a:solidFill>
-                        </a:rPr>
-                        <a:t>, </a:t>
-                      </a:r>
-                      <a:r>
-                        <a:rPr lang="ko-KR" altLang="en-US" sz="1400" b="1" dirty="0">
-                          <a:solidFill>
-                            <a:schemeClr val="tx1"/>
-                          </a:solidFill>
-                        </a:rPr>
-                        <a:t>즉시 사라짐</a:t>
-                      </a:r>
-                      <a:r>
-                        <a:rPr lang="en-US" altLang="ko-KR" sz="1400" b="1" dirty="0">
-                          <a:solidFill>
-                            <a:schemeClr val="tx1"/>
-                          </a:solidFill>
-                        </a:rPr>
-                        <a:t>)</a:t>
-                      </a:r>
-                      <a:endParaRPr lang="ko-KR" altLang="en-US" sz="1400" b="1" dirty="0">
-                        <a:solidFill>
-                          <a:schemeClr val="tx1"/>
-                        </a:solidFill>
-                      </a:endParaRPr>
-                    </a:p>
-                  </a:txBody>
-                  <a:tcPr anchor="ctr">
-                    <a:lnL w="12700" cap="flat" cmpd="sng" algn="ctr">
-                      <a:solidFill>
-                        <a:schemeClr val="tx1"/>
-                      </a:solidFill>
-                      <a:prstDash val="solid"/>
-                      <a:round/>
-                      <a:headEnd type="none" w="med" len="med"/>
-                      <a:tailEnd type="none" w="med" len="med"/>
-                    </a:lnL>
-                    <a:lnR w="12700" cap="flat" cmpd="sng" algn="ctr">
-                      <a:solidFill>
-                        <a:schemeClr val="tx1"/>
-                      </a:solidFill>
-                      <a:prstDash val="solid"/>
-                      <a:round/>
-                      <a:headEnd type="none" w="med" len="med"/>
-                      <a:tailEnd type="none" w="med" len="med"/>
-                    </a:lnR>
-                    <a:lnT w="12700" cap="flat" cmpd="sng" algn="ctr">
-                      <a:solidFill>
-                        <a:schemeClr val="tx1"/>
-                      </a:solidFill>
-                      <a:prstDash val="solid"/>
-                      <a:round/>
-                      <a:headEnd type="none" w="med" len="med"/>
-                      <a:tailEnd type="none" w="med" len="med"/>
-                    </a:lnT>
-                    <a:lnB w="12700" cap="flat" cmpd="sng" algn="ctr">
-                      <a:solidFill>
-                        <a:schemeClr val="tx1"/>
-                      </a:solidFill>
-                      <a:prstDash val="solid"/>
-                      <a:round/>
-                      <a:headEnd type="none" w="med" len="med"/>
-                      <a:tailEnd type="none" w="med" len="med"/>
-                    </a:lnB>
-                    <a:solidFill>
-                      <a:schemeClr val="bg1">
-                        <a:lumMod val="85000"/>
-                      </a:schemeClr>
-                    </a:solidFill>
-                  </a:tcPr>
-                </a:tc>
-                <a:tc>
-                  <a:txBody>
-                    <a:bodyPr/>
-                    <a:lstStyle/>
-                    <a:p>
-                      <a:pPr algn="l" latinLnBrk="0"/>
-                      <a:r>
-                        <a:rPr lang="ko-KR" altLang="en-US" sz="1400" b="0" dirty="0">
+                        <a:rPr lang="ko-KR" altLang="en-US" sz="1100" b="0" dirty="0">
                           <a:solidFill>
                             <a:schemeClr val="tx1"/>
                           </a:solidFill>
@@ -6162,15 +5944,21 @@
                         <a:t>해당 위치에서 즉시 사라진다</a:t>
                       </a:r>
                       <a:r>
-                        <a:rPr lang="en-US" altLang="ko-KR" sz="1400" b="0" dirty="0">
+                        <a:rPr lang="en-US" altLang="ko-KR" sz="1100" b="0" dirty="0">
                           <a:solidFill>
                             <a:schemeClr val="tx1"/>
                           </a:solidFill>
                         </a:rPr>
                         <a:t>. </a:t>
                       </a:r>
+                    </a:p>
+                    <a:p>
+                      <a:pPr marL="171450" indent="-171450" algn="l" latinLnBrk="0">
+                        <a:buFont typeface="Arial" panose="020B0604020202020204" pitchFamily="34" charset="0"/>
+                        <a:buChar char="•"/>
+                      </a:pPr>
                       <a:r>
-                        <a:rPr lang="ko-KR" altLang="en-US" sz="1400" b="0" dirty="0" err="1">
+                        <a:rPr lang="ko-KR" altLang="en-US" sz="1100" b="0" dirty="0" err="1">
                           <a:solidFill>
                             <a:schemeClr val="tx1"/>
                           </a:solidFill>
@@ -6178,7 +5966,7 @@
                         <a:t>맵에</a:t>
                       </a:r>
                       <a:r>
-                        <a:rPr lang="ko-KR" altLang="en-US" sz="1400" b="0" dirty="0">
+                        <a:rPr lang="ko-KR" altLang="en-US" sz="1100" b="0" dirty="0">
                           <a:solidFill>
                             <a:schemeClr val="tx1"/>
                           </a:solidFill>
@@ -6186,7 +5974,7 @@
                         <a:t> 특수한 효과</a:t>
                       </a:r>
                       <a:r>
-                        <a:rPr lang="en-US" altLang="ko-KR" sz="1400" b="0" dirty="0">
+                        <a:rPr lang="en-US" altLang="ko-KR" sz="1100" b="0" dirty="0">
                           <a:solidFill>
                             <a:schemeClr val="tx1"/>
                           </a:solidFill>
@@ -6194,7 +5982,7 @@
                         <a:t>(Vanishing </a:t>
                       </a:r>
                       <a:r>
-                        <a:rPr lang="ko-KR" altLang="en-US" sz="1400" b="0" dirty="0">
+                        <a:rPr lang="ko-KR" altLang="en-US" sz="1100" b="0" dirty="0">
                           <a:solidFill>
                             <a:schemeClr val="tx1"/>
                           </a:solidFill>
@@ -6202,7 +5990,7 @@
                         <a:t>상태가 된 방의 조명이 </a:t>
                       </a:r>
                       <a:r>
-                        <a:rPr lang="ko-KR" altLang="en-US" sz="1400" b="0" dirty="0" err="1">
+                        <a:rPr lang="ko-KR" altLang="en-US" sz="1100" b="0" dirty="0" err="1">
                           <a:solidFill>
                             <a:schemeClr val="tx1"/>
                           </a:solidFill>
@@ -6210,7 +5998,7 @@
                         <a:t>깜빡거림</a:t>
                       </a:r>
                       <a:r>
-                        <a:rPr lang="en-US" altLang="ko-KR" sz="1400" b="0" dirty="0">
+                        <a:rPr lang="en-US" altLang="ko-KR" sz="1100" b="0" dirty="0">
                           <a:solidFill>
                             <a:schemeClr val="tx1"/>
                           </a:solidFill>
@@ -6218,7 +6006,7 @@
                         <a:t>)</a:t>
                       </a:r>
                       <a:r>
-                        <a:rPr lang="ko-KR" altLang="en-US" sz="1400" b="0" dirty="0">
+                        <a:rPr lang="ko-KR" altLang="en-US" sz="1100" b="0" dirty="0">
                           <a:solidFill>
                             <a:schemeClr val="tx1"/>
                           </a:solidFill>
@@ -6226,14 +6014,14 @@
                         <a:t>가 나타난다</a:t>
                       </a:r>
                       <a:r>
-                        <a:rPr lang="en-US" altLang="ko-KR" sz="1400" b="0" dirty="0">
+                        <a:rPr lang="en-US" altLang="ko-KR" sz="1100" b="0" dirty="0">
                           <a:solidFill>
                             <a:schemeClr val="tx1"/>
                           </a:solidFill>
                         </a:rPr>
                         <a:t>.</a:t>
                       </a:r>
-                      <a:endParaRPr lang="ko-KR" altLang="en-US" sz="1400" b="0" dirty="0">
+                      <a:endParaRPr lang="ko-KR" altLang="en-US" sz="1100" b="0" dirty="0">
                         <a:solidFill>
                           <a:schemeClr val="tx1"/>
                         </a:solidFill>
@@ -6296,7 +6084,7 @@
                     <a:p>
                       <a:pPr algn="l" latinLnBrk="0"/>
                       <a:r>
-                        <a:rPr lang="en-US" altLang="ko-KR" sz="1400" b="1" dirty="0">
+                        <a:rPr lang="en-US" altLang="ko-KR" sz="1100" b="1" dirty="0">
                           <a:solidFill>
                             <a:schemeClr val="tx1"/>
                           </a:solidFill>
@@ -6304,7 +6092,7 @@
                         <a:t>Chase (</a:t>
                       </a:r>
                       <a:r>
-                        <a:rPr lang="ko-KR" altLang="en-US" sz="1400" b="1" dirty="0">
+                        <a:rPr lang="ko-KR" altLang="en-US" sz="1100" b="1" dirty="0">
                           <a:solidFill>
                             <a:schemeClr val="tx1"/>
                           </a:solidFill>
@@ -6312,14 +6100,14 @@
                         <a:t>추적</a:t>
                       </a:r>
                       <a:r>
-                        <a:rPr lang="en-US" altLang="ko-KR" sz="1400" b="1" dirty="0">
+                        <a:rPr lang="en-US" altLang="ko-KR" sz="1100" b="1" dirty="0">
                           <a:solidFill>
                             <a:schemeClr val="tx1"/>
                           </a:solidFill>
                         </a:rPr>
                         <a:t>)</a:t>
                       </a:r>
-                      <a:endParaRPr lang="ko-KR" altLang="en-US" sz="1400" b="1" dirty="0">
+                      <a:endParaRPr lang="ko-KR" altLang="en-US" sz="1100" b="1" dirty="0">
                         <a:solidFill>
                           <a:schemeClr val="tx1"/>
                         </a:solidFill>
@@ -6375,12 +6163,12 @@
                     <a:bodyPr/>
                     <a:lstStyle/>
                     <a:p>
-                      <a:pPr marL="285750" indent="-285750" algn="l" latinLnBrk="0">
-                        <a:buFontTx/>
-                        <a:buChar char="-"/>
+                      <a:pPr marL="171450" indent="-171450" algn="l" latinLnBrk="0">
+                        <a:buFont typeface="Arial" panose="020B0604020202020204" pitchFamily="34" charset="0"/>
+                        <a:buChar char="•"/>
                       </a:pPr>
                       <a:r>
-                        <a:rPr lang="ko-KR" altLang="en-US" sz="1400" b="0" dirty="0">
+                        <a:rPr lang="ko-KR" altLang="en-US" sz="1100" b="0" dirty="0">
                           <a:solidFill>
                             <a:schemeClr val="tx1"/>
                           </a:solidFill>
@@ -6388,7 +6176,7 @@
                         <a:t>타겟을 쫓아간다</a:t>
                       </a:r>
                       <a:r>
-                        <a:rPr lang="en-US" altLang="ko-KR" sz="1400" b="0" dirty="0">
+                        <a:rPr lang="en-US" altLang="ko-KR" sz="1100" b="0" dirty="0">
                           <a:solidFill>
                             <a:schemeClr val="tx1"/>
                           </a:solidFill>
@@ -6397,12 +6185,12 @@
                       </a:r>
                     </a:p>
                     <a:p>
-                      <a:pPr marL="285750" indent="-285750" algn="l" latinLnBrk="0">
-                        <a:buFontTx/>
-                        <a:buChar char="-"/>
+                      <a:pPr marL="171450" indent="-171450" algn="l" latinLnBrk="0">
+                        <a:buFont typeface="Arial" panose="020B0604020202020204" pitchFamily="34" charset="0"/>
+                        <a:buChar char="•"/>
                       </a:pPr>
                       <a:r>
-                        <a:rPr lang="ko-KR" altLang="en-US" sz="1400" b="0" dirty="0">
+                        <a:rPr lang="ko-KR" altLang="en-US" sz="1100" b="0" dirty="0">
                           <a:solidFill>
                             <a:schemeClr val="tx1"/>
                           </a:solidFill>
@@ -6410,7 +6198,7 @@
                         <a:t>타겟에 닿으면 </a:t>
                       </a:r>
                       <a:r>
-                        <a:rPr lang="en-US" altLang="ko-KR" sz="1400" b="0" dirty="0">
+                        <a:rPr lang="en-US" altLang="ko-KR" sz="1100" b="0" dirty="0">
                           <a:solidFill>
                             <a:schemeClr val="tx1"/>
                           </a:solidFill>
@@ -6418,7 +6206,7 @@
                         <a:t>HP</a:t>
                       </a:r>
                       <a:r>
-                        <a:rPr lang="ko-KR" altLang="en-US" sz="1400" b="0" dirty="0">
+                        <a:rPr lang="ko-KR" altLang="en-US" sz="1100" b="0" dirty="0">
                           <a:solidFill>
                             <a:schemeClr val="tx1"/>
                           </a:solidFill>
@@ -6426,14 +6214,14 @@
                         <a:t>를 감소시킨다</a:t>
                       </a:r>
                       <a:r>
-                        <a:rPr lang="en-US" altLang="ko-KR" sz="1400" b="0" dirty="0">
+                        <a:rPr lang="en-US" altLang="ko-KR" sz="1100" b="0" dirty="0">
                           <a:solidFill>
                             <a:schemeClr val="tx1"/>
                           </a:solidFill>
                         </a:rPr>
                         <a:t>.</a:t>
                       </a:r>
-                      <a:endParaRPr lang="ko-KR" altLang="en-US" sz="1400" b="0" dirty="0">
+                      <a:endParaRPr lang="ko-KR" altLang="en-US" sz="1100" b="0" dirty="0">
                         <a:solidFill>
                           <a:schemeClr val="tx1"/>
                         </a:solidFill>
@@ -6507,14 +6295,14 @@
           <p:nvPr>
             <p:extLst>
               <p:ext uri="{D42A27DB-BD31-4B8C-83A1-F6EECF244321}">
-                <p14:modId xmlns:p14="http://schemas.microsoft.com/office/powerpoint/2010/main" val="3386330806"/>
+                <p14:modId xmlns:p14="http://schemas.microsoft.com/office/powerpoint/2010/main" val="340643566"/>
               </p:ext>
             </p:extLst>
           </p:nvPr>
         </p:nvGraphicFramePr>
         <p:xfrm>
-          <a:off x="8498891" y="119158"/>
-          <a:ext cx="3502609" cy="3566160"/>
+          <a:off x="1892300" y="3066556"/>
+          <a:ext cx="8359254" cy="3616184"/>
         </p:xfrm>
         <a:graphic>
           <a:graphicData uri="http://schemas.openxmlformats.org/drawingml/2006/table">
@@ -6523,7 +6311,7 @@
                 <a:tableStyleId>{5C22544A-7EE6-4342-B048-85BDC9FD1C3A}</a:tableStyleId>
               </a:tblPr>
               <a:tblGrid>
-                <a:gridCol w="2135636">
+                <a:gridCol w="1851343">
                   <a:extLst>
                     <a:ext uri="{9D8B030D-6E8A-4147-A177-3AD203B41FA5}">
                       <a16:colId xmlns:a16="http://schemas.microsoft.com/office/drawing/2014/main" val="3126723540"/>
@@ -6537,10 +6325,17 @@
                     </a:ext>
                   </a:extLst>
                 </a:gridCol>
-                <a:gridCol w="764358">
+                <a:gridCol w="481330">
                   <a:extLst>
                     <a:ext uri="{9D8B030D-6E8A-4147-A177-3AD203B41FA5}">
                       <a16:colId xmlns:a16="http://schemas.microsoft.com/office/drawing/2014/main" val="1821012966"/>
+                    </a:ext>
+                  </a:extLst>
+                </a:gridCol>
+                <a:gridCol w="5423966">
+                  <a:extLst>
+                    <a:ext uri="{9D8B030D-6E8A-4147-A177-3AD203B41FA5}">
+                      <a16:colId xmlns:a16="http://schemas.microsoft.com/office/drawing/2014/main" val="3693825494"/>
                     </a:ext>
                   </a:extLst>
                 </a:gridCol>
@@ -6553,14 +6348,14 @@
                     <a:p>
                       <a:pPr algn="ctr" latinLnBrk="0"/>
                       <a:r>
-                        <a:rPr lang="en-US" altLang="ko-KR" sz="1400" b="1" dirty="0">
+                        <a:rPr lang="en-US" altLang="ko-KR" sz="1100" b="1" dirty="0">
                           <a:solidFill>
                             <a:schemeClr val="tx1"/>
                           </a:solidFill>
                         </a:rPr>
                         <a:t>Stat</a:t>
                       </a:r>
-                      <a:endParaRPr lang="ko-KR" altLang="en-US" sz="1400" b="1" dirty="0">
+                      <a:endParaRPr lang="ko-KR" altLang="en-US" sz="1100" b="1" dirty="0">
                         <a:solidFill>
                           <a:schemeClr val="tx1"/>
                         </a:solidFill>
@@ -6723,6 +6518,61 @@
                     </a:solidFill>
                   </a:tcPr>
                 </a:tc>
+                <a:tc>
+                  <a:txBody>
+                    <a:bodyPr/>
+                    <a:lstStyle/>
+                    <a:p>
+                      <a:pPr algn="ctr" latinLnBrk="0"/>
+                      <a:endParaRPr lang="ko-KR" altLang="en-US" sz="1100" b="1" dirty="0">
+                        <a:solidFill>
+                          <a:schemeClr val="tx1"/>
+                        </a:solidFill>
+                      </a:endParaRPr>
+                    </a:p>
+                  </a:txBody>
+                  <a:tcPr anchor="ctr">
+                    <a:lnL w="12700" cap="flat" cmpd="sng" algn="ctr">
+                      <a:solidFill>
+                        <a:schemeClr val="tx1"/>
+                      </a:solidFill>
+                      <a:prstDash val="solid"/>
+                      <a:round/>
+                      <a:headEnd type="none" w="med" len="med"/>
+                      <a:tailEnd type="none" w="med" len="med"/>
+                    </a:lnL>
+                    <a:lnR w="12700" cap="flat" cmpd="sng" algn="ctr">
+                      <a:solidFill>
+                        <a:schemeClr val="tx1"/>
+                      </a:solidFill>
+                      <a:prstDash val="solid"/>
+                      <a:round/>
+                      <a:headEnd type="none" w="med" len="med"/>
+                      <a:tailEnd type="none" w="med" len="med"/>
+                    </a:lnR>
+                    <a:lnT w="12700" cap="flat" cmpd="sng" algn="ctr">
+                      <a:solidFill>
+                        <a:schemeClr val="tx1"/>
+                      </a:solidFill>
+                      <a:prstDash val="solid"/>
+                      <a:round/>
+                      <a:headEnd type="none" w="med" len="med"/>
+                      <a:tailEnd type="none" w="med" len="med"/>
+                    </a:lnT>
+                    <a:lnB w="12700" cap="flat" cmpd="sng" algn="ctr">
+                      <a:solidFill>
+                        <a:schemeClr val="tx1"/>
+                      </a:solidFill>
+                      <a:prstDash val="solid"/>
+                      <a:round/>
+                      <a:headEnd type="none" w="med" len="med"/>
+                      <a:tailEnd type="none" w="med" len="med"/>
+                    </a:lnB>
+                    <a:solidFill>
+                      <a:schemeClr val="bg1"/>
+                    </a:solidFill>
+                  </a:tcPr>
+                </a:tc>
                 <a:extLst>
                   <a:ext uri="{0D108BD9-81ED-4DB2-BD59-A6C34878D82A}">
                     <a16:rowId xmlns:a16="http://schemas.microsoft.com/office/drawing/2014/main" val="2035426105"/>
@@ -6737,7 +6587,7 @@
                     <a:p>
                       <a:pPr algn="ctr" latinLnBrk="0"/>
                       <a:r>
-                        <a:rPr lang="ko-KR" altLang="en-US" sz="1400" b="0" dirty="0">
+                        <a:rPr lang="ko-KR" altLang="en-US" sz="1100" b="0" dirty="0">
                           <a:solidFill>
                             <a:schemeClr val="tx1"/>
                           </a:solidFill>
@@ -6797,14 +6647,14 @@
                     <a:p>
                       <a:pPr algn="ctr" latinLnBrk="0"/>
                       <a:r>
-                        <a:rPr lang="en-US" altLang="ko-KR" sz="1400" b="0" dirty="0">
+                        <a:rPr lang="en-US" altLang="ko-KR" sz="1100" b="0" dirty="0">
                           <a:solidFill>
                             <a:schemeClr val="tx1"/>
                           </a:solidFill>
                         </a:rPr>
                         <a:t>type</a:t>
                       </a:r>
-                      <a:endParaRPr lang="ko-KR" altLang="en-US" sz="1400" b="0" dirty="0">
+                      <a:endParaRPr lang="ko-KR" altLang="en-US" sz="1100" b="0" dirty="0">
                         <a:solidFill>
                           <a:schemeClr val="tx1"/>
                         </a:solidFill>
@@ -6862,12 +6712,72 @@
                     <a:p>
                       <a:pPr algn="ctr" latinLnBrk="0"/>
                       <a:r>
-                        <a:rPr lang="ko-KR" altLang="en-US" sz="1400" b="0" dirty="0">
+                        <a:rPr lang="ko-KR" altLang="en-US" sz="1100" b="0" dirty="0">
                           <a:solidFill>
                             <a:schemeClr val="tx1"/>
                           </a:solidFill>
                         </a:rPr>
                         <a:t>값</a:t>
+                      </a:r>
+                    </a:p>
+                  </a:txBody>
+                  <a:tcPr anchor="ctr">
+                    <a:lnL w="12700" cap="flat" cmpd="sng" algn="ctr">
+                      <a:solidFill>
+                        <a:schemeClr val="tx1"/>
+                      </a:solidFill>
+                      <a:prstDash val="solid"/>
+                      <a:round/>
+                      <a:headEnd type="none" w="med" len="med"/>
+                      <a:tailEnd type="none" w="med" len="med"/>
+                    </a:lnL>
+                    <a:lnR w="12700" cap="flat" cmpd="sng" algn="ctr">
+                      <a:solidFill>
+                        <a:schemeClr val="tx1"/>
+                      </a:solidFill>
+                      <a:prstDash val="solid"/>
+                      <a:round/>
+                      <a:headEnd type="none" w="med" len="med"/>
+                      <a:tailEnd type="none" w="med" len="med"/>
+                    </a:lnR>
+                    <a:lnT w="12700" cap="flat" cmpd="sng" algn="ctr">
+                      <a:solidFill>
+                        <a:schemeClr val="tx1"/>
+                      </a:solidFill>
+                      <a:prstDash val="solid"/>
+                      <a:round/>
+                      <a:headEnd type="none" w="med" len="med"/>
+                      <a:tailEnd type="none" w="med" len="med"/>
+                    </a:lnT>
+                    <a:lnB w="12700" cap="flat" cmpd="sng" algn="ctr">
+                      <a:solidFill>
+                        <a:schemeClr val="tx1"/>
+                      </a:solidFill>
+                      <a:prstDash val="solid"/>
+                      <a:round/>
+                      <a:headEnd type="none" w="med" len="med"/>
+                      <a:tailEnd type="none" w="med" len="med"/>
+                    </a:lnB>
+                    <a:solidFill>
+                      <a:schemeClr val="bg1">
+                        <a:lumMod val="75000"/>
+                      </a:schemeClr>
+                    </a:solidFill>
+                  </a:tcPr>
+                </a:tc>
+                <a:tc>
+                  <a:txBody>
+                    <a:bodyPr/>
+                    <a:lstStyle/>
+                    <a:p>
+                      <a:pPr algn="ctr" latinLnBrk="0"/>
+                      <a:r>
+                        <a:rPr lang="ko-KR" altLang="en-US" sz="1100" b="0" dirty="0">
+                          <a:solidFill>
+                            <a:schemeClr val="tx1"/>
+                          </a:solidFill>
+                        </a:rPr>
+                        <a:t>설명</a:t>
                       </a:r>
                     </a:p>
                   </a:txBody>
@@ -6929,7 +6839,7 @@
                     <a:p>
                       <a:pPr algn="l" latinLnBrk="0"/>
                       <a:r>
-                        <a:rPr lang="ko-KR" altLang="en-US" sz="1400" b="1" dirty="0">
+                        <a:rPr lang="ko-KR" altLang="en-US" sz="1100" b="1" dirty="0">
                           <a:solidFill>
                             <a:schemeClr val="tx1"/>
                           </a:solidFill>
@@ -6937,7 +6847,7 @@
                         <a:t>최대 </a:t>
                       </a:r>
                       <a:r>
-                        <a:rPr lang="ko-KR" altLang="en-US" sz="1400" b="1" dirty="0" err="1">
+                        <a:rPr lang="ko-KR" altLang="en-US" sz="1100" b="1" dirty="0" err="1">
                           <a:solidFill>
                             <a:schemeClr val="tx1"/>
                           </a:solidFill>
@@ -6945,7 +6855,7 @@
                         <a:t>스폰</a:t>
                       </a:r>
                       <a:r>
-                        <a:rPr lang="ko-KR" altLang="en-US" sz="1400" b="1" dirty="0">
+                        <a:rPr lang="ko-KR" altLang="en-US" sz="1100" b="1" dirty="0">
                           <a:solidFill>
                             <a:schemeClr val="tx1"/>
                           </a:solidFill>
@@ -7005,14 +6915,14 @@
                     <a:p>
                       <a:pPr algn="ctr" latinLnBrk="0"/>
                       <a:r>
-                        <a:rPr lang="en-US" altLang="ko-KR" sz="1400" b="0" dirty="0">
+                        <a:rPr lang="en-US" altLang="ko-KR" sz="1100" b="0" dirty="0">
                           <a:solidFill>
                             <a:schemeClr val="tx1"/>
                           </a:solidFill>
                         </a:rPr>
                         <a:t>int</a:t>
                       </a:r>
-                      <a:endParaRPr lang="ko-KR" altLang="en-US" sz="1400" b="0" dirty="0">
+                      <a:endParaRPr lang="ko-KR" altLang="en-US" sz="1100" b="0" dirty="0">
                         <a:solidFill>
                           <a:schemeClr val="tx1"/>
                         </a:solidFill>
@@ -7068,14 +6978,72 @@
                     <a:p>
                       <a:pPr algn="ctr" latinLnBrk="0"/>
                       <a:r>
-                        <a:rPr lang="en-US" altLang="ko-KR" sz="1400" b="0" dirty="0">
+                        <a:rPr lang="en-US" altLang="ko-KR" sz="1100" b="0" dirty="0">
                           <a:solidFill>
                             <a:schemeClr val="tx1"/>
                           </a:solidFill>
                         </a:rPr>
                         <a:t>1</a:t>
                       </a:r>
-                      <a:endParaRPr lang="ko-KR" altLang="en-US" sz="1400" b="0" dirty="0">
+                      <a:endParaRPr lang="ko-KR" altLang="en-US" sz="1100" b="0" dirty="0">
+                        <a:solidFill>
+                          <a:schemeClr val="tx1"/>
+                        </a:solidFill>
+                      </a:endParaRPr>
+                    </a:p>
+                  </a:txBody>
+                  <a:tcPr anchor="ctr">
+                    <a:lnL w="12700" cap="flat" cmpd="sng" algn="ctr">
+                      <a:solidFill>
+                        <a:schemeClr val="tx1"/>
+                      </a:solidFill>
+                      <a:prstDash val="solid"/>
+                      <a:round/>
+                      <a:headEnd type="none" w="med" len="med"/>
+                      <a:tailEnd type="none" w="med" len="med"/>
+                    </a:lnL>
+                    <a:lnR w="12700" cap="flat" cmpd="sng" algn="ctr">
+                      <a:solidFill>
+                        <a:schemeClr val="tx1"/>
+                      </a:solidFill>
+                      <a:prstDash val="solid"/>
+                      <a:round/>
+                      <a:headEnd type="none" w="med" len="med"/>
+                      <a:tailEnd type="none" w="med" len="med"/>
+                    </a:lnR>
+                    <a:lnT w="12700" cap="flat" cmpd="sng" algn="ctr">
+                      <a:solidFill>
+                        <a:schemeClr val="tx1"/>
+                      </a:solidFill>
+                      <a:prstDash val="solid"/>
+                      <a:round/>
+                      <a:headEnd type="none" w="med" len="med"/>
+                      <a:tailEnd type="none" w="med" len="med"/>
+                    </a:lnT>
+                    <a:lnB w="12700" cap="flat" cmpd="sng" algn="ctr">
+                      <a:solidFill>
+                        <a:schemeClr val="tx1"/>
+                      </a:solidFill>
+                      <a:prstDash val="solid"/>
+                      <a:round/>
+                      <a:headEnd type="none" w="med" len="med"/>
+                      <a:tailEnd type="none" w="med" len="med"/>
+                    </a:lnB>
+                    <a:solidFill>
+                      <a:schemeClr val="bg1"/>
+                    </a:solidFill>
+                  </a:tcPr>
+                </a:tc>
+                <a:tc>
+                  <a:txBody>
+                    <a:bodyPr/>
+                    <a:lstStyle/>
+                    <a:p>
+                      <a:pPr marL="171450" indent="-171450" algn="l" latinLnBrk="0">
+                        <a:buFont typeface="Arial" panose="020B0604020202020204" pitchFamily="34" charset="0"/>
+                        <a:buChar char="•"/>
+                      </a:pPr>
+                      <a:endParaRPr lang="ko-KR" altLang="en-US" sz="1000" b="0" dirty="0">
                         <a:solidFill>
                           <a:schemeClr val="tx1"/>
                         </a:solidFill>
@@ -7138,13 +7106,26 @@
                     <a:p>
                       <a:pPr algn="l" latinLnBrk="0"/>
                       <a:r>
-                        <a:rPr lang="ko-KR" altLang="en-US" sz="1400" b="1" dirty="0">
+                        <a:rPr lang="ko-KR" altLang="en-US" sz="1100" b="1" dirty="0">
                           <a:solidFill>
                             <a:schemeClr val="tx1"/>
                           </a:solidFill>
                         </a:rPr>
-                        <a:t>공격력</a:t>
+                        <a:t>타겟 플레이어 </a:t>
                       </a:r>
+                      <a:r>
+                        <a:rPr lang="en-US" altLang="ko-KR" sz="1100" b="1" dirty="0">
+                          <a:solidFill>
+                            <a:schemeClr val="tx1"/>
+                          </a:solidFill>
+                        </a:rPr>
+                        <a:t>ID</a:t>
+                      </a:r>
+                      <a:endParaRPr lang="ko-KR" altLang="en-US" sz="1100" b="1" dirty="0">
+                        <a:solidFill>
+                          <a:schemeClr val="tx1"/>
+                        </a:solidFill>
+                      </a:endParaRPr>
                     </a:p>
                   </a:txBody>
                   <a:tcPr anchor="ctr">
@@ -7198,14 +7179,14 @@
                     <a:p>
                       <a:pPr algn="ctr" latinLnBrk="0"/>
                       <a:r>
-                        <a:rPr lang="en-US" altLang="ko-KR" sz="1400" b="0" dirty="0">
+                        <a:rPr lang="en-US" altLang="ko-KR" sz="1100" b="0" dirty="0">
                           <a:solidFill>
                             <a:schemeClr val="tx1"/>
                           </a:solidFill>
                         </a:rPr>
                         <a:t>int</a:t>
                       </a:r>
-                      <a:endParaRPr lang="ko-KR" altLang="en-US" sz="1400" b="0" dirty="0">
+                      <a:endParaRPr lang="ko-KR" altLang="en-US" sz="1100" b="0" dirty="0">
                         <a:solidFill>
                           <a:schemeClr val="tx1"/>
                         </a:solidFill>
@@ -7261,14 +7242,374 @@
                     <a:p>
                       <a:pPr algn="ctr" latinLnBrk="0"/>
                       <a:r>
-                        <a:rPr lang="en-US" altLang="ko-KR" sz="1400" b="0" dirty="0">
+                        <a:rPr lang="en-US" altLang="ko-KR" sz="1100" b="0" dirty="0">
+                          <a:solidFill>
+                            <a:schemeClr val="tx1"/>
+                          </a:solidFill>
+                        </a:rPr>
+                        <a:t>-1</a:t>
+                      </a:r>
+                      <a:endParaRPr lang="ko-KR" altLang="en-US" sz="1100" b="0" dirty="0">
+                        <a:solidFill>
+                          <a:schemeClr val="tx1"/>
+                        </a:solidFill>
+                      </a:endParaRPr>
+                    </a:p>
+                  </a:txBody>
+                  <a:tcPr anchor="ctr">
+                    <a:lnL w="12700" cap="flat" cmpd="sng" algn="ctr">
+                      <a:solidFill>
+                        <a:schemeClr val="tx1"/>
+                      </a:solidFill>
+                      <a:prstDash val="solid"/>
+                      <a:round/>
+                      <a:headEnd type="none" w="med" len="med"/>
+                      <a:tailEnd type="none" w="med" len="med"/>
+                    </a:lnL>
+                    <a:lnR w="12700" cap="flat" cmpd="sng" algn="ctr">
+                      <a:solidFill>
+                        <a:schemeClr val="tx1"/>
+                      </a:solidFill>
+                      <a:prstDash val="solid"/>
+                      <a:round/>
+                      <a:headEnd type="none" w="med" len="med"/>
+                      <a:tailEnd type="none" w="med" len="med"/>
+                    </a:lnR>
+                    <a:lnT w="12700" cap="flat" cmpd="sng" algn="ctr">
+                      <a:solidFill>
+                        <a:schemeClr val="tx1"/>
+                      </a:solidFill>
+                      <a:prstDash val="solid"/>
+                      <a:round/>
+                      <a:headEnd type="none" w="med" len="med"/>
+                      <a:tailEnd type="none" w="med" len="med"/>
+                    </a:lnT>
+                    <a:lnB w="12700" cap="flat" cmpd="sng" algn="ctr">
+                      <a:solidFill>
+                        <a:schemeClr val="tx1"/>
+                      </a:solidFill>
+                      <a:prstDash val="solid"/>
+                      <a:round/>
+                      <a:headEnd type="none" w="med" len="med"/>
+                      <a:tailEnd type="none" w="med" len="med"/>
+                    </a:lnB>
+                    <a:solidFill>
+                      <a:schemeClr val="bg1"/>
+                    </a:solidFill>
+                  </a:tcPr>
+                </a:tc>
+                <a:tc>
+                  <a:txBody>
+                    <a:bodyPr/>
+                    <a:lstStyle/>
+                    <a:p>
+                      <a:pPr marL="171450" indent="-171450" algn="l" latinLnBrk="0">
+                        <a:buFont typeface="Arial" panose="020B0604020202020204" pitchFamily="34" charset="0"/>
+                        <a:buChar char="•"/>
+                      </a:pPr>
+                      <a:r>
+                        <a:rPr lang="ko-KR" altLang="en-US" sz="1000" b="0" dirty="0">
+                          <a:solidFill>
+                            <a:schemeClr val="tx1"/>
+                          </a:solidFill>
+                        </a:rPr>
+                        <a:t>타겟이 새로 지정될 때 갱신함</a:t>
+                      </a:r>
+                      <a:endParaRPr lang="en-US" altLang="ko-KR" sz="1000" b="0" dirty="0">
+                        <a:solidFill>
+                          <a:schemeClr val="tx1"/>
+                        </a:solidFill>
+                      </a:endParaRPr>
+                    </a:p>
+                    <a:p>
+                      <a:pPr marL="171450" indent="-171450" algn="l" latinLnBrk="0">
+                        <a:buFont typeface="Arial" panose="020B0604020202020204" pitchFamily="34" charset="0"/>
+                        <a:buChar char="•"/>
+                      </a:pPr>
+                      <a:r>
+                        <a:rPr lang="ko-KR" altLang="en-US" sz="1000" b="0" dirty="0">
+                          <a:solidFill>
+                            <a:schemeClr val="tx1"/>
+                          </a:solidFill>
+                        </a:rPr>
+                        <a:t>휴식시간을 보내면 초기화됨</a:t>
+                      </a:r>
+                      <a:r>
+                        <a:rPr lang="en-US" altLang="ko-KR" sz="1000" b="0" dirty="0">
+                          <a:solidFill>
+                            <a:schemeClr val="tx1"/>
+                          </a:solidFill>
+                        </a:rPr>
+                        <a:t>(</a:t>
+                      </a:r>
+                      <a:r>
+                        <a:rPr lang="ko-KR" altLang="en-US" sz="1000" b="0" dirty="0">
+                          <a:solidFill>
+                            <a:schemeClr val="tx1"/>
+                          </a:solidFill>
+                        </a:rPr>
+                        <a:t>초기값 </a:t>
+                      </a:r>
+                      <a:r>
+                        <a:rPr lang="en-US" altLang="ko-KR" sz="1000" b="0" dirty="0">
+                          <a:solidFill>
+                            <a:schemeClr val="tx1"/>
+                          </a:solidFill>
+                        </a:rPr>
+                        <a:t>-1)</a:t>
+                      </a:r>
+                      <a:endParaRPr lang="ko-KR" altLang="en-US" sz="1000" b="0" dirty="0">
+                        <a:solidFill>
+                          <a:schemeClr val="tx1"/>
+                        </a:solidFill>
+                      </a:endParaRPr>
+                    </a:p>
+                  </a:txBody>
+                  <a:tcPr anchor="ctr">
+                    <a:lnL w="12700" cap="flat" cmpd="sng" algn="ctr">
+                      <a:solidFill>
+                        <a:schemeClr val="tx1"/>
+                      </a:solidFill>
+                      <a:prstDash val="solid"/>
+                      <a:round/>
+                      <a:headEnd type="none" w="med" len="med"/>
+                      <a:tailEnd type="none" w="med" len="med"/>
+                    </a:lnL>
+                    <a:lnR w="12700" cap="flat" cmpd="sng" algn="ctr">
+                      <a:solidFill>
+                        <a:schemeClr val="tx1"/>
+                      </a:solidFill>
+                      <a:prstDash val="solid"/>
+                      <a:round/>
+                      <a:headEnd type="none" w="med" len="med"/>
+                      <a:tailEnd type="none" w="med" len="med"/>
+                    </a:lnR>
+                    <a:lnT w="12700" cap="flat" cmpd="sng" algn="ctr">
+                      <a:solidFill>
+                        <a:schemeClr val="tx1"/>
+                      </a:solidFill>
+                      <a:prstDash val="solid"/>
+                      <a:round/>
+                      <a:headEnd type="none" w="med" len="med"/>
+                      <a:tailEnd type="none" w="med" len="med"/>
+                    </a:lnT>
+                    <a:lnB w="12700" cap="flat" cmpd="sng" algn="ctr">
+                      <a:solidFill>
+                        <a:schemeClr val="tx1"/>
+                      </a:solidFill>
+                      <a:prstDash val="solid"/>
+                      <a:round/>
+                      <a:headEnd type="none" w="med" len="med"/>
+                      <a:tailEnd type="none" w="med" len="med"/>
+                    </a:lnB>
+                    <a:solidFill>
+                      <a:schemeClr val="bg1"/>
+                    </a:solidFill>
+                  </a:tcPr>
+                </a:tc>
+                <a:extLst>
+                  <a:ext uri="{0D108BD9-81ED-4DB2-BD59-A6C34878D82A}">
+                    <a16:rowId xmlns:a16="http://schemas.microsoft.com/office/drawing/2014/main" val="3994976718"/>
+                  </a:ext>
+                </a:extLst>
+              </a:tr>
+              <a:tr h="303433">
+                <a:tc>
+                  <a:txBody>
+                    <a:bodyPr/>
+                    <a:lstStyle/>
+                    <a:p>
+                      <a:pPr algn="l" latinLnBrk="0"/>
+                      <a:r>
+                        <a:rPr lang="ko-KR" altLang="en-US" sz="1100" b="1" dirty="0">
+                          <a:solidFill>
+                            <a:schemeClr val="tx1"/>
+                          </a:solidFill>
+                        </a:rPr>
+                        <a:t>공격력</a:t>
+                      </a:r>
+                    </a:p>
+                  </a:txBody>
+                  <a:tcPr anchor="ctr">
+                    <a:lnL w="12700" cap="flat" cmpd="sng" algn="ctr">
+                      <a:solidFill>
+                        <a:schemeClr val="tx1"/>
+                      </a:solidFill>
+                      <a:prstDash val="solid"/>
+                      <a:round/>
+                      <a:headEnd type="none" w="med" len="med"/>
+                      <a:tailEnd type="none" w="med" len="med"/>
+                    </a:lnL>
+                    <a:lnR w="12700" cap="flat" cmpd="sng" algn="ctr">
+                      <a:solidFill>
+                        <a:schemeClr val="tx1"/>
+                      </a:solidFill>
+                      <a:prstDash val="solid"/>
+                      <a:round/>
+                      <a:headEnd type="none" w="med" len="med"/>
+                      <a:tailEnd type="none" w="med" len="med"/>
+                    </a:lnR>
+                    <a:lnT w="12700" cap="flat" cmpd="sng" algn="ctr">
+                      <a:solidFill>
+                        <a:schemeClr val="tx1"/>
+                      </a:solidFill>
+                      <a:prstDash val="solid"/>
+                      <a:round/>
+                      <a:headEnd type="none" w="med" len="med"/>
+                      <a:tailEnd type="none" w="med" len="med"/>
+                    </a:lnT>
+                    <a:lnB w="12700" cap="flat" cmpd="sng" algn="ctr">
+                      <a:solidFill>
+                        <a:schemeClr val="tx1"/>
+                      </a:solidFill>
+                      <a:prstDash val="solid"/>
+                      <a:round/>
+                      <a:headEnd type="none" w="med" len="med"/>
+                      <a:tailEnd type="none" w="med" len="med"/>
+                    </a:lnB>
+                    <a:solidFill>
+                      <a:schemeClr val="bg1">
+                        <a:lumMod val="85000"/>
+                      </a:schemeClr>
+                    </a:solidFill>
+                  </a:tcPr>
+                </a:tc>
+                <a:tc>
+                  <a:txBody>
+                    <a:bodyPr/>
+                    <a:lstStyle/>
+                    <a:p>
+                      <a:pPr algn="ctr" latinLnBrk="0"/>
+                      <a:r>
+                        <a:rPr lang="en-US" altLang="ko-KR" sz="1100" b="0" dirty="0">
+                          <a:solidFill>
+                            <a:schemeClr val="tx1"/>
+                          </a:solidFill>
+                        </a:rPr>
+                        <a:t>int</a:t>
+                      </a:r>
+                      <a:endParaRPr lang="ko-KR" altLang="en-US" sz="1100" b="0" dirty="0">
+                        <a:solidFill>
+                          <a:schemeClr val="tx1"/>
+                        </a:solidFill>
+                      </a:endParaRPr>
+                    </a:p>
+                  </a:txBody>
+                  <a:tcPr anchor="ctr">
+                    <a:lnL w="12700" cap="flat" cmpd="sng" algn="ctr">
+                      <a:solidFill>
+                        <a:schemeClr val="tx1"/>
+                      </a:solidFill>
+                      <a:prstDash val="solid"/>
+                      <a:round/>
+                      <a:headEnd type="none" w="med" len="med"/>
+                      <a:tailEnd type="none" w="med" len="med"/>
+                    </a:lnL>
+                    <a:lnR w="12700" cap="flat" cmpd="sng" algn="ctr">
+                      <a:solidFill>
+                        <a:schemeClr val="tx1"/>
+                      </a:solidFill>
+                      <a:prstDash val="solid"/>
+                      <a:round/>
+                      <a:headEnd type="none" w="med" len="med"/>
+                      <a:tailEnd type="none" w="med" len="med"/>
+                    </a:lnR>
+                    <a:lnT w="12700" cap="flat" cmpd="sng" algn="ctr">
+                      <a:solidFill>
+                        <a:schemeClr val="tx1"/>
+                      </a:solidFill>
+                      <a:prstDash val="solid"/>
+                      <a:round/>
+                      <a:headEnd type="none" w="med" len="med"/>
+                      <a:tailEnd type="none" w="med" len="med"/>
+                    </a:lnT>
+                    <a:lnB w="12700" cap="flat" cmpd="sng" algn="ctr">
+                      <a:solidFill>
+                        <a:schemeClr val="tx1"/>
+                      </a:solidFill>
+                      <a:prstDash val="solid"/>
+                      <a:round/>
+                      <a:headEnd type="none" w="med" len="med"/>
+                      <a:tailEnd type="none" w="med" len="med"/>
+                    </a:lnB>
+                    <a:solidFill>
+                      <a:schemeClr val="bg1"/>
+                    </a:solidFill>
+                  </a:tcPr>
+                </a:tc>
+                <a:tc>
+                  <a:txBody>
+                    <a:bodyPr/>
+                    <a:lstStyle/>
+                    <a:p>
+                      <a:pPr algn="ctr" latinLnBrk="0"/>
+                      <a:r>
+                        <a:rPr lang="en-US" altLang="ko-KR" sz="1100" b="0" dirty="0">
                           <a:solidFill>
                             <a:schemeClr val="tx1"/>
                           </a:solidFill>
                         </a:rPr>
                         <a:t>60</a:t>
                       </a:r>
-                      <a:endParaRPr lang="ko-KR" altLang="en-US" sz="1400" b="0" dirty="0">
+                      <a:endParaRPr lang="ko-KR" altLang="en-US" sz="1100" b="0" dirty="0">
+                        <a:solidFill>
+                          <a:schemeClr val="tx1"/>
+                        </a:solidFill>
+                      </a:endParaRPr>
+                    </a:p>
+                  </a:txBody>
+                  <a:tcPr anchor="ctr">
+                    <a:lnL w="12700" cap="flat" cmpd="sng" algn="ctr">
+                      <a:solidFill>
+                        <a:schemeClr val="tx1"/>
+                      </a:solidFill>
+                      <a:prstDash val="solid"/>
+                      <a:round/>
+                      <a:headEnd type="none" w="med" len="med"/>
+                      <a:tailEnd type="none" w="med" len="med"/>
+                    </a:lnL>
+                    <a:lnR w="12700" cap="flat" cmpd="sng" algn="ctr">
+                      <a:solidFill>
+                        <a:schemeClr val="tx1"/>
+                      </a:solidFill>
+                      <a:prstDash val="solid"/>
+                      <a:round/>
+                      <a:headEnd type="none" w="med" len="med"/>
+                      <a:tailEnd type="none" w="med" len="med"/>
+                    </a:lnR>
+                    <a:lnT w="12700" cap="flat" cmpd="sng" algn="ctr">
+                      <a:solidFill>
+                        <a:schemeClr val="tx1"/>
+                      </a:solidFill>
+                      <a:prstDash val="solid"/>
+                      <a:round/>
+                      <a:headEnd type="none" w="med" len="med"/>
+                      <a:tailEnd type="none" w="med" len="med"/>
+                    </a:lnT>
+                    <a:lnB w="12700" cap="flat" cmpd="sng" algn="ctr">
+                      <a:solidFill>
+                        <a:schemeClr val="tx1"/>
+                      </a:solidFill>
+                      <a:prstDash val="solid"/>
+                      <a:round/>
+                      <a:headEnd type="none" w="med" len="med"/>
+                      <a:tailEnd type="none" w="med" len="med"/>
+                    </a:lnB>
+                    <a:solidFill>
+                      <a:schemeClr val="bg1"/>
+                    </a:solidFill>
+                  </a:tcPr>
+                </a:tc>
+                <a:tc>
+                  <a:txBody>
+                    <a:bodyPr/>
+                    <a:lstStyle/>
+                    <a:p>
+                      <a:pPr marL="171450" indent="-171450" algn="l" latinLnBrk="0">
+                        <a:buFont typeface="Arial" panose="020B0604020202020204" pitchFamily="34" charset="0"/>
+                        <a:buChar char="•"/>
+                      </a:pPr>
+                      <a:endParaRPr lang="ko-KR" altLang="en-US" sz="1000" b="0" dirty="0">
                         <a:solidFill>
                           <a:schemeClr val="tx1"/>
                         </a:solidFill>
@@ -7331,15 +7672,15 @@
                     <a:p>
                       <a:pPr algn="l" latinLnBrk="0"/>
                       <a:r>
-                        <a:rPr lang="en-US" altLang="ko-KR" sz="1400" b="1" dirty="0">
+                        <a:rPr lang="en-US" altLang="ko-KR" sz="1100" b="1" dirty="0">
                           <a:solidFill>
                             <a:schemeClr val="tx1"/>
                           </a:solidFill>
                         </a:rPr>
-                        <a:t>Absent </a:t>
+                        <a:t>Staring </a:t>
                       </a:r>
                       <a:r>
-                        <a:rPr lang="ko-KR" altLang="en-US" sz="1400" b="1" dirty="0">
+                        <a:rPr lang="ko-KR" altLang="en-US" sz="1100" b="1" dirty="0">
                           <a:solidFill>
                             <a:schemeClr val="tx1"/>
                           </a:solidFill>
@@ -7347,14 +7688,14 @@
                         <a:t>타이머 </a:t>
                       </a:r>
                       <a:r>
-                        <a:rPr lang="en-US" altLang="ko-KR" sz="1400" b="1" dirty="0">
+                        <a:rPr lang="en-US" altLang="ko-KR" sz="1100" b="1" dirty="0">
                           <a:solidFill>
                             <a:schemeClr val="tx1"/>
                           </a:solidFill>
                         </a:rPr>
                         <a:t>(s)</a:t>
                       </a:r>
-                      <a:endParaRPr lang="ko-KR" altLang="en-US" sz="1400" b="1" dirty="0">
+                      <a:endParaRPr lang="ko-KR" altLang="en-US" sz="1100" b="1" dirty="0">
                         <a:solidFill>
                           <a:schemeClr val="tx1"/>
                         </a:solidFill>
@@ -7412,14 +7753,14 @@
                     <a:p>
                       <a:pPr algn="ctr" latinLnBrk="0"/>
                       <a:r>
-                        <a:rPr lang="en-US" altLang="ko-KR" sz="1400" b="0" dirty="0">
+                        <a:rPr lang="en-US" altLang="ko-KR" sz="1100" b="0" dirty="0">
                           <a:solidFill>
                             <a:schemeClr val="tx1"/>
                           </a:solidFill>
                         </a:rPr>
                         <a:t>float</a:t>
                       </a:r>
-                      <a:endParaRPr lang="ko-KR" altLang="en-US" sz="1400" b="0" dirty="0">
+                      <a:endParaRPr lang="ko-KR" altLang="en-US" sz="1100" b="0" dirty="0">
                         <a:solidFill>
                           <a:schemeClr val="tx1"/>
                         </a:solidFill>
@@ -7475,165 +7816,14 @@
                     <a:p>
                       <a:pPr algn="ctr" latinLnBrk="0"/>
                       <a:r>
-                        <a:rPr lang="en-US" altLang="ko-KR" sz="1400" b="0" dirty="0">
+                        <a:rPr lang="en-US" altLang="ko-KR" sz="1100" b="0" dirty="0">
                           <a:solidFill>
                             <a:schemeClr val="tx1"/>
                           </a:solidFill>
                         </a:rPr>
-                        <a:t>20</a:t>
+                        <a:t>15</a:t>
                       </a:r>
-                      <a:endParaRPr lang="ko-KR" altLang="en-US" sz="1400" b="0" dirty="0">
-                        <a:solidFill>
-                          <a:schemeClr val="tx1"/>
-                        </a:solidFill>
-                      </a:endParaRPr>
-                    </a:p>
-                  </a:txBody>
-                  <a:tcPr anchor="ctr">
-                    <a:lnL w="12700" cap="flat" cmpd="sng" algn="ctr">
-                      <a:solidFill>
-                        <a:schemeClr val="tx1"/>
-                      </a:solidFill>
-                      <a:prstDash val="solid"/>
-                      <a:round/>
-                      <a:headEnd type="none" w="med" len="med"/>
-                      <a:tailEnd type="none" w="med" len="med"/>
-                    </a:lnL>
-                    <a:lnR w="12700" cap="flat" cmpd="sng" algn="ctr">
-                      <a:solidFill>
-                        <a:schemeClr val="tx1"/>
-                      </a:solidFill>
-                      <a:prstDash val="solid"/>
-                      <a:round/>
-                      <a:headEnd type="none" w="med" len="med"/>
-                      <a:tailEnd type="none" w="med" len="med"/>
-                    </a:lnR>
-                    <a:lnT w="12700" cap="flat" cmpd="sng" algn="ctr">
-                      <a:solidFill>
-                        <a:schemeClr val="tx1"/>
-                      </a:solidFill>
-                      <a:prstDash val="solid"/>
-                      <a:round/>
-                      <a:headEnd type="none" w="med" len="med"/>
-                      <a:tailEnd type="none" w="med" len="med"/>
-                    </a:lnT>
-                    <a:lnB w="12700" cap="flat" cmpd="sng" algn="ctr">
-                      <a:solidFill>
-                        <a:schemeClr val="tx1"/>
-                      </a:solidFill>
-                      <a:prstDash val="solid"/>
-                      <a:round/>
-                      <a:headEnd type="none" w="med" len="med"/>
-                      <a:tailEnd type="none" w="med" len="med"/>
-                    </a:lnB>
-                    <a:solidFill>
-                      <a:schemeClr val="bg1"/>
-                    </a:solidFill>
-                  </a:tcPr>
-                </a:tc>
-                <a:extLst>
-                  <a:ext uri="{0D108BD9-81ED-4DB2-BD59-A6C34878D82A}">
-                    <a16:rowId xmlns:a16="http://schemas.microsoft.com/office/drawing/2014/main" val="81105607"/>
-                  </a:ext>
-                </a:extLst>
-              </a:tr>
-              <a:tr h="303433">
-                <a:tc>
-                  <a:txBody>
-                    <a:bodyPr/>
-                    <a:lstStyle/>
-                    <a:p>
-                      <a:pPr algn="l" latinLnBrk="0"/>
-                      <a:r>
-                        <a:rPr lang="en-US" altLang="ko-KR" sz="1400" b="1" dirty="0">
-                          <a:solidFill>
-                            <a:schemeClr val="tx1"/>
-                          </a:solidFill>
-                        </a:rPr>
-                        <a:t>Staring </a:t>
-                      </a:r>
-                      <a:r>
-                        <a:rPr lang="ko-KR" altLang="en-US" sz="1400" b="1" dirty="0">
-                          <a:solidFill>
-                            <a:schemeClr val="tx1"/>
-                          </a:solidFill>
-                        </a:rPr>
-                        <a:t>타이머 </a:t>
-                      </a:r>
-                      <a:r>
-                        <a:rPr lang="en-US" altLang="ko-KR" sz="1400" b="1" dirty="0">
-                          <a:solidFill>
-                            <a:schemeClr val="tx1"/>
-                          </a:solidFill>
-                        </a:rPr>
-                        <a:t>(s)</a:t>
-                      </a:r>
-                      <a:endParaRPr lang="ko-KR" altLang="en-US" sz="1400" b="1" dirty="0">
-                        <a:solidFill>
-                          <a:schemeClr val="tx1"/>
-                        </a:solidFill>
-                      </a:endParaRPr>
-                    </a:p>
-                  </a:txBody>
-                  <a:tcPr anchor="ctr">
-                    <a:lnL w="12700" cap="flat" cmpd="sng" algn="ctr">
-                      <a:solidFill>
-                        <a:schemeClr val="tx1"/>
-                      </a:solidFill>
-                      <a:prstDash val="solid"/>
-                      <a:round/>
-                      <a:headEnd type="none" w="med" len="med"/>
-                      <a:tailEnd type="none" w="med" len="med"/>
-                    </a:lnL>
-                    <a:lnR w="12700" cap="flat" cmpd="sng" algn="ctr">
-                      <a:solidFill>
-                        <a:schemeClr val="tx1"/>
-                      </a:solidFill>
-                      <a:prstDash val="solid"/>
-                      <a:round/>
-                      <a:headEnd type="none" w="med" len="med"/>
-                      <a:tailEnd type="none" w="med" len="med"/>
-                    </a:lnR>
-                    <a:lnT w="12700" cap="flat" cmpd="sng" algn="ctr">
-                      <a:solidFill>
-                        <a:schemeClr val="tx1"/>
-                      </a:solidFill>
-                      <a:prstDash val="solid"/>
-                      <a:round/>
-                      <a:headEnd type="none" w="med" len="med"/>
-                      <a:tailEnd type="none" w="med" len="med"/>
-                    </a:lnT>
-                    <a:lnB w="12700" cap="flat" cmpd="sng" algn="ctr">
-                      <a:solidFill>
-                        <a:schemeClr val="tx1"/>
-                      </a:solidFill>
-                      <a:prstDash val="solid"/>
-                      <a:round/>
-                      <a:headEnd type="none" w="med" len="med"/>
-                      <a:tailEnd type="none" w="med" len="med"/>
-                    </a:lnB>
-                    <a:solidFill>
-                      <a:schemeClr val="bg1">
-                        <a:lumMod val="85000"/>
-                      </a:schemeClr>
-                    </a:solidFill>
-                  </a:tcPr>
-                </a:tc>
-                <a:tc>
-                  <a:txBody>
-                    <a:bodyPr/>
-                    <a:lstStyle/>
-                    <a:p>
-                      <a:pPr algn="ctr" latinLnBrk="0"/>
-                      <a:r>
-                        <a:rPr lang="en-US" altLang="ko-KR" sz="1400" b="0" dirty="0">
-                          <a:solidFill>
-                            <a:schemeClr val="tx1"/>
-                          </a:solidFill>
-                        </a:rPr>
-                        <a:t>float</a:t>
-                      </a:r>
-                      <a:endParaRPr lang="ko-KR" altLang="en-US" sz="1400" b="0" dirty="0">
+                      <a:endParaRPr lang="ko-KR" altLang="en-US" sz="1100" b="0" dirty="0">
                         <a:solidFill>
                           <a:schemeClr val="tx1"/>
                         </a:solidFill>
@@ -7687,16 +7877,11 @@
                     <a:bodyPr/>
                     <a:lstStyle/>
                     <a:p>
-                      <a:pPr algn="ctr" latinLnBrk="0"/>
-                      <a:r>
-                        <a:rPr lang="en-US" altLang="ko-KR" sz="1400" b="0" dirty="0">
-                          <a:solidFill>
-                            <a:schemeClr val="tx1"/>
-                          </a:solidFill>
-                        </a:rPr>
-                        <a:t>15</a:t>
-                      </a:r>
-                      <a:endParaRPr lang="ko-KR" altLang="en-US" sz="1400" b="0" dirty="0">
+                      <a:pPr marL="171450" indent="-171450" algn="l" latinLnBrk="0">
+                        <a:buFont typeface="Arial" panose="020B0604020202020204" pitchFamily="34" charset="0"/>
+                        <a:buChar char="•"/>
+                      </a:pPr>
+                      <a:endParaRPr lang="ko-KR" altLang="en-US" sz="1000" b="0" dirty="0">
                         <a:solidFill>
                           <a:schemeClr val="tx1"/>
                         </a:solidFill>
@@ -7759,12 +7944,12 @@
                     <a:p>
                       <a:pPr algn="l" latinLnBrk="0"/>
                       <a:r>
-                        <a:rPr lang="ko-KR" altLang="en-US" sz="1400" b="1" dirty="0">
+                        <a:rPr lang="ko-KR" altLang="en-US" sz="1100" b="1" dirty="0">
                           <a:solidFill>
                             <a:schemeClr val="tx1"/>
                           </a:solidFill>
                         </a:rPr>
-                        <a:t>목격당한 횟수</a:t>
+                        <a:t>목격 횟수</a:t>
                       </a:r>
                     </a:p>
                   </a:txBody>
@@ -7819,14 +8004,14 @@
                     <a:p>
                       <a:pPr algn="ctr" latinLnBrk="0"/>
                       <a:r>
-                        <a:rPr lang="en-US" altLang="ko-KR" sz="1400" b="0" dirty="0">
+                        <a:rPr lang="en-US" altLang="ko-KR" sz="1100" b="0" dirty="0">
                           <a:solidFill>
                             <a:schemeClr val="tx1"/>
                           </a:solidFill>
                         </a:rPr>
                         <a:t>int</a:t>
                       </a:r>
-                      <a:endParaRPr lang="ko-KR" altLang="en-US" sz="1400" b="0" dirty="0">
+                      <a:endParaRPr lang="ko-KR" altLang="en-US" sz="1100" b="0" dirty="0">
                         <a:solidFill>
                           <a:schemeClr val="tx1"/>
                         </a:solidFill>
@@ -7882,14 +8067,192 @@
                     <a:p>
                       <a:pPr algn="ctr" latinLnBrk="0"/>
                       <a:r>
-                        <a:rPr lang="en-US" altLang="ko-KR" sz="1400" b="0" dirty="0">
+                        <a:rPr lang="en-US" altLang="ko-KR" sz="1100" b="0" dirty="0">
                           <a:solidFill>
                             <a:schemeClr val="tx1"/>
                           </a:solidFill>
                         </a:rPr>
                         <a:t>0</a:t>
                       </a:r>
-                      <a:endParaRPr lang="ko-KR" altLang="en-US" sz="1400" b="0" dirty="0">
+                      <a:endParaRPr lang="ko-KR" altLang="en-US" sz="1100" b="0" dirty="0">
+                        <a:solidFill>
+                          <a:schemeClr val="tx1"/>
+                        </a:solidFill>
+                      </a:endParaRPr>
+                    </a:p>
+                  </a:txBody>
+                  <a:tcPr anchor="ctr">
+                    <a:lnL w="12700" cap="flat" cmpd="sng" algn="ctr">
+                      <a:solidFill>
+                        <a:schemeClr val="tx1"/>
+                      </a:solidFill>
+                      <a:prstDash val="solid"/>
+                      <a:round/>
+                      <a:headEnd type="none" w="med" len="med"/>
+                      <a:tailEnd type="none" w="med" len="med"/>
+                    </a:lnL>
+                    <a:lnR w="12700" cap="flat" cmpd="sng" algn="ctr">
+                      <a:solidFill>
+                        <a:schemeClr val="tx1"/>
+                      </a:solidFill>
+                      <a:prstDash val="solid"/>
+                      <a:round/>
+                      <a:headEnd type="none" w="med" len="med"/>
+                      <a:tailEnd type="none" w="med" len="med"/>
+                    </a:lnR>
+                    <a:lnT w="12700" cap="flat" cmpd="sng" algn="ctr">
+                      <a:solidFill>
+                        <a:schemeClr val="tx1"/>
+                      </a:solidFill>
+                      <a:prstDash val="solid"/>
+                      <a:round/>
+                      <a:headEnd type="none" w="med" len="med"/>
+                      <a:tailEnd type="none" w="med" len="med"/>
+                    </a:lnT>
+                    <a:lnB w="12700" cap="flat" cmpd="sng" algn="ctr">
+                      <a:solidFill>
+                        <a:schemeClr val="tx1"/>
+                      </a:solidFill>
+                      <a:prstDash val="solid"/>
+                      <a:round/>
+                      <a:headEnd type="none" w="med" len="med"/>
+                      <a:tailEnd type="none" w="med" len="med"/>
+                    </a:lnB>
+                    <a:solidFill>
+                      <a:schemeClr val="bg1"/>
+                    </a:solidFill>
+                  </a:tcPr>
+                </a:tc>
+                <a:tc>
+                  <a:txBody>
+                    <a:bodyPr/>
+                    <a:lstStyle/>
+                    <a:p>
+                      <a:pPr marL="171450" indent="-171450" algn="l" latinLnBrk="0">
+                        <a:buFont typeface="Arial" panose="020B0604020202020204" pitchFamily="34" charset="0"/>
+                        <a:buChar char="•"/>
+                      </a:pPr>
+                      <a:r>
+                        <a:rPr lang="en-US" altLang="ko-KR" sz="1000" b="0" dirty="0">
+                          <a:solidFill>
+                            <a:schemeClr val="tx1"/>
+                          </a:solidFill>
+                        </a:rPr>
+                        <a:t>STARING </a:t>
+                      </a:r>
+                      <a:r>
+                        <a:rPr lang="ko-KR" altLang="en-US" sz="1000" b="0" dirty="0">
+                          <a:solidFill>
+                            <a:schemeClr val="tx1"/>
+                          </a:solidFill>
+                        </a:rPr>
+                        <a:t>중 자신이 타겟 플레이어의 카메라 범위에 들어갈 때마다 증가함</a:t>
+                      </a:r>
+                      <a:endParaRPr lang="en-US" altLang="ko-KR" sz="1000" b="0" dirty="0">
+                        <a:solidFill>
+                          <a:schemeClr val="tx1"/>
+                        </a:solidFill>
+                      </a:endParaRPr>
+                    </a:p>
+                    <a:p>
+                      <a:pPr marL="171450" marR="0" lvl="0" indent="-171450" algn="l" defTabSz="914400" rtl="0" eaLnBrk="1" fontAlgn="auto" latinLnBrk="0" hangingPunct="1">
+                        <a:lnSpc>
+                          <a:spcPct val="100000"/>
+                        </a:lnSpc>
+                        <a:spcBef>
+                          <a:spcPts val="0"/>
+                        </a:spcBef>
+                        <a:spcAft>
+                          <a:spcPts val="0"/>
+                        </a:spcAft>
+                        <a:buClrTx/>
+                        <a:buSzTx/>
+                        <a:buFont typeface="Arial" panose="020B0604020202020204" pitchFamily="34" charset="0"/>
+                        <a:buChar char="•"/>
+                        <a:tabLst/>
+                        <a:defRPr/>
+                      </a:pPr>
+                      <a:r>
+                        <a:rPr lang="ko-KR" altLang="en-US" sz="1000" b="0" dirty="0">
+                          <a:solidFill>
+                            <a:schemeClr val="tx1"/>
+                          </a:solidFill>
+                        </a:rPr>
+                        <a:t>조건 </a:t>
+                      </a:r>
+                      <a:r>
+                        <a:rPr lang="en-US" altLang="ko-KR" sz="1000" b="0" dirty="0">
+                          <a:solidFill>
+                            <a:schemeClr val="tx1"/>
+                          </a:solidFill>
+                        </a:rPr>
+                        <a:t>A1</a:t>
+                      </a:r>
+                      <a:r>
+                        <a:rPr lang="ko-KR" altLang="en-US" sz="1000" b="0" dirty="0">
+                          <a:solidFill>
+                            <a:schemeClr val="tx1"/>
+                          </a:solidFill>
+                        </a:rPr>
+                        <a:t> 또는 </a:t>
+                      </a:r>
+                      <a:r>
+                        <a:rPr lang="en-US" altLang="ko-KR" sz="1000" b="0" dirty="0">
+                          <a:solidFill>
+                            <a:schemeClr val="tx1"/>
+                          </a:solidFill>
+                        </a:rPr>
+                        <a:t>A3</a:t>
+                      </a:r>
+                      <a:r>
+                        <a:rPr lang="ko-KR" altLang="en-US" sz="1000" b="0" dirty="0">
+                          <a:solidFill>
+                            <a:schemeClr val="tx1"/>
+                          </a:solidFill>
+                        </a:rPr>
+                        <a:t>가 확률에 성공하면 초기화됨</a:t>
+                      </a:r>
+                      <a:r>
+                        <a:rPr lang="en-US" altLang="ko-KR" sz="1000" b="0" dirty="0">
+                          <a:solidFill>
+                            <a:schemeClr val="tx1"/>
+                          </a:solidFill>
+                        </a:rPr>
+                        <a:t>. </a:t>
+                      </a:r>
+                      <a:r>
+                        <a:rPr lang="ko-KR" altLang="en-US" sz="1000" b="0" dirty="0">
+                          <a:solidFill>
+                            <a:schemeClr val="tx1"/>
+                          </a:solidFill>
+                        </a:rPr>
+                        <a:t>휴식 시간을 보내면 초기화됨</a:t>
+                      </a:r>
+                      <a:r>
+                        <a:rPr lang="en-US" altLang="ko-KR" sz="1000" b="0" dirty="0">
+                          <a:solidFill>
+                            <a:schemeClr val="tx1"/>
+                          </a:solidFill>
+                        </a:rPr>
+                        <a:t>(</a:t>
+                      </a:r>
+                      <a:r>
+                        <a:rPr lang="ko-KR" altLang="en-US" sz="1000" b="0" dirty="0">
+                          <a:solidFill>
+                            <a:schemeClr val="tx1"/>
+                          </a:solidFill>
+                        </a:rPr>
+                        <a:t>초기값 </a:t>
+                      </a:r>
+                      <a:r>
+                        <a:rPr lang="en-US" altLang="ko-KR" sz="1000" b="0" dirty="0">
+                          <a:solidFill>
+                            <a:schemeClr val="tx1"/>
+                          </a:solidFill>
+                        </a:rPr>
+                        <a:t>0)</a:t>
+                      </a:r>
+                      <a:endParaRPr lang="ko-KR" altLang="en-US" sz="1000" b="0" dirty="0">
                         <a:solidFill>
                           <a:schemeClr val="tx1"/>
                         </a:solidFill>
@@ -7952,14 +8315,22 @@
                     <a:p>
                       <a:pPr algn="l" latinLnBrk="0"/>
                       <a:r>
-                        <a:rPr lang="ko-KR" altLang="en-US" sz="1400" b="1" dirty="0">
+                        <a:rPr lang="ko-KR" altLang="en-US" sz="1100" b="1" dirty="0" err="1">
                           <a:solidFill>
                             <a:schemeClr val="tx1"/>
                           </a:solidFill>
                         </a:rPr>
-                        <a:t>목격당하지 않은 횟수</a:t>
+                        <a:t>비목격</a:t>
                       </a:r>
-                      <a:endParaRPr lang="en-US" altLang="ko-KR" sz="1400" b="1" dirty="0">
+                      <a:r>
+                        <a:rPr lang="ko-KR" altLang="en-US" sz="1100" b="1" dirty="0">
+                          <a:solidFill>
+                            <a:schemeClr val="tx1"/>
+                          </a:solidFill>
+                        </a:rPr>
+                        <a:t> 횟수</a:t>
+                      </a:r>
+                      <a:endParaRPr lang="en-US" altLang="ko-KR" sz="1100" b="1" dirty="0">
                         <a:solidFill>
                           <a:schemeClr val="tx1"/>
                         </a:solidFill>
@@ -8017,14 +8388,14 @@
                     <a:p>
                       <a:pPr algn="ctr" latinLnBrk="0"/>
                       <a:r>
-                        <a:rPr lang="en-US" altLang="ko-KR" sz="1400" b="0" dirty="0">
+                        <a:rPr lang="en-US" altLang="ko-KR" sz="1100" b="0" dirty="0">
                           <a:solidFill>
                             <a:schemeClr val="tx1"/>
                           </a:solidFill>
                         </a:rPr>
                         <a:t>int</a:t>
                       </a:r>
-                      <a:endParaRPr lang="ko-KR" altLang="en-US" sz="1400" b="0" dirty="0">
+                      <a:endParaRPr lang="ko-KR" altLang="en-US" sz="1100" b="0" dirty="0">
                         <a:solidFill>
                           <a:schemeClr val="tx1"/>
                         </a:solidFill>
@@ -8080,14 +8451,192 @@
                     <a:p>
                       <a:pPr algn="ctr" latinLnBrk="0"/>
                       <a:r>
-                        <a:rPr lang="en-US" altLang="ko-KR" sz="1400" b="0" dirty="0">
+                        <a:rPr lang="en-US" altLang="ko-KR" sz="1100" b="0" dirty="0">
                           <a:solidFill>
                             <a:schemeClr val="tx1"/>
                           </a:solidFill>
                         </a:rPr>
                         <a:t>0</a:t>
                       </a:r>
-                      <a:endParaRPr lang="ko-KR" altLang="en-US" sz="1400" b="0" dirty="0">
+                      <a:endParaRPr lang="ko-KR" altLang="en-US" sz="1100" b="0" dirty="0">
+                        <a:solidFill>
+                          <a:schemeClr val="tx1"/>
+                        </a:solidFill>
+                      </a:endParaRPr>
+                    </a:p>
+                  </a:txBody>
+                  <a:tcPr anchor="ctr">
+                    <a:lnL w="12700" cap="flat" cmpd="sng" algn="ctr">
+                      <a:solidFill>
+                        <a:schemeClr val="tx1"/>
+                      </a:solidFill>
+                      <a:prstDash val="solid"/>
+                      <a:round/>
+                      <a:headEnd type="none" w="med" len="med"/>
+                      <a:tailEnd type="none" w="med" len="med"/>
+                    </a:lnL>
+                    <a:lnR w="12700" cap="flat" cmpd="sng" algn="ctr">
+                      <a:solidFill>
+                        <a:schemeClr val="tx1"/>
+                      </a:solidFill>
+                      <a:prstDash val="solid"/>
+                      <a:round/>
+                      <a:headEnd type="none" w="med" len="med"/>
+                      <a:tailEnd type="none" w="med" len="med"/>
+                    </a:lnR>
+                    <a:lnT w="12700" cap="flat" cmpd="sng" algn="ctr">
+                      <a:solidFill>
+                        <a:schemeClr val="tx1"/>
+                      </a:solidFill>
+                      <a:prstDash val="solid"/>
+                      <a:round/>
+                      <a:headEnd type="none" w="med" len="med"/>
+                      <a:tailEnd type="none" w="med" len="med"/>
+                    </a:lnT>
+                    <a:lnB w="12700" cap="flat" cmpd="sng" algn="ctr">
+                      <a:solidFill>
+                        <a:schemeClr val="tx1"/>
+                      </a:solidFill>
+                      <a:prstDash val="solid"/>
+                      <a:round/>
+                      <a:headEnd type="none" w="med" len="med"/>
+                      <a:tailEnd type="none" w="med" len="med"/>
+                    </a:lnB>
+                    <a:solidFill>
+                      <a:schemeClr val="bg1"/>
+                    </a:solidFill>
+                  </a:tcPr>
+                </a:tc>
+                <a:tc>
+                  <a:txBody>
+                    <a:bodyPr/>
+                    <a:lstStyle/>
+                    <a:p>
+                      <a:pPr marL="171450" indent="-171450" algn="l" latinLnBrk="0">
+                        <a:buFont typeface="Arial" panose="020B0604020202020204" pitchFamily="34" charset="0"/>
+                        <a:buChar char="•"/>
+                      </a:pPr>
+                      <a:r>
+                        <a:rPr lang="en-US" altLang="ko-KR" sz="1000" b="0" dirty="0">
+                          <a:solidFill>
+                            <a:schemeClr val="tx1"/>
+                          </a:solidFill>
+                        </a:rPr>
+                        <a:t>STARING </a:t>
+                      </a:r>
+                      <a:r>
+                        <a:rPr lang="ko-KR" altLang="en-US" sz="1000" b="0" dirty="0">
+                          <a:solidFill>
+                            <a:schemeClr val="tx1"/>
+                          </a:solidFill>
+                        </a:rPr>
+                        <a:t>중 자신이 목격되지 않았다면</a:t>
+                      </a:r>
+                      <a:r>
+                        <a:rPr lang="en-US" altLang="ko-KR" sz="1000" b="0" dirty="0">
+                          <a:solidFill>
+                            <a:schemeClr val="tx1"/>
+                          </a:solidFill>
+                        </a:rPr>
+                        <a:t>, STARING </a:t>
+                      </a:r>
+                      <a:r>
+                        <a:rPr lang="ko-KR" altLang="en-US" sz="1000" b="0" dirty="0">
+                          <a:solidFill>
+                            <a:schemeClr val="tx1"/>
+                          </a:solidFill>
+                        </a:rPr>
+                        <a:t>타이머가 종료될 때 증가함</a:t>
+                      </a:r>
+                      <a:endParaRPr lang="en-US" altLang="ko-KR" sz="1000" b="0" dirty="0">
+                        <a:solidFill>
+                          <a:schemeClr val="tx1"/>
+                        </a:solidFill>
+                      </a:endParaRPr>
+                    </a:p>
+                    <a:p>
+                      <a:pPr marL="171450" marR="0" lvl="0" indent="-171450" algn="l" defTabSz="914400" rtl="0" eaLnBrk="1" fontAlgn="auto" latinLnBrk="0" hangingPunct="1">
+                        <a:lnSpc>
+                          <a:spcPct val="100000"/>
+                        </a:lnSpc>
+                        <a:spcBef>
+                          <a:spcPts val="0"/>
+                        </a:spcBef>
+                        <a:spcAft>
+                          <a:spcPts val="0"/>
+                        </a:spcAft>
+                        <a:buClrTx/>
+                        <a:buSzTx/>
+                        <a:buFont typeface="Arial" panose="020B0604020202020204" pitchFamily="34" charset="0"/>
+                        <a:buChar char="•"/>
+                        <a:tabLst/>
+                        <a:defRPr/>
+                      </a:pPr>
+                      <a:r>
+                        <a:rPr lang="ko-KR" altLang="en-US" sz="1000" b="0" dirty="0">
+                          <a:solidFill>
+                            <a:schemeClr val="tx1"/>
+                          </a:solidFill>
+                        </a:rPr>
+                        <a:t>조건</a:t>
+                      </a:r>
+                      <a:r>
+                        <a:rPr lang="en-US" altLang="ko-KR" sz="1000" b="0" dirty="0">
+                          <a:solidFill>
+                            <a:schemeClr val="tx1"/>
+                          </a:solidFill>
+                        </a:rPr>
+                        <a:t> A2</a:t>
+                      </a:r>
+                      <a:r>
+                        <a:rPr lang="ko-KR" altLang="en-US" sz="1000" b="0" dirty="0">
+                          <a:solidFill>
+                            <a:schemeClr val="tx1"/>
+                          </a:solidFill>
+                        </a:rPr>
+                        <a:t>가 확률에 성공하면 초기화됨</a:t>
+                      </a:r>
+                      <a:r>
+                        <a:rPr lang="en-US" altLang="ko-KR" sz="1000" b="0" dirty="0">
+                          <a:solidFill>
+                            <a:schemeClr val="tx1"/>
+                          </a:solidFill>
+                        </a:rPr>
+                        <a:t>. </a:t>
+                      </a:r>
+                      <a:r>
+                        <a:rPr lang="ko-KR" altLang="en-US" sz="1000" b="0" dirty="0">
+                          <a:solidFill>
+                            <a:schemeClr val="tx1"/>
+                          </a:solidFill>
+                        </a:rPr>
+                        <a:t>휴식 시간을 보내면 초기화됨</a:t>
+                      </a:r>
+                      <a:r>
+                        <a:rPr lang="en-US" altLang="ko-KR" sz="1000" b="0" dirty="0">
+                          <a:solidFill>
+                            <a:schemeClr val="tx1"/>
+                          </a:solidFill>
+                        </a:rPr>
+                        <a:t>(</a:t>
+                      </a:r>
+                      <a:r>
+                        <a:rPr lang="ko-KR" altLang="en-US" sz="1000" b="0" dirty="0">
+                          <a:solidFill>
+                            <a:schemeClr val="tx1"/>
+                          </a:solidFill>
+                        </a:rPr>
+                        <a:t>초기값 </a:t>
+                      </a:r>
+                      <a:r>
+                        <a:rPr lang="en-US" altLang="ko-KR" sz="1000" b="0" dirty="0">
+                          <a:solidFill>
+                            <a:schemeClr val="tx1"/>
+                          </a:solidFill>
+                        </a:rPr>
+                        <a:t>0)</a:t>
+                      </a:r>
+                      <a:endParaRPr lang="ko-KR" altLang="en-US" sz="1000" b="0" dirty="0">
                         <a:solidFill>
                           <a:schemeClr val="tx1"/>
                         </a:solidFill>
@@ -8150,7 +8699,7 @@
                     <a:p>
                       <a:pPr algn="l" latinLnBrk="0"/>
                       <a:r>
-                        <a:rPr lang="en-US" altLang="ko-KR" sz="1400" b="1" dirty="0">
+                        <a:rPr lang="en-US" altLang="ko-KR" sz="1100" b="1" dirty="0">
                           <a:solidFill>
                             <a:schemeClr val="tx1"/>
                           </a:solidFill>
@@ -8158,7 +8707,7 @@
                         <a:t>Chase</a:t>
                       </a:r>
                       <a:r>
-                        <a:rPr lang="ko-KR" altLang="en-US" sz="1400" b="1" dirty="0">
+                        <a:rPr lang="ko-KR" altLang="en-US" sz="1100" b="1" dirty="0">
                           <a:solidFill>
                             <a:schemeClr val="tx1"/>
                           </a:solidFill>
@@ -8166,7 +8715,7 @@
                         <a:t> 종료 시간 </a:t>
                       </a:r>
                       <a:r>
-                        <a:rPr lang="en-US" altLang="ko-KR" sz="1400" b="1" dirty="0">
+                        <a:rPr lang="en-US" altLang="ko-KR" sz="1100" b="1" dirty="0">
                           <a:solidFill>
                             <a:schemeClr val="tx1"/>
                           </a:solidFill>
@@ -8226,14 +8775,14 @@
                     <a:p>
                       <a:pPr algn="ctr" latinLnBrk="0"/>
                       <a:r>
-                        <a:rPr lang="en-US" altLang="ko-KR" sz="1400" b="0" dirty="0">
+                        <a:rPr lang="en-US" altLang="ko-KR" sz="1100" b="0" dirty="0">
                           <a:solidFill>
                             <a:schemeClr val="tx1"/>
                           </a:solidFill>
                         </a:rPr>
                         <a:t>float</a:t>
                       </a:r>
-                      <a:endParaRPr lang="ko-KR" altLang="en-US" sz="1400" b="0" dirty="0">
+                      <a:endParaRPr lang="ko-KR" altLang="en-US" sz="1100" b="0" dirty="0">
                         <a:solidFill>
                           <a:schemeClr val="tx1"/>
                         </a:solidFill>
@@ -8289,14 +8838,72 @@
                     <a:p>
                       <a:pPr algn="ctr" latinLnBrk="0"/>
                       <a:r>
-                        <a:rPr lang="en-US" altLang="ko-KR" sz="1400" b="0" dirty="0">
+                        <a:rPr lang="en-US" altLang="ko-KR" sz="1100" b="0" dirty="0">
                           <a:solidFill>
                             <a:schemeClr val="tx1"/>
                           </a:solidFill>
                         </a:rPr>
                         <a:t>20</a:t>
                       </a:r>
-                      <a:endParaRPr lang="ko-KR" altLang="en-US" sz="1400" b="0" dirty="0">
+                      <a:endParaRPr lang="ko-KR" altLang="en-US" sz="1100" b="0" dirty="0">
+                        <a:solidFill>
+                          <a:schemeClr val="tx1"/>
+                        </a:solidFill>
+                      </a:endParaRPr>
+                    </a:p>
+                  </a:txBody>
+                  <a:tcPr anchor="ctr">
+                    <a:lnL w="12700" cap="flat" cmpd="sng" algn="ctr">
+                      <a:solidFill>
+                        <a:schemeClr val="tx1"/>
+                      </a:solidFill>
+                      <a:prstDash val="solid"/>
+                      <a:round/>
+                      <a:headEnd type="none" w="med" len="med"/>
+                      <a:tailEnd type="none" w="med" len="med"/>
+                    </a:lnL>
+                    <a:lnR w="12700" cap="flat" cmpd="sng" algn="ctr">
+                      <a:solidFill>
+                        <a:schemeClr val="tx1"/>
+                      </a:solidFill>
+                      <a:prstDash val="solid"/>
+                      <a:round/>
+                      <a:headEnd type="none" w="med" len="med"/>
+                      <a:tailEnd type="none" w="med" len="med"/>
+                    </a:lnR>
+                    <a:lnT w="12700" cap="flat" cmpd="sng" algn="ctr">
+                      <a:solidFill>
+                        <a:schemeClr val="tx1"/>
+                      </a:solidFill>
+                      <a:prstDash val="solid"/>
+                      <a:round/>
+                      <a:headEnd type="none" w="med" len="med"/>
+                      <a:tailEnd type="none" w="med" len="med"/>
+                    </a:lnT>
+                    <a:lnB w="12700" cap="flat" cmpd="sng" algn="ctr">
+                      <a:solidFill>
+                        <a:schemeClr val="tx1"/>
+                      </a:solidFill>
+                      <a:prstDash val="solid"/>
+                      <a:round/>
+                      <a:headEnd type="none" w="med" len="med"/>
+                      <a:tailEnd type="none" w="med" len="med"/>
+                    </a:lnB>
+                    <a:solidFill>
+                      <a:schemeClr val="bg1"/>
+                    </a:solidFill>
+                  </a:tcPr>
+                </a:tc>
+                <a:tc>
+                  <a:txBody>
+                    <a:bodyPr/>
+                    <a:lstStyle/>
+                    <a:p>
+                      <a:pPr marL="171450" indent="-171450" algn="l" latinLnBrk="0">
+                        <a:buFont typeface="Arial" panose="020B0604020202020204" pitchFamily="34" charset="0"/>
+                        <a:buChar char="•"/>
+                      </a:pPr>
+                      <a:endParaRPr lang="ko-KR" altLang="en-US" sz="1000" b="0" dirty="0">
                         <a:solidFill>
                           <a:schemeClr val="tx1"/>
                         </a:solidFill>
@@ -8359,15 +8966,15 @@
                     <a:p>
                       <a:pPr algn="l" latinLnBrk="0"/>
                       <a:r>
-                        <a:rPr lang="en-US" altLang="ko-KR" sz="1400" b="1" dirty="0">
+                        <a:rPr lang="en-US" altLang="ko-KR" sz="1100" b="1" dirty="0">
                           <a:solidFill>
                             <a:schemeClr val="tx1"/>
                           </a:solidFill>
                         </a:rPr>
-                        <a:t>Disappearing </a:t>
+                        <a:t>Chase </a:t>
                       </a:r>
                       <a:r>
-                        <a:rPr lang="ko-KR" altLang="en-US" sz="1400" b="1" dirty="0">
+                        <a:rPr lang="ko-KR" altLang="en-US" sz="1100" b="1" dirty="0">
                           <a:solidFill>
                             <a:schemeClr val="tx1"/>
                           </a:solidFill>
@@ -8375,7 +8982,7 @@
                         <a:t>속도 </a:t>
                       </a:r>
                       <a:r>
-                        <a:rPr lang="en-US" altLang="ko-KR" sz="1400" b="1" dirty="0">
+                        <a:rPr lang="en-US" altLang="ko-KR" sz="1100" b="1" dirty="0">
                           <a:solidFill>
                             <a:schemeClr val="tx1"/>
                           </a:solidFill>
@@ -8435,14 +9042,14 @@
                     <a:p>
                       <a:pPr algn="ctr" latinLnBrk="0"/>
                       <a:r>
-                        <a:rPr lang="en-US" altLang="ko-KR" sz="1400" b="0" dirty="0">
+                        <a:rPr lang="en-US" altLang="ko-KR" sz="1100" b="0" dirty="0">
                           <a:solidFill>
                             <a:schemeClr val="tx1"/>
                           </a:solidFill>
                         </a:rPr>
                         <a:t>float</a:t>
                       </a:r>
-                      <a:endParaRPr lang="ko-KR" altLang="en-US" sz="1400" b="0" dirty="0">
+                      <a:endParaRPr lang="ko-KR" altLang="en-US" sz="1100" b="0" dirty="0">
                         <a:solidFill>
                           <a:schemeClr val="tx1"/>
                         </a:solidFill>
@@ -8498,14 +9105,14 @@
                     <a:p>
                       <a:pPr algn="ctr" latinLnBrk="0"/>
                       <a:r>
-                        <a:rPr lang="en-US" altLang="ko-KR" sz="1400" b="0" dirty="0">
+                        <a:rPr lang="en-US" altLang="ko-KR" sz="1100" b="0" dirty="0">
                           <a:solidFill>
                             <a:schemeClr val="tx1"/>
                           </a:solidFill>
                         </a:rPr>
                         <a:t>4.5</a:t>
                       </a:r>
-                      <a:endParaRPr lang="ko-KR" altLang="en-US" sz="1400" b="0" dirty="0">
+                      <a:endParaRPr lang="ko-KR" altLang="en-US" sz="1100" b="0" dirty="0">
                         <a:solidFill>
                           <a:schemeClr val="tx1"/>
                         </a:solidFill>
@@ -8554,9 +9161,67 @@
                     </a:solidFill>
                   </a:tcPr>
                 </a:tc>
+                <a:tc>
+                  <a:txBody>
+                    <a:bodyPr/>
+                    <a:lstStyle/>
+                    <a:p>
+                      <a:pPr marL="171450" indent="-171450" algn="l" latinLnBrk="0">
+                        <a:buFont typeface="Arial" panose="020B0604020202020204" pitchFamily="34" charset="0"/>
+                        <a:buChar char="•"/>
+                      </a:pPr>
+                      <a:endParaRPr lang="ko-KR" altLang="en-US" sz="1000" b="0" dirty="0">
+                        <a:solidFill>
+                          <a:schemeClr val="tx1"/>
+                        </a:solidFill>
+                      </a:endParaRPr>
+                    </a:p>
+                  </a:txBody>
+                  <a:tcPr anchor="ctr">
+                    <a:lnL w="12700" cap="flat" cmpd="sng" algn="ctr">
+                      <a:solidFill>
+                        <a:schemeClr val="tx1"/>
+                      </a:solidFill>
+                      <a:prstDash val="solid"/>
+                      <a:round/>
+                      <a:headEnd type="none" w="med" len="med"/>
+                      <a:tailEnd type="none" w="med" len="med"/>
+                    </a:lnL>
+                    <a:lnR w="12700" cap="flat" cmpd="sng" algn="ctr">
+                      <a:solidFill>
+                        <a:schemeClr val="tx1"/>
+                      </a:solidFill>
+                      <a:prstDash val="solid"/>
+                      <a:round/>
+                      <a:headEnd type="none" w="med" len="med"/>
+                      <a:tailEnd type="none" w="med" len="med"/>
+                    </a:lnR>
+                    <a:lnT w="12700" cap="flat" cmpd="sng" algn="ctr">
+                      <a:solidFill>
+                        <a:schemeClr val="tx1"/>
+                      </a:solidFill>
+                      <a:prstDash val="solid"/>
+                      <a:round/>
+                      <a:headEnd type="none" w="med" len="med"/>
+                      <a:tailEnd type="none" w="med" len="med"/>
+                    </a:lnT>
+                    <a:lnB w="12700" cap="flat" cmpd="sng" algn="ctr">
+                      <a:solidFill>
+                        <a:schemeClr val="tx1"/>
+                      </a:solidFill>
+                      <a:prstDash val="solid"/>
+                      <a:round/>
+                      <a:headEnd type="none" w="med" len="med"/>
+                      <a:tailEnd type="none" w="med" len="med"/>
+                    </a:lnB>
+                    <a:solidFill>
+                      <a:schemeClr val="bg1"/>
+                    </a:solidFill>
+                  </a:tcPr>
+                </a:tc>
                 <a:extLst>
                   <a:ext uri="{0D108BD9-81ED-4DB2-BD59-A6C34878D82A}">
-                    <a16:rowId xmlns:a16="http://schemas.microsoft.com/office/drawing/2014/main" val="3057100434"/>
+                    <a16:rowId xmlns:a16="http://schemas.microsoft.com/office/drawing/2014/main" val="464332496"/>
                   </a:ext>
                 </a:extLst>
               </a:tr>
@@ -8568,28 +9233,20 @@
                     <a:p>
                       <a:pPr algn="l" latinLnBrk="0"/>
                       <a:r>
-                        <a:rPr lang="en-US" altLang="ko-KR" sz="1400" b="1" dirty="0">
+                        <a:rPr lang="ko-KR" altLang="en-US" sz="1100" b="1" dirty="0">
                           <a:solidFill>
                             <a:schemeClr val="tx1"/>
                           </a:solidFill>
                         </a:rPr>
-                        <a:t>Chase </a:t>
+                        <a:t>휴식 시간 </a:t>
                       </a:r>
                       <a:r>
-                        <a:rPr lang="ko-KR" altLang="en-US" sz="1400" b="1" dirty="0">
+                        <a:rPr lang="en-US" altLang="ko-KR" sz="1100" b="1" dirty="0">
                           <a:solidFill>
                             <a:schemeClr val="tx1"/>
                           </a:solidFill>
                         </a:rPr>
-                        <a:t>속도 </a:t>
-                      </a:r>
-                      <a:r>
-                        <a:rPr lang="en-US" altLang="ko-KR" sz="1400" b="1" dirty="0">
-                          <a:solidFill>
-                            <a:schemeClr val="tx1"/>
-                          </a:solidFill>
-                        </a:rPr>
-                        <a:t>(m/s)</a:t>
+                        <a:t>(s)</a:t>
                       </a:r>
                     </a:p>
                   </a:txBody>
@@ -8644,14 +9301,14 @@
                     <a:p>
                       <a:pPr algn="ctr" latinLnBrk="0"/>
                       <a:r>
-                        <a:rPr lang="en-US" altLang="ko-KR" sz="1400" b="0" dirty="0">
+                        <a:rPr lang="en-US" altLang="ko-KR" sz="1100" b="0" dirty="0">
                           <a:solidFill>
                             <a:schemeClr val="tx1"/>
                           </a:solidFill>
                         </a:rPr>
                         <a:t>float</a:t>
                       </a:r>
-                      <a:endParaRPr lang="ko-KR" altLang="en-US" sz="1400" b="0" dirty="0">
+                      <a:endParaRPr lang="ko-KR" altLang="en-US" sz="1100" b="0" dirty="0">
                         <a:solidFill>
                           <a:schemeClr val="tx1"/>
                         </a:solidFill>
@@ -8707,14 +9364,14 @@
                     <a:p>
                       <a:pPr algn="ctr" latinLnBrk="0"/>
                       <a:r>
-                        <a:rPr lang="en-US" altLang="ko-KR" sz="1400" b="0" dirty="0">
+                        <a:rPr lang="en-US" altLang="ko-KR" sz="1100" b="0" dirty="0">
                           <a:solidFill>
                             <a:schemeClr val="tx1"/>
                           </a:solidFill>
                         </a:rPr>
-                        <a:t>4.5</a:t>
+                        <a:t>90</a:t>
                       </a:r>
-                      <a:endParaRPr lang="ko-KR" altLang="en-US" sz="1400" b="0" dirty="0">
+                      <a:endParaRPr lang="ko-KR" altLang="en-US" sz="1100" b="0" dirty="0">
                         <a:solidFill>
                           <a:schemeClr val="tx1"/>
                         </a:solidFill>
@@ -8763,9 +9420,70 @@
                     </a:solidFill>
                   </a:tcPr>
                 </a:tc>
+                <a:tc>
+                  <a:txBody>
+                    <a:bodyPr/>
+                    <a:lstStyle/>
+                    <a:p>
+                      <a:pPr marL="171450" indent="-171450" algn="l" latinLnBrk="0">
+                        <a:buFont typeface="Arial" panose="020B0604020202020204" pitchFamily="34" charset="0"/>
+                        <a:buChar char="•"/>
+                      </a:pPr>
+                      <a:r>
+                        <a:rPr lang="ko-KR" altLang="en-US" sz="1000" b="0" dirty="0">
+                          <a:solidFill>
+                            <a:schemeClr val="tx1"/>
+                          </a:solidFill>
+                        </a:rPr>
+                        <a:t>타겟이 죽거나 게임을 나가서 몬스터가 활동을 하지 않는 시간을 의미</a:t>
+                      </a:r>
+                    </a:p>
+                  </a:txBody>
+                  <a:tcPr anchor="ctr">
+                    <a:lnL w="12700" cap="flat" cmpd="sng" algn="ctr">
+                      <a:solidFill>
+                        <a:schemeClr val="tx1"/>
+                      </a:solidFill>
+                      <a:prstDash val="solid"/>
+                      <a:round/>
+                      <a:headEnd type="none" w="med" len="med"/>
+                      <a:tailEnd type="none" w="med" len="med"/>
+                    </a:lnL>
+                    <a:lnR w="12700" cap="flat" cmpd="sng" algn="ctr">
+                      <a:solidFill>
+                        <a:schemeClr val="tx1"/>
+                      </a:solidFill>
+                      <a:prstDash val="solid"/>
+                      <a:round/>
+                      <a:headEnd type="none" w="med" len="med"/>
+                      <a:tailEnd type="none" w="med" len="med"/>
+                    </a:lnR>
+                    <a:lnT w="12700" cap="flat" cmpd="sng" algn="ctr">
+                      <a:solidFill>
+                        <a:schemeClr val="tx1"/>
+                      </a:solidFill>
+                      <a:prstDash val="solid"/>
+                      <a:round/>
+                      <a:headEnd type="none" w="med" len="med"/>
+                      <a:tailEnd type="none" w="med" len="med"/>
+                    </a:lnT>
+                    <a:lnB w="12700" cap="flat" cmpd="sng" algn="ctr">
+                      <a:solidFill>
+                        <a:schemeClr val="tx1"/>
+                      </a:solidFill>
+                      <a:prstDash val="solid"/>
+                      <a:round/>
+                      <a:headEnd type="none" w="med" len="med"/>
+                      <a:tailEnd type="none" w="med" len="med"/>
+                    </a:lnB>
+                    <a:solidFill>
+                      <a:schemeClr val="bg1"/>
+                    </a:solidFill>
+                  </a:tcPr>
+                </a:tc>
                 <a:extLst>
                   <a:ext uri="{0D108BD9-81ED-4DB2-BD59-A6C34878D82A}">
-                    <a16:rowId xmlns:a16="http://schemas.microsoft.com/office/drawing/2014/main" val="464332496"/>
+                    <a16:rowId xmlns:a16="http://schemas.microsoft.com/office/drawing/2014/main" val="3684952891"/>
                   </a:ext>
                 </a:extLst>
               </a:tr>
@@ -8912,10 +9630,10 @@
       </p:sp>
       <p:pic>
         <p:nvPicPr>
-          <p:cNvPr id="6" name="그림 5">
+          <p:cNvPr id="15" name="그림 14">
             <a:extLst>
               <a:ext uri="{FF2B5EF4-FFF2-40B4-BE49-F238E27FC236}">
-                <a16:creationId xmlns:a16="http://schemas.microsoft.com/office/drawing/2014/main" id="{81F1FE42-DBCC-9998-5BFE-60E7BCF36162}"/>
+                <a16:creationId xmlns:a16="http://schemas.microsoft.com/office/drawing/2014/main" id="{AD3E6EB6-D2D7-D827-3E79-448A225F5CC6}"/>
               </a:ext>
             </a:extLst>
           </p:cNvPr>
@@ -8932,19 +9650,88 @@
               </a:ext>
             </a:extLst>
           </a:blip>
-          <a:srcRect/>
-          <a:stretch/>
+          <a:stretch>
+            <a:fillRect/>
+          </a:stretch>
         </p:blipFill>
         <p:spPr>
           <a:xfrm>
-            <a:off x="2357685" y="119158"/>
-            <a:ext cx="9690227" cy="6367366"/>
+            <a:off x="3438167" y="0"/>
+            <a:ext cx="7906466" cy="6858000"/>
           </a:xfrm>
           <a:prstGeom prst="rect">
             <a:avLst/>
           </a:prstGeom>
         </p:spPr>
       </p:pic>
+      <p:sp>
+        <p:nvSpPr>
+          <p:cNvPr id="17" name="TextBox 16">
+            <a:extLst>
+              <a:ext uri="{FF2B5EF4-FFF2-40B4-BE49-F238E27FC236}">
+                <a16:creationId xmlns:a16="http://schemas.microsoft.com/office/drawing/2014/main" id="{8289EED0-E0CB-90EE-0CE8-89AF8E1B63B9}"/>
+              </a:ext>
+            </a:extLst>
+          </p:cNvPr>
+          <p:cNvSpPr txBox="1"/>
+          <p:nvPr/>
+        </p:nvSpPr>
+        <p:spPr>
+          <a:xfrm>
+            <a:off x="3438167" y="2627700"/>
+            <a:ext cx="6172200" cy="430887"/>
+          </a:xfrm>
+          <a:prstGeom prst="rect">
+            <a:avLst/>
+          </a:prstGeom>
+          <a:noFill/>
+        </p:spPr>
+        <p:txBody>
+          <a:bodyPr wrap="square">
+            <a:spAutoFit/>
+          </a:bodyPr>
+          <a:lstStyle/>
+          <a:p>
+            <a:r>
+              <a:rPr lang="en-US" altLang="ko-KR" sz="1050" dirty="0"/>
+              <a:t>**</a:t>
+            </a:r>
+            <a:r>
+              <a:rPr lang="ko-KR" altLang="en-US" sz="1050" dirty="0"/>
+              <a:t>조건 </a:t>
+            </a:r>
+            <a:r>
+              <a:rPr lang="en-US" altLang="ko-KR" sz="1050" dirty="0"/>
+              <a:t>A1,2,3</a:t>
+            </a:r>
+            <a:r>
+              <a:rPr lang="ko-KR" altLang="en-US" sz="1050" dirty="0"/>
+              <a:t>는 현재 </a:t>
+            </a:r>
+            <a:r>
+              <a:rPr lang="en-US" altLang="ko-KR" sz="1050" dirty="0"/>
+              <a:t>Staring </a:t>
+            </a:r>
+            <a:r>
+              <a:rPr lang="ko-KR" altLang="en-US" sz="1050" dirty="0"/>
+              <a:t>상태 내에서 각 조건에 최초로 부합하는 순간 딱 한 번씩만 검사한다</a:t>
+            </a:r>
+            <a:r>
+              <a:rPr lang="en-US" altLang="ko-KR" sz="1050" dirty="0"/>
+              <a:t>. (</a:t>
+            </a:r>
+            <a:r>
+              <a:rPr lang="ko-KR" altLang="en-US" sz="1050" dirty="0"/>
+              <a:t>실패해도 상태가 바뀌기 전까지 해당 조건은 다시 검사하지 않는다</a:t>
+            </a:r>
+            <a:r>
+              <a:rPr lang="en-US" altLang="ko-KR" sz="1050" dirty="0"/>
+              <a:t>.)</a:t>
+            </a:r>
+            <a:endParaRPr lang="ko-KR" altLang="en-US" sz="1050" dirty="0"/>
+          </a:p>
+        </p:txBody>
+      </p:sp>
     </p:spTree>
     <p:extLst>
       <p:ext uri="{BB962C8B-B14F-4D97-AF65-F5344CB8AC3E}">
@@ -8977,10 +9764,595 @@
       </p:grpSpPr>
       <p:sp>
         <p:nvSpPr>
-          <p:cNvPr id="2" name="텍스트 개체 틀 1">
+          <p:cNvPr id="4" name="내용 개체 틀 3">
             <a:extLst>
               <a:ext uri="{FF2B5EF4-FFF2-40B4-BE49-F238E27FC236}">
-                <a16:creationId xmlns:a16="http://schemas.microsoft.com/office/drawing/2014/main" id="{1A2315E5-D62A-2297-AA35-EFB032A323B0}"/>
+                <a16:creationId xmlns:a16="http://schemas.microsoft.com/office/drawing/2014/main" id="{C42D09FC-C5AA-2D1C-F75A-CE5689DF2B3A}"/>
+              </a:ext>
+            </a:extLst>
+          </p:cNvPr>
+          <p:cNvSpPr>
+            <a:spLocks noGrp="1"/>
+          </p:cNvSpPr>
+          <p:nvPr>
+            <p:ph idx="1"/>
+          </p:nvPr>
+        </p:nvSpPr>
+        <p:spPr/>
+        <p:txBody>
+          <a:bodyPr>
+            <a:normAutofit/>
+          </a:bodyPr>
+          <a:lstStyle/>
+          <a:p>
+            <a:pPr latinLnBrk="0"/>
+            <a:r>
+              <a:rPr lang="en-US" altLang="ko-KR" sz="1600" dirty="0"/>
+              <a:t>IDLE</a:t>
+            </a:r>
+            <a:r>
+              <a:rPr lang="ko-KR" altLang="en-US" sz="1600" dirty="0"/>
+              <a:t>에서 시작한다</a:t>
+            </a:r>
+            <a:r>
+              <a:rPr lang="en-US" altLang="ko-KR" sz="1600" dirty="0"/>
+              <a:t>. 15</a:t>
+            </a:r>
+            <a:r>
+              <a:rPr lang="ko-KR" altLang="en-US" sz="1600" dirty="0"/>
+              <a:t>초 후 </a:t>
+            </a:r>
+            <a:r>
+              <a:rPr lang="en-US" altLang="ko-KR" sz="1600" dirty="0"/>
+              <a:t>ABSENT</a:t>
+            </a:r>
+            <a:r>
+              <a:rPr lang="ko-KR" altLang="en-US" sz="1600" dirty="0"/>
+              <a:t>가 된다</a:t>
+            </a:r>
+            <a:r>
+              <a:rPr lang="en-US" altLang="ko-KR" sz="1600" dirty="0"/>
+              <a:t>.</a:t>
+            </a:r>
+          </a:p>
+          <a:p>
+            <a:pPr latinLnBrk="0"/>
+            <a:r>
+              <a:rPr lang="en-US" altLang="ko-KR" sz="1600" dirty="0"/>
+              <a:t>ABSENT</a:t>
+            </a:r>
+            <a:r>
+              <a:rPr lang="ko-KR" altLang="en-US" sz="1600" dirty="0"/>
+              <a:t>일 때</a:t>
+            </a:r>
+            <a:r>
+              <a:rPr lang="en-US" altLang="ko-KR" sz="1600" dirty="0"/>
+              <a:t>, </a:t>
+            </a:r>
+            <a:r>
+              <a:rPr lang="ko-KR" altLang="en-US" sz="1600" dirty="0"/>
+              <a:t>타겟이 지정되어 있지 않다면 타겟을 지정한다</a:t>
+            </a:r>
+            <a:r>
+              <a:rPr lang="en-US" altLang="ko-KR" sz="1600" dirty="0"/>
+              <a:t>. </a:t>
+            </a:r>
+            <a:r>
+              <a:rPr lang="ko-KR" altLang="en-US" sz="1600" dirty="0"/>
+              <a:t>타겟이 지정되어 있으면</a:t>
+            </a:r>
+            <a:r>
+              <a:rPr lang="en-US" altLang="ko-KR" sz="1600" dirty="0"/>
+              <a:t> </a:t>
+            </a:r>
+            <a:r>
+              <a:rPr lang="ko-KR" altLang="en-US" sz="1600" dirty="0"/>
+              <a:t>목적지를 탐색하고 탐색에 성공하면 </a:t>
+            </a:r>
+            <a:r>
+              <a:rPr lang="en-US" altLang="ko-KR" sz="1600" dirty="0"/>
+              <a:t>STAIRING</a:t>
+            </a:r>
+            <a:r>
+              <a:rPr lang="ko-KR" altLang="en-US" sz="1600" dirty="0"/>
+              <a:t>이 된다</a:t>
+            </a:r>
+            <a:r>
+              <a:rPr lang="en-US" altLang="ko-KR" sz="1600" dirty="0"/>
+              <a:t>.</a:t>
+            </a:r>
+          </a:p>
+          <a:p>
+            <a:pPr latinLnBrk="0"/>
+            <a:r>
+              <a:rPr lang="en-US" altLang="ko-KR" sz="1600" dirty="0"/>
+              <a:t>STAIRING</a:t>
+            </a:r>
+            <a:r>
+              <a:rPr lang="ko-KR" altLang="en-US" sz="1600" dirty="0"/>
+              <a:t>일 때</a:t>
+            </a:r>
+            <a:r>
+              <a:rPr lang="en-US" altLang="ko-KR" sz="1600" dirty="0"/>
+              <a:t>, ‘STARING </a:t>
+            </a:r>
+            <a:r>
+              <a:rPr lang="ko-KR" altLang="en-US" sz="1600" dirty="0"/>
+              <a:t>타이머가 종료</a:t>
+            </a:r>
+            <a:r>
+              <a:rPr lang="en-US" altLang="ko-KR" sz="1600" dirty="0"/>
+              <a:t>’</a:t>
+            </a:r>
+            <a:r>
+              <a:rPr lang="ko-KR" altLang="en-US" sz="1600" dirty="0"/>
+              <a:t>되거나 </a:t>
+            </a:r>
+            <a:r>
+              <a:rPr lang="en-US" altLang="ko-KR" sz="1600" dirty="0"/>
+              <a:t>‘</a:t>
+            </a:r>
+            <a:r>
+              <a:rPr lang="ko-KR" altLang="en-US" sz="1600" dirty="0"/>
+              <a:t>타겟이 쳐다본 횟수가 </a:t>
+            </a:r>
+            <a:r>
+              <a:rPr lang="en-US" altLang="ko-KR" sz="1600" dirty="0"/>
+              <a:t>1</a:t>
+            </a:r>
+            <a:r>
+              <a:rPr lang="ko-KR" altLang="en-US" sz="1600" dirty="0"/>
+              <a:t>회 이하이고 타겟과의 거리가 </a:t>
+            </a:r>
+            <a:r>
+              <a:rPr lang="en-US" altLang="ko-KR" sz="1600" dirty="0"/>
+              <a:t>2m </a:t>
+            </a:r>
+            <a:r>
+              <a:rPr lang="ko-KR" altLang="en-US" sz="1600" dirty="0"/>
+              <a:t>초과 </a:t>
+            </a:r>
+            <a:r>
+              <a:rPr lang="en-US" altLang="ko-KR" sz="1600" dirty="0"/>
+              <a:t>2.5m </a:t>
+            </a:r>
+            <a:r>
+              <a:rPr lang="ko-KR" altLang="en-US" sz="1600" dirty="0"/>
+              <a:t>이하</a:t>
+            </a:r>
+            <a:r>
+              <a:rPr lang="en-US" altLang="ko-KR" sz="1600" dirty="0"/>
+              <a:t>’</a:t>
+            </a:r>
+            <a:r>
+              <a:rPr lang="ko-KR" altLang="en-US" sz="1600" dirty="0"/>
+              <a:t>이거나 </a:t>
+            </a:r>
+            <a:r>
+              <a:rPr lang="en-US" altLang="ko-KR" sz="1600" dirty="0"/>
+              <a:t>‘</a:t>
+            </a:r>
+            <a:r>
+              <a:rPr lang="ko-KR" altLang="en-US" sz="1600" dirty="0"/>
+              <a:t>타겟과의 거리가 </a:t>
+            </a:r>
+            <a:r>
+              <a:rPr lang="en-US" altLang="ko-KR" sz="1600" dirty="0"/>
+              <a:t>10m </a:t>
+            </a:r>
+            <a:r>
+              <a:rPr lang="ko-KR" altLang="en-US" sz="1600" dirty="0"/>
+              <a:t>이상</a:t>
+            </a:r>
+            <a:r>
+              <a:rPr lang="en-US" altLang="ko-KR" sz="1600" dirty="0"/>
+              <a:t>’</a:t>
+            </a:r>
+            <a:r>
+              <a:rPr lang="ko-KR" altLang="en-US" sz="1600" dirty="0"/>
+              <a:t>이면 </a:t>
+            </a:r>
+            <a:r>
+              <a:rPr lang="en-US" altLang="ko-KR" sz="1600" dirty="0"/>
+              <a:t>VANISHING</a:t>
+            </a:r>
+            <a:r>
+              <a:rPr lang="ko-KR" altLang="en-US" sz="1600" dirty="0"/>
+              <a:t>이 된다</a:t>
+            </a:r>
+            <a:r>
+              <a:rPr lang="en-US" altLang="ko-KR" sz="1600" dirty="0"/>
+              <a:t>.</a:t>
+            </a:r>
+          </a:p>
+          <a:p>
+            <a:pPr latinLnBrk="0"/>
+            <a:r>
+              <a:rPr lang="en-US" altLang="ko-KR" sz="1600" dirty="0"/>
+              <a:t>STARING</a:t>
+            </a:r>
+            <a:r>
+              <a:rPr lang="ko-KR" altLang="en-US" sz="1600" dirty="0"/>
+              <a:t>일 때</a:t>
+            </a:r>
+            <a:r>
+              <a:rPr lang="en-US" altLang="ko-KR" sz="1600" dirty="0"/>
+              <a:t>, ‘</a:t>
+            </a:r>
+            <a:r>
+              <a:rPr lang="ko-KR" altLang="en-US" sz="1600" dirty="0"/>
+              <a:t>조건 </a:t>
+            </a:r>
+            <a:r>
+              <a:rPr lang="en-US" altLang="ko-KR" sz="1600" dirty="0"/>
+              <a:t>A1,2,3 </a:t>
+            </a:r>
+            <a:r>
+              <a:rPr lang="ko-KR" altLang="en-US" sz="1600" dirty="0"/>
+              <a:t>중 하나라도 성공</a:t>
+            </a:r>
+            <a:r>
+              <a:rPr lang="en-US" altLang="ko-KR" sz="1600" dirty="0"/>
+              <a:t>’</a:t>
+            </a:r>
+            <a:r>
+              <a:rPr lang="ko-KR" altLang="en-US" sz="1600" dirty="0"/>
+              <a:t>하거나 </a:t>
+            </a:r>
+            <a:r>
+              <a:rPr lang="en-US" altLang="ko-KR" sz="1600" dirty="0"/>
+              <a:t>‘</a:t>
+            </a:r>
+            <a:r>
+              <a:rPr lang="ko-KR" altLang="en-US" sz="1600" dirty="0"/>
+              <a:t>타겟과의 거리가 </a:t>
+            </a:r>
+            <a:r>
+              <a:rPr lang="en-US" altLang="ko-KR" sz="1600" dirty="0"/>
+              <a:t>1.5m</a:t>
+            </a:r>
+            <a:r>
+              <a:rPr lang="ko-KR" altLang="en-US" sz="1600" dirty="0"/>
+              <a:t>이하</a:t>
+            </a:r>
+            <a:r>
+              <a:rPr lang="en-US" altLang="ko-KR" sz="1600" dirty="0"/>
+              <a:t>’</a:t>
+            </a:r>
+            <a:r>
+              <a:rPr lang="ko-KR" altLang="en-US" sz="1600" dirty="0"/>
+              <a:t>이면 </a:t>
+            </a:r>
+            <a:r>
+              <a:rPr lang="en-US" altLang="ko-KR" sz="1600" dirty="0"/>
+              <a:t>CHASE</a:t>
+            </a:r>
+            <a:r>
+              <a:rPr lang="ko-KR" altLang="en-US" sz="1600" dirty="0"/>
+              <a:t>가 된다</a:t>
+            </a:r>
+            <a:r>
+              <a:rPr lang="en-US" altLang="ko-KR" sz="1600" dirty="0"/>
+              <a:t>. </a:t>
+            </a:r>
+            <a:r>
+              <a:rPr lang="ko-KR" altLang="en-US" sz="1600" dirty="0"/>
+              <a:t>조건 </a:t>
+            </a:r>
+            <a:r>
+              <a:rPr lang="en-US" altLang="ko-KR" sz="1600" dirty="0"/>
+              <a:t>A1,2,3</a:t>
+            </a:r>
+            <a:r>
+              <a:rPr lang="ko-KR" altLang="en-US" sz="1600" dirty="0"/>
+              <a:t>는 현재 </a:t>
+            </a:r>
+            <a:r>
+              <a:rPr lang="en-US" altLang="ko-KR" sz="1600" dirty="0"/>
+              <a:t>Staring </a:t>
+            </a:r>
+            <a:r>
+              <a:rPr lang="ko-KR" altLang="en-US" sz="1600" dirty="0"/>
+              <a:t>상태 내에서 각 조건에 최초로 부합하는 순간 딱 한 번씩만 검사한다</a:t>
+            </a:r>
+            <a:r>
+              <a:rPr lang="en-US" altLang="ko-KR" sz="1600" dirty="0"/>
+              <a:t>. (</a:t>
+            </a:r>
+            <a:r>
+              <a:rPr lang="ko-KR" altLang="en-US" sz="1600" dirty="0"/>
+              <a:t>실패해도 상태가 바뀌기 전까지 해당 조건은 다시 검사하지 않는다</a:t>
+            </a:r>
+            <a:r>
+              <a:rPr lang="en-US" altLang="ko-KR" sz="1600" dirty="0"/>
+              <a:t>.)</a:t>
+            </a:r>
+          </a:p>
+          <a:p>
+            <a:pPr latinLnBrk="0"/>
+            <a:r>
+              <a:rPr lang="en-US" altLang="ko-KR" sz="1600" dirty="0"/>
+              <a:t>CHASE</a:t>
+            </a:r>
+            <a:r>
+              <a:rPr lang="ko-KR" altLang="en-US" sz="1600" dirty="0"/>
+              <a:t>일 때</a:t>
+            </a:r>
+            <a:r>
+              <a:rPr lang="en-US" altLang="ko-KR" sz="1600" dirty="0"/>
+              <a:t>, </a:t>
+            </a:r>
+            <a:r>
+              <a:rPr lang="en-US" altLang="ko-KR" sz="1600" dirty="0">
+                <a:solidFill>
+                  <a:srgbClr val="000000"/>
+                </a:solidFill>
+                <a:latin typeface="Helvetica" panose="020B0604020202020204" pitchFamily="34" charset="0"/>
+              </a:rPr>
+              <a:t>‘</a:t>
+            </a:r>
+            <a:r>
+              <a:rPr lang="ko-KR" altLang="en-US" sz="1600" b="0" i="0" dirty="0">
+                <a:solidFill>
+                  <a:srgbClr val="000000"/>
+                </a:solidFill>
+                <a:effectLst/>
+                <a:latin typeface="Helvetica" panose="020B0604020202020204" pitchFamily="34" charset="0"/>
+              </a:rPr>
+              <a:t>추적 종료 시간이</a:t>
+            </a:r>
+            <a:r>
+              <a:rPr lang="en-US" altLang="ko-KR" sz="1600" b="0" i="0" dirty="0">
+                <a:solidFill>
+                  <a:srgbClr val="000000"/>
+                </a:solidFill>
+                <a:effectLst/>
+                <a:latin typeface="Helvetica" panose="020B0604020202020204" pitchFamily="34" charset="0"/>
+              </a:rPr>
+              <a:t> </a:t>
+            </a:r>
+            <a:r>
+              <a:rPr lang="ko-KR" altLang="en-US" sz="1600" b="0" i="0" dirty="0">
+                <a:solidFill>
+                  <a:srgbClr val="000000"/>
+                </a:solidFill>
+                <a:effectLst/>
+                <a:latin typeface="Helvetica" panose="020B0604020202020204" pitchFamily="34" charset="0"/>
+              </a:rPr>
+              <a:t>경과</a:t>
+            </a:r>
+            <a:r>
+              <a:rPr lang="en-US" altLang="ko-KR" sz="1600" b="0" i="0" dirty="0">
+                <a:solidFill>
+                  <a:srgbClr val="000000"/>
+                </a:solidFill>
+                <a:effectLst/>
+                <a:latin typeface="Helvetica" panose="020B0604020202020204" pitchFamily="34" charset="0"/>
+              </a:rPr>
+              <a:t>’</a:t>
+            </a:r>
+            <a:r>
+              <a:rPr lang="ko-KR" altLang="en-US" sz="1600" b="0" i="0" dirty="0">
+                <a:solidFill>
+                  <a:srgbClr val="000000"/>
+                </a:solidFill>
+                <a:effectLst/>
+                <a:latin typeface="Helvetica" panose="020B0604020202020204" pitchFamily="34" charset="0"/>
+              </a:rPr>
+              <a:t>하거나 </a:t>
+            </a:r>
+            <a:r>
+              <a:rPr lang="en-US" altLang="ko-KR" sz="1600" b="0" i="0" dirty="0">
+                <a:solidFill>
+                  <a:srgbClr val="000000"/>
+                </a:solidFill>
+                <a:effectLst/>
+                <a:latin typeface="Helvetica" panose="020B0604020202020204" pitchFamily="34" charset="0"/>
+              </a:rPr>
+              <a:t>‘</a:t>
+            </a:r>
+            <a:r>
+              <a:rPr lang="ko-KR" altLang="en-US" sz="1600" b="0" i="0" dirty="0">
+                <a:solidFill>
+                  <a:srgbClr val="000000"/>
+                </a:solidFill>
+                <a:effectLst/>
+                <a:latin typeface="Helvetica" panose="020B0604020202020204" pitchFamily="34" charset="0"/>
+              </a:rPr>
+              <a:t>타겟과의 거리가 </a:t>
+            </a:r>
+            <a:r>
+              <a:rPr lang="en-US" altLang="ko-KR" sz="1600" b="0" i="0" dirty="0">
+                <a:solidFill>
+                  <a:srgbClr val="000000"/>
+                </a:solidFill>
+                <a:effectLst/>
+                <a:latin typeface="Helvetica" panose="020B0604020202020204" pitchFamily="34" charset="0"/>
+              </a:rPr>
+              <a:t>30m </a:t>
+            </a:r>
+            <a:r>
+              <a:rPr lang="ko-KR" altLang="en-US" sz="1600" b="0" i="0" dirty="0">
+                <a:solidFill>
+                  <a:srgbClr val="000000"/>
+                </a:solidFill>
+                <a:effectLst/>
+                <a:latin typeface="Helvetica" panose="020B0604020202020204" pitchFamily="34" charset="0"/>
+              </a:rPr>
+              <a:t>이상</a:t>
+            </a:r>
+            <a:r>
+              <a:rPr lang="en-US" altLang="ko-KR" sz="1600" b="0" i="0" dirty="0">
+                <a:solidFill>
+                  <a:srgbClr val="000000"/>
+                </a:solidFill>
+                <a:effectLst/>
+                <a:latin typeface="Helvetica" panose="020B0604020202020204" pitchFamily="34" charset="0"/>
+              </a:rPr>
+              <a:t>’</a:t>
+            </a:r>
+            <a:r>
+              <a:rPr lang="ko-KR" altLang="en-US" sz="1600" b="0" i="0" dirty="0">
+                <a:solidFill>
+                  <a:srgbClr val="000000"/>
+                </a:solidFill>
+                <a:effectLst/>
+                <a:latin typeface="Helvetica" panose="020B0604020202020204" pitchFamily="34" charset="0"/>
+              </a:rPr>
+              <a:t>이 되거나 </a:t>
+            </a:r>
+            <a:r>
+              <a:rPr lang="en-US" altLang="ko-KR" sz="1600" b="0" i="0" dirty="0">
+                <a:solidFill>
+                  <a:srgbClr val="000000"/>
+                </a:solidFill>
+                <a:effectLst/>
+                <a:latin typeface="Helvetica" panose="020B0604020202020204" pitchFamily="34" charset="0"/>
+              </a:rPr>
+              <a:t>‘</a:t>
+            </a:r>
+            <a:r>
+              <a:rPr lang="ko-KR" altLang="en-US" sz="1600" b="0" i="0" dirty="0">
+                <a:solidFill>
+                  <a:srgbClr val="000000"/>
+                </a:solidFill>
+                <a:effectLst/>
+                <a:latin typeface="Helvetica" panose="020B0604020202020204" pitchFamily="34" charset="0"/>
+              </a:rPr>
+              <a:t>타겟과 충돌</a:t>
+            </a:r>
+            <a:r>
+              <a:rPr lang="en-US" altLang="ko-KR" sz="1600" b="0" i="0" dirty="0">
+                <a:solidFill>
+                  <a:srgbClr val="000000"/>
+                </a:solidFill>
+                <a:effectLst/>
+                <a:latin typeface="Helvetica" panose="020B0604020202020204" pitchFamily="34" charset="0"/>
+              </a:rPr>
+              <a:t>‘</a:t>
+            </a:r>
+            <a:r>
+              <a:rPr lang="ko-KR" altLang="en-US" sz="1600" dirty="0">
+                <a:solidFill>
+                  <a:srgbClr val="000000"/>
+                </a:solidFill>
+                <a:latin typeface="Helvetica" panose="020B0604020202020204" pitchFamily="34" charset="0"/>
+              </a:rPr>
+              <a:t>하면 </a:t>
+            </a:r>
+            <a:r>
+              <a:rPr lang="en-US" altLang="ko-KR" sz="1600" dirty="0">
+                <a:solidFill>
+                  <a:srgbClr val="000000"/>
+                </a:solidFill>
+                <a:latin typeface="Helvetica" panose="020B0604020202020204" pitchFamily="34" charset="0"/>
+              </a:rPr>
+              <a:t>VANISHING</a:t>
+            </a:r>
+            <a:r>
+              <a:rPr lang="ko-KR" altLang="en-US" sz="1600" dirty="0">
+                <a:solidFill>
+                  <a:srgbClr val="000000"/>
+                </a:solidFill>
+                <a:latin typeface="Helvetica" panose="020B0604020202020204" pitchFamily="34" charset="0"/>
+              </a:rPr>
+              <a:t>이 된다</a:t>
+            </a:r>
+            <a:r>
+              <a:rPr lang="en-US" altLang="ko-KR" sz="1600" dirty="0">
+                <a:solidFill>
+                  <a:srgbClr val="000000"/>
+                </a:solidFill>
+                <a:latin typeface="Helvetica" panose="020B0604020202020204" pitchFamily="34" charset="0"/>
+              </a:rPr>
+              <a:t>.</a:t>
+            </a:r>
+          </a:p>
+          <a:p>
+            <a:pPr latinLnBrk="0"/>
+            <a:r>
+              <a:rPr lang="en-US" altLang="ko-KR" sz="1600" dirty="0">
+                <a:solidFill>
+                  <a:srgbClr val="000000"/>
+                </a:solidFill>
+                <a:latin typeface="Helvetica" panose="020B0604020202020204" pitchFamily="34" charset="0"/>
+              </a:rPr>
+              <a:t>VANISHNG</a:t>
+            </a:r>
+            <a:r>
+              <a:rPr lang="ko-KR" altLang="en-US" sz="1600" dirty="0">
+                <a:solidFill>
+                  <a:srgbClr val="000000"/>
+                </a:solidFill>
+                <a:latin typeface="Helvetica" panose="020B0604020202020204" pitchFamily="34" charset="0"/>
+              </a:rPr>
+              <a:t>이후 아무 조건 없이 </a:t>
+            </a:r>
+            <a:r>
+              <a:rPr lang="en-US" altLang="ko-KR" sz="1600" dirty="0">
+                <a:solidFill>
+                  <a:srgbClr val="000000"/>
+                </a:solidFill>
+                <a:latin typeface="Helvetica" panose="020B0604020202020204" pitchFamily="34" charset="0"/>
+              </a:rPr>
+              <a:t>IDLE</a:t>
+            </a:r>
+            <a:r>
+              <a:rPr lang="ko-KR" altLang="en-US" sz="1600" dirty="0">
+                <a:solidFill>
+                  <a:srgbClr val="000000"/>
+                </a:solidFill>
+                <a:latin typeface="Helvetica" panose="020B0604020202020204" pitchFamily="34" charset="0"/>
+              </a:rPr>
+              <a:t>이 된다</a:t>
+            </a:r>
+            <a:r>
+              <a:rPr lang="en-US" altLang="ko-KR" sz="1600" dirty="0">
+                <a:solidFill>
+                  <a:srgbClr val="000000"/>
+                </a:solidFill>
+                <a:latin typeface="Helvetica" panose="020B0604020202020204" pitchFamily="34" charset="0"/>
+              </a:rPr>
+              <a:t>.</a:t>
+            </a:r>
+          </a:p>
+        </p:txBody>
+      </p:sp>
+      <p:sp>
+        <p:nvSpPr>
+          <p:cNvPr id="5" name="슬라이드 번호 개체 틀 4">
+            <a:extLst>
+              <a:ext uri="{FF2B5EF4-FFF2-40B4-BE49-F238E27FC236}">
+                <a16:creationId xmlns:a16="http://schemas.microsoft.com/office/drawing/2014/main" id="{FE7EE312-4726-E011-B835-C0EF99521163}"/>
+              </a:ext>
+            </a:extLst>
+          </p:cNvPr>
+          <p:cNvSpPr>
+            <a:spLocks noGrp="1"/>
+          </p:cNvSpPr>
+          <p:nvPr>
+            <p:ph type="sldNum" sz="quarter" idx="12"/>
+          </p:nvPr>
+        </p:nvSpPr>
+        <p:spPr/>
+        <p:txBody>
+          <a:bodyPr/>
+          <a:lstStyle/>
+          <a:p>
+            <a:fld id="{2A226FEB-661D-4181-84CB-C53DCFE1931A}" type="slidenum">
+              <a:rPr lang="ko-KR" altLang="en-US" smtClean="0"/>
+              <a:t>5</a:t>
+            </a:fld>
+            <a:endParaRPr lang="ko-KR" altLang="en-US"/>
+          </a:p>
+        </p:txBody>
+      </p:sp>
+      <p:sp>
+        <p:nvSpPr>
+          <p:cNvPr id="6" name="텍스트 개체 틀 1">
+            <a:extLst>
+              <a:ext uri="{FF2B5EF4-FFF2-40B4-BE49-F238E27FC236}">
+                <a16:creationId xmlns:a16="http://schemas.microsoft.com/office/drawing/2014/main" id="{2A46BF1A-3D59-9D17-50C8-2789794C9B26}"/>
               </a:ext>
             </a:extLst>
           </p:cNvPr>
@@ -9001,6 +10373,7 @@
           <a:bodyPr/>
           <a:lstStyle/>
           <a:p>
+            <a:pPr latinLnBrk="0"/>
             <a:r>
               <a:rPr lang="en-US" altLang="ko-KR" b="1" dirty="0"/>
               <a:t>FSM </a:t>
@@ -9015,7 +10388,7 @@
             <a:pPr latinLnBrk="0"/>
             <a:r>
               <a:rPr lang="ko-KR" altLang="en-US" dirty="0"/>
-              <a:t>타겟 지정</a:t>
+              <a:t>타겟 지정 조건과 방식</a:t>
             </a:r>
             <a:endParaRPr lang="en-US" altLang="ko-KR" dirty="0"/>
           </a:p>
@@ -9027,19 +10400,17 @@
             </a:r>
           </a:p>
           <a:p>
-            <a:endParaRPr lang="en-US" altLang="ko-KR" b="1" dirty="0"/>
-          </a:p>
-          <a:p>
+            <a:pPr latinLnBrk="0"/>
             <a:endParaRPr lang="ko-KR" altLang="en-US" dirty="0"/>
           </a:p>
         </p:txBody>
       </p:sp>
       <p:sp>
         <p:nvSpPr>
-          <p:cNvPr id="3" name="제목 2">
+          <p:cNvPr id="7" name="제목 2">
             <a:extLst>
               <a:ext uri="{FF2B5EF4-FFF2-40B4-BE49-F238E27FC236}">
-                <a16:creationId xmlns:a16="http://schemas.microsoft.com/office/drawing/2014/main" id="{26403A87-F891-1EAB-B191-1665504589E5}"/>
+                <a16:creationId xmlns:a16="http://schemas.microsoft.com/office/drawing/2014/main" id="{807D3CDE-51FC-4237-6A79-20DD8AF1991E}"/>
               </a:ext>
             </a:extLst>
           </p:cNvPr>
@@ -9067,1108 +10438,40 @@
           </a:p>
         </p:txBody>
       </p:sp>
-      <p:sp>
-        <p:nvSpPr>
-          <p:cNvPr id="4" name="내용 개체 틀 3">
+      <p:pic>
+        <p:nvPicPr>
+          <p:cNvPr id="9" name="그림 8">
             <a:extLst>
               <a:ext uri="{FF2B5EF4-FFF2-40B4-BE49-F238E27FC236}">
-                <a16:creationId xmlns:a16="http://schemas.microsoft.com/office/drawing/2014/main" id="{FBD27661-6347-E06A-1C78-937786248C2B}"/>
+                <a16:creationId xmlns:a16="http://schemas.microsoft.com/office/drawing/2014/main" id="{1FDAB6D4-B28B-8A96-F843-760CA5FE7807}"/>
               </a:ext>
             </a:extLst>
           </p:cNvPr>
-          <p:cNvSpPr>
-            <a:spLocks noGrp="1"/>
-          </p:cNvSpPr>
-          <p:nvPr>
-            <p:ph idx="1"/>
-          </p:nvPr>
-        </p:nvSpPr>
-        <p:spPr/>
-        <p:txBody>
-          <a:bodyPr>
-            <a:normAutofit/>
-          </a:bodyPr>
-          <a:lstStyle/>
-          <a:p>
-            <a:pPr latinLnBrk="0"/>
-            <a:r>
-              <a:rPr lang="ko-KR" altLang="en-US" sz="1600" dirty="0">
-                <a:ea typeface="+mn-lt"/>
-                <a:cs typeface="+mn-lt"/>
-              </a:rPr>
-              <a:t>타겟이 사망하면</a:t>
-            </a:r>
-            <a:r>
-              <a:rPr lang="en-US" altLang="ko-KR" sz="1600" dirty="0">
-                <a:ea typeface="+mn-lt"/>
-                <a:cs typeface="+mn-lt"/>
-              </a:rPr>
-              <a:t> </a:t>
-            </a:r>
-            <a:r>
-              <a:rPr lang="ko-KR" altLang="en-US" sz="1600" dirty="0">
-                <a:ea typeface="+mn-lt"/>
-                <a:cs typeface="+mn-lt"/>
-              </a:rPr>
-              <a:t>몬스터는 즉시 </a:t>
-            </a:r>
-            <a:r>
-              <a:rPr lang="en-US" altLang="ko-KR" sz="1600" dirty="0">
-                <a:ea typeface="+mn-lt"/>
-                <a:cs typeface="+mn-lt"/>
-              </a:rPr>
-              <a:t>‘Absent’</a:t>
-            </a:r>
-            <a:r>
-              <a:rPr lang="ko-KR" altLang="en-US" sz="1600" dirty="0">
-                <a:ea typeface="+mn-lt"/>
-                <a:cs typeface="+mn-lt"/>
-              </a:rPr>
-              <a:t>가 된다</a:t>
-            </a:r>
-            <a:r>
-              <a:rPr lang="en-US" altLang="ko-KR" sz="1600" dirty="0">
-                <a:ea typeface="+mn-lt"/>
-                <a:cs typeface="+mn-lt"/>
-              </a:rPr>
-              <a:t>. </a:t>
-            </a:r>
-            <a:r>
-              <a:rPr lang="ko-KR" altLang="en-US" sz="1600" dirty="0" err="1">
-                <a:ea typeface="+mn-lt"/>
-                <a:cs typeface="+mn-lt"/>
-              </a:rPr>
-              <a:t>스탯의</a:t>
-            </a:r>
-            <a:r>
-              <a:rPr lang="ko-KR" altLang="en-US" sz="1600" dirty="0">
-                <a:ea typeface="+mn-lt"/>
-                <a:cs typeface="+mn-lt"/>
-              </a:rPr>
-              <a:t> 타이머와 횟수를 초기화하고 새로운 타겟을 지정한다</a:t>
-            </a:r>
-            <a:r>
-              <a:rPr lang="en-US" altLang="ko-KR" sz="1600" dirty="0">
-                <a:ea typeface="+mn-lt"/>
-                <a:cs typeface="+mn-lt"/>
-              </a:rPr>
-              <a:t>.</a:t>
-            </a:r>
-          </a:p>
-          <a:p>
-            <a:pPr latinLnBrk="0"/>
-            <a:r>
-              <a:rPr lang="en-US" altLang="ko-KR" sz="1600" dirty="0">
-                <a:ea typeface="+mn-lt"/>
-                <a:cs typeface="+mn-lt"/>
-              </a:rPr>
-              <a:t>Ghost</a:t>
-            </a:r>
-            <a:r>
-              <a:rPr lang="ko-KR" altLang="en-US" sz="1600" dirty="0">
-                <a:ea typeface="+mn-lt"/>
-                <a:cs typeface="+mn-lt"/>
-              </a:rPr>
-              <a:t>는 문을 그냥 통과할 수 있다</a:t>
-            </a:r>
-            <a:r>
-              <a:rPr lang="en-US" altLang="ko-KR" sz="1600" dirty="0">
-                <a:ea typeface="+mn-lt"/>
-                <a:cs typeface="+mn-lt"/>
-              </a:rPr>
-              <a:t>.</a:t>
-            </a:r>
-          </a:p>
-          <a:p>
-            <a:pPr latinLnBrk="0"/>
-            <a:endParaRPr lang="en-US" altLang="ko-KR" sz="1600" dirty="0">
-              <a:ea typeface="+mn-lt"/>
-              <a:cs typeface="+mn-lt"/>
-            </a:endParaRPr>
-          </a:p>
-          <a:p>
-            <a:pPr latinLnBrk="0"/>
-            <a:r>
-              <a:rPr lang="en-US" altLang="ko-KR" sz="1600" dirty="0">
-                <a:ea typeface="+mn-lt"/>
-                <a:cs typeface="+mn-lt"/>
-              </a:rPr>
-              <a:t>Absent</a:t>
-            </a:r>
-            <a:r>
-              <a:rPr lang="ko-KR" altLang="en-US" sz="1600" dirty="0">
-                <a:ea typeface="+mn-lt"/>
-                <a:cs typeface="+mn-lt"/>
-              </a:rPr>
-              <a:t>일 때</a:t>
-            </a:r>
-            <a:r>
-              <a:rPr lang="en-US" altLang="ko-KR" sz="1600" dirty="0">
-                <a:ea typeface="+mn-lt"/>
-                <a:cs typeface="+mn-lt"/>
-              </a:rPr>
-              <a:t>, Absent </a:t>
-            </a:r>
-            <a:r>
-              <a:rPr lang="ko-KR" altLang="en-US" sz="1600" dirty="0">
-                <a:ea typeface="+mn-lt"/>
-                <a:cs typeface="+mn-lt"/>
-              </a:rPr>
-              <a:t>타이머가 종료되면</a:t>
-            </a:r>
-            <a:r>
-              <a:rPr lang="en-US" altLang="ko-KR" sz="1600" dirty="0">
-                <a:ea typeface="+mn-lt"/>
-                <a:cs typeface="+mn-lt"/>
-              </a:rPr>
-              <a:t> </a:t>
-            </a:r>
-            <a:r>
-              <a:rPr lang="ko-KR" altLang="en-US" sz="1600" dirty="0">
-                <a:ea typeface="+mn-lt"/>
-                <a:cs typeface="+mn-lt"/>
-              </a:rPr>
-              <a:t>몬스터는 목적지를 선택하는 데 성공할 때까지 </a:t>
-            </a:r>
-            <a:r>
-              <a:rPr lang="en-US" altLang="ko-KR" sz="1600" dirty="0">
-                <a:ea typeface="+mn-lt"/>
-                <a:cs typeface="+mn-lt"/>
-              </a:rPr>
-              <a:t>4</a:t>
-            </a:r>
-            <a:r>
-              <a:rPr lang="ko-KR" altLang="en-US" sz="1600" dirty="0">
-                <a:ea typeface="+mn-lt"/>
-                <a:cs typeface="+mn-lt"/>
-              </a:rPr>
-              <a:t>초에 한 번씩 목적지를 탐색한다</a:t>
-            </a:r>
-            <a:r>
-              <a:rPr lang="en-US" altLang="ko-KR" sz="1600" dirty="0">
-                <a:ea typeface="+mn-lt"/>
-                <a:cs typeface="+mn-lt"/>
-              </a:rPr>
-              <a:t>.</a:t>
-            </a:r>
-          </a:p>
-          <a:p>
-            <a:pPr latinLnBrk="0"/>
-            <a:r>
-              <a:rPr lang="ko-KR" altLang="en-US" sz="1600" dirty="0">
-                <a:ea typeface="+mn-lt"/>
-                <a:cs typeface="+mn-lt"/>
-              </a:rPr>
-              <a:t>목적지를 탐색하는 데 성공하면</a:t>
-            </a:r>
-            <a:r>
-              <a:rPr lang="en-US" altLang="ko-KR" sz="1600" dirty="0">
-                <a:ea typeface="+mn-lt"/>
-                <a:cs typeface="+mn-lt"/>
-              </a:rPr>
-              <a:t> </a:t>
-            </a:r>
-            <a:r>
-              <a:rPr lang="ko-KR" altLang="en-US" sz="1600" dirty="0">
-                <a:ea typeface="+mn-lt"/>
-                <a:cs typeface="+mn-lt"/>
-              </a:rPr>
-              <a:t>해당 위치에 </a:t>
-            </a:r>
-            <a:r>
-              <a:rPr lang="ko-KR" altLang="en-US" sz="1600" dirty="0" err="1">
-                <a:ea typeface="+mn-lt"/>
-                <a:cs typeface="+mn-lt"/>
-              </a:rPr>
-              <a:t>스폰되어</a:t>
-            </a:r>
-            <a:r>
-              <a:rPr lang="ko-KR" altLang="en-US" sz="1600" dirty="0">
-                <a:ea typeface="+mn-lt"/>
-                <a:cs typeface="+mn-lt"/>
-              </a:rPr>
-              <a:t> </a:t>
-            </a:r>
-            <a:r>
-              <a:rPr lang="en-US" altLang="ko-KR" sz="1600" dirty="0">
-                <a:ea typeface="+mn-lt"/>
-                <a:cs typeface="+mn-lt"/>
-              </a:rPr>
-              <a:t>Staring</a:t>
-            </a:r>
-            <a:r>
-              <a:rPr lang="ko-KR" altLang="en-US" sz="1600" dirty="0">
-                <a:ea typeface="+mn-lt"/>
-                <a:cs typeface="+mn-lt"/>
-              </a:rPr>
-              <a:t>한다</a:t>
-            </a:r>
-            <a:r>
-              <a:rPr lang="en-US" altLang="ko-KR" sz="1600" dirty="0">
-                <a:ea typeface="+mn-lt"/>
-                <a:cs typeface="+mn-lt"/>
-              </a:rPr>
-              <a:t>.</a:t>
-            </a:r>
-          </a:p>
-          <a:p>
-            <a:pPr latinLnBrk="0"/>
-            <a:endParaRPr lang="en-US" altLang="ko-KR" sz="1600" dirty="0">
-              <a:ea typeface="+mn-lt"/>
-              <a:cs typeface="+mn-lt"/>
-            </a:endParaRPr>
-          </a:p>
-          <a:p>
-            <a:pPr latinLnBrk="0"/>
-            <a:r>
-              <a:rPr lang="en-US" altLang="ko-KR" sz="1600" dirty="0">
-                <a:ea typeface="+mn-lt"/>
-                <a:cs typeface="+mn-lt"/>
-              </a:rPr>
-              <a:t>Staring</a:t>
-            </a:r>
-            <a:r>
-              <a:rPr lang="ko-KR" altLang="en-US" sz="1600" dirty="0">
-                <a:ea typeface="+mn-lt"/>
-                <a:cs typeface="+mn-lt"/>
-              </a:rPr>
-              <a:t>일 때</a:t>
-            </a:r>
-            <a:r>
-              <a:rPr lang="en-US" altLang="ko-KR" sz="1600" dirty="0">
-                <a:ea typeface="+mn-lt"/>
-                <a:cs typeface="+mn-lt"/>
-              </a:rPr>
-              <a:t>, </a:t>
-            </a:r>
-            <a:r>
-              <a:rPr lang="en-US" altLang="ko-KR" sz="1600" dirty="0">
-                <a:highlight>
-                  <a:srgbClr val="FFFF00"/>
-                </a:highlight>
-                <a:ea typeface="+mn-lt"/>
-                <a:cs typeface="+mn-lt"/>
-              </a:rPr>
-              <a:t>Staring </a:t>
-            </a:r>
-            <a:r>
-              <a:rPr lang="ko-KR" altLang="en-US" sz="1600" dirty="0">
-                <a:highlight>
-                  <a:srgbClr val="FFFF00"/>
-                </a:highlight>
-                <a:ea typeface="+mn-lt"/>
-                <a:cs typeface="+mn-lt"/>
-              </a:rPr>
-              <a:t>타이머가 종료되거나</a:t>
-            </a:r>
-            <a:r>
-              <a:rPr lang="en-US" altLang="ko-KR" sz="1600" dirty="0">
-                <a:highlight>
-                  <a:srgbClr val="FFFF00"/>
-                </a:highlight>
-                <a:ea typeface="+mn-lt"/>
-                <a:cs typeface="+mn-lt"/>
-              </a:rPr>
-              <a:t>(</a:t>
-            </a:r>
-            <a:r>
-              <a:rPr lang="ko-KR" altLang="en-US" sz="1600" dirty="0">
-                <a:highlight>
-                  <a:srgbClr val="FFFF00"/>
-                </a:highlight>
-                <a:ea typeface="+mn-lt"/>
-                <a:cs typeface="+mn-lt"/>
-              </a:rPr>
-              <a:t>조건 </a:t>
-            </a:r>
-            <a:r>
-              <a:rPr lang="en-US" altLang="ko-KR" sz="1600" dirty="0">
-                <a:highlight>
-                  <a:srgbClr val="FFFF00"/>
-                </a:highlight>
-                <a:ea typeface="+mn-lt"/>
-                <a:cs typeface="+mn-lt"/>
-              </a:rPr>
-              <a:t>C1)</a:t>
-            </a:r>
-            <a:r>
-              <a:rPr lang="en-US" altLang="ko-KR" sz="1600" dirty="0">
-                <a:ea typeface="+mn-lt"/>
-                <a:cs typeface="+mn-lt"/>
-              </a:rPr>
-              <a:t>,</a:t>
-            </a:r>
-            <a:r>
-              <a:rPr lang="ko-KR" altLang="en-US" sz="1600" dirty="0">
-                <a:ea typeface="+mn-lt"/>
-                <a:cs typeface="+mn-lt"/>
-              </a:rPr>
-              <a:t> </a:t>
-            </a:r>
-            <a:r>
-              <a:rPr lang="ko-KR" altLang="en-US" sz="1600" dirty="0">
-                <a:highlight>
-                  <a:srgbClr val="00FFFF"/>
-                </a:highlight>
-                <a:ea typeface="+mn-lt"/>
-                <a:cs typeface="+mn-lt"/>
-              </a:rPr>
-              <a:t>몬스터의 목격당한 횟수가 </a:t>
-            </a:r>
-            <a:r>
-              <a:rPr lang="en-US" altLang="ko-KR" sz="1600" dirty="0">
-                <a:highlight>
-                  <a:srgbClr val="00FFFF"/>
-                </a:highlight>
-                <a:ea typeface="+mn-lt"/>
-                <a:cs typeface="+mn-lt"/>
-              </a:rPr>
-              <a:t>1</a:t>
-            </a:r>
-            <a:r>
-              <a:rPr lang="ko-KR" altLang="en-US" sz="1600" dirty="0">
-                <a:highlight>
-                  <a:srgbClr val="00FFFF"/>
-                </a:highlight>
-                <a:ea typeface="+mn-lt"/>
-                <a:cs typeface="+mn-lt"/>
-              </a:rPr>
-              <a:t>회 이하이고 타겟과의 거리가 </a:t>
-            </a:r>
-            <a:r>
-              <a:rPr lang="en-US" altLang="ko-KR" sz="1600" dirty="0">
-                <a:highlight>
-                  <a:srgbClr val="00FFFF"/>
-                </a:highlight>
-                <a:ea typeface="+mn-lt"/>
-                <a:cs typeface="+mn-lt"/>
-              </a:rPr>
-              <a:t>5m</a:t>
-            </a:r>
-            <a:r>
-              <a:rPr lang="ko-KR" altLang="en-US" sz="1600" dirty="0">
-                <a:highlight>
-                  <a:srgbClr val="00FFFF"/>
-                </a:highlight>
-                <a:ea typeface="+mn-lt"/>
-                <a:cs typeface="+mn-lt"/>
-              </a:rPr>
-              <a:t> 이하라면</a:t>
-            </a:r>
-            <a:r>
-              <a:rPr lang="en-US" altLang="ko-KR" sz="1600" dirty="0">
-                <a:highlight>
-                  <a:srgbClr val="00FFFF"/>
-                </a:highlight>
-                <a:ea typeface="+mn-lt"/>
-                <a:cs typeface="+mn-lt"/>
-              </a:rPr>
-              <a:t>(</a:t>
-            </a:r>
-            <a:r>
-              <a:rPr lang="ko-KR" altLang="en-US" sz="1600" dirty="0">
-                <a:highlight>
-                  <a:srgbClr val="00FFFF"/>
-                </a:highlight>
-                <a:ea typeface="+mn-lt"/>
-                <a:cs typeface="+mn-lt"/>
-              </a:rPr>
-              <a:t>조건 </a:t>
-            </a:r>
-            <a:r>
-              <a:rPr lang="en-US" altLang="ko-KR" sz="1600" dirty="0">
-                <a:highlight>
-                  <a:srgbClr val="00FFFF"/>
-                </a:highlight>
-                <a:ea typeface="+mn-lt"/>
-                <a:cs typeface="+mn-lt"/>
-              </a:rPr>
-              <a:t>C2)</a:t>
-            </a:r>
-            <a:r>
-              <a:rPr lang="en-US" altLang="ko-KR" sz="1600" dirty="0">
-                <a:ea typeface="+mn-lt"/>
-                <a:cs typeface="+mn-lt"/>
-              </a:rPr>
-              <a:t>, Disappearing</a:t>
-            </a:r>
-            <a:r>
-              <a:rPr lang="ko-KR" altLang="en-US" sz="1600" dirty="0">
-                <a:ea typeface="+mn-lt"/>
-                <a:cs typeface="+mn-lt"/>
-              </a:rPr>
-              <a:t>이 된다</a:t>
-            </a:r>
-            <a:r>
-              <a:rPr lang="en-US" altLang="ko-KR" sz="1600" dirty="0">
-                <a:ea typeface="+mn-lt"/>
-                <a:cs typeface="+mn-lt"/>
-              </a:rPr>
-              <a:t>.</a:t>
-            </a:r>
-          </a:p>
-          <a:p>
-            <a:pPr latinLnBrk="0"/>
-            <a:r>
-              <a:rPr lang="en-US" altLang="ko-KR" sz="1600" dirty="0">
-                <a:ea typeface="+mn-lt"/>
-                <a:cs typeface="+mn-lt"/>
-              </a:rPr>
-              <a:t>Staring</a:t>
-            </a:r>
-            <a:r>
-              <a:rPr lang="ko-KR" altLang="en-US" sz="1600" dirty="0">
-                <a:ea typeface="+mn-lt"/>
-                <a:cs typeface="+mn-lt"/>
-              </a:rPr>
-              <a:t>일 때</a:t>
-            </a:r>
-            <a:r>
-              <a:rPr lang="en-US" altLang="ko-KR" sz="1600" dirty="0">
-                <a:ea typeface="+mn-lt"/>
-                <a:cs typeface="+mn-lt"/>
-              </a:rPr>
-              <a:t>, </a:t>
-            </a:r>
-            <a:r>
-              <a:rPr lang="ko-KR" altLang="en-US" sz="1600" dirty="0">
-                <a:highlight>
-                  <a:srgbClr val="FFFF00"/>
-                </a:highlight>
-                <a:ea typeface="+mn-lt"/>
-                <a:cs typeface="+mn-lt"/>
-              </a:rPr>
-              <a:t>타겟이 몬스터를 보고 있을 때 목격당한 횟수가 </a:t>
-            </a:r>
-            <a:r>
-              <a:rPr lang="en-US" altLang="ko-KR" sz="1600" dirty="0">
-                <a:highlight>
-                  <a:srgbClr val="FFFF00"/>
-                </a:highlight>
-                <a:ea typeface="+mn-lt"/>
-                <a:cs typeface="+mn-lt"/>
-              </a:rPr>
-              <a:t>4</a:t>
-            </a:r>
-            <a:r>
-              <a:rPr lang="ko-KR" altLang="en-US" sz="1600" dirty="0">
-                <a:highlight>
-                  <a:srgbClr val="FFFF00"/>
-                </a:highlight>
-                <a:ea typeface="+mn-lt"/>
-                <a:cs typeface="+mn-lt"/>
-              </a:rPr>
-              <a:t>회 이상 또는 목격당하지 않은 횟수가 </a:t>
-            </a:r>
-            <a:r>
-              <a:rPr lang="en-US" altLang="ko-KR" sz="1600" dirty="0">
-                <a:highlight>
-                  <a:srgbClr val="FFFF00"/>
-                </a:highlight>
-                <a:ea typeface="+mn-lt"/>
-                <a:cs typeface="+mn-lt"/>
-              </a:rPr>
-              <a:t>3</a:t>
-            </a:r>
-            <a:r>
-              <a:rPr lang="ko-KR" altLang="en-US" sz="1600" dirty="0">
-                <a:highlight>
-                  <a:srgbClr val="FFFF00"/>
-                </a:highlight>
-                <a:ea typeface="+mn-lt"/>
-                <a:cs typeface="+mn-lt"/>
-              </a:rPr>
-              <a:t>회 이상일 때</a:t>
-            </a:r>
-            <a:r>
-              <a:rPr lang="en-US" altLang="ko-KR" sz="1600" dirty="0">
-                <a:highlight>
-                  <a:srgbClr val="FFFF00"/>
-                </a:highlight>
-                <a:ea typeface="+mn-lt"/>
-                <a:cs typeface="+mn-lt"/>
-              </a:rPr>
-              <a:t>(</a:t>
-            </a:r>
-            <a:r>
-              <a:rPr lang="ko-KR" altLang="en-US" sz="1600" dirty="0">
-                <a:highlight>
-                  <a:srgbClr val="FFFF00"/>
-                </a:highlight>
-                <a:ea typeface="+mn-lt"/>
-                <a:cs typeface="+mn-lt"/>
-              </a:rPr>
-              <a:t>조건</a:t>
-            </a:r>
-            <a:r>
-              <a:rPr lang="en-US" altLang="ko-KR" sz="1600" dirty="0">
-                <a:highlight>
-                  <a:srgbClr val="FFFF00"/>
-                </a:highlight>
-                <a:ea typeface="+mn-lt"/>
-                <a:cs typeface="+mn-lt"/>
-              </a:rPr>
-              <a:t>A1) </a:t>
-            </a:r>
-            <a:r>
-              <a:rPr lang="en-US" altLang="ko-KR" sz="1600" b="1" dirty="0">
-                <a:ea typeface="+mn-lt"/>
-                <a:cs typeface="+mn-lt"/>
-              </a:rPr>
-              <a:t>85% </a:t>
-            </a:r>
-            <a:r>
-              <a:rPr lang="ko-KR" altLang="en-US" sz="1600" b="1" dirty="0">
-                <a:ea typeface="+mn-lt"/>
-                <a:cs typeface="+mn-lt"/>
-              </a:rPr>
-              <a:t>확률</a:t>
-            </a:r>
-            <a:r>
-              <a:rPr lang="ko-KR" altLang="en-US" sz="1600" dirty="0">
-                <a:ea typeface="+mn-lt"/>
-                <a:cs typeface="+mn-lt"/>
-              </a:rPr>
-              <a:t>로</a:t>
-            </a:r>
-            <a:r>
-              <a:rPr lang="en-US" altLang="ko-KR" sz="1600" dirty="0">
-                <a:ea typeface="+mn-lt"/>
-                <a:cs typeface="+mn-lt"/>
-              </a:rPr>
-              <a:t>, </a:t>
-            </a:r>
-            <a:r>
-              <a:rPr lang="ko-KR" altLang="en-US" sz="1600" dirty="0">
-                <a:highlight>
-                  <a:srgbClr val="00FFFF"/>
-                </a:highlight>
-                <a:ea typeface="+mn-lt"/>
-                <a:cs typeface="+mn-lt"/>
-              </a:rPr>
-              <a:t>목격당한 횟수가 </a:t>
-            </a:r>
-            <a:r>
-              <a:rPr lang="en-US" altLang="ko-KR" sz="1600" dirty="0">
-                <a:highlight>
-                  <a:srgbClr val="00FFFF"/>
-                </a:highlight>
-                <a:ea typeface="+mn-lt"/>
-                <a:cs typeface="+mn-lt"/>
-              </a:rPr>
-              <a:t>2</a:t>
-            </a:r>
-            <a:r>
-              <a:rPr lang="ko-KR" altLang="en-US" sz="1600" dirty="0">
-                <a:highlight>
-                  <a:srgbClr val="00FFFF"/>
-                </a:highlight>
-                <a:ea typeface="+mn-lt"/>
-                <a:cs typeface="+mn-lt"/>
-              </a:rPr>
-              <a:t>회 이상이고 타겟과의 거리가 </a:t>
-            </a:r>
-            <a:r>
-              <a:rPr lang="en-US" altLang="ko-KR" sz="1600" dirty="0">
-                <a:highlight>
-                  <a:srgbClr val="00FFFF"/>
-                </a:highlight>
-                <a:ea typeface="+mn-lt"/>
-                <a:cs typeface="+mn-lt"/>
-              </a:rPr>
-              <a:t>3m </a:t>
-            </a:r>
-            <a:r>
-              <a:rPr lang="ko-KR" altLang="en-US" sz="1600" dirty="0">
-                <a:highlight>
-                  <a:srgbClr val="00FFFF"/>
-                </a:highlight>
-                <a:ea typeface="+mn-lt"/>
-                <a:cs typeface="+mn-lt"/>
-              </a:rPr>
-              <a:t>이하일 때</a:t>
-            </a:r>
-            <a:r>
-              <a:rPr lang="en-US" altLang="ko-KR" sz="1600" dirty="0">
-                <a:highlight>
-                  <a:srgbClr val="00FFFF"/>
-                </a:highlight>
-                <a:ea typeface="+mn-lt"/>
-                <a:cs typeface="+mn-lt"/>
-              </a:rPr>
-              <a:t>(</a:t>
-            </a:r>
-            <a:r>
-              <a:rPr lang="ko-KR" altLang="en-US" sz="1600" dirty="0">
-                <a:highlight>
-                  <a:srgbClr val="00FFFF"/>
-                </a:highlight>
-                <a:ea typeface="+mn-lt"/>
-                <a:cs typeface="+mn-lt"/>
-              </a:rPr>
-              <a:t>조건 </a:t>
-            </a:r>
-            <a:r>
-              <a:rPr lang="en-US" altLang="ko-KR" sz="1600" dirty="0">
-                <a:highlight>
-                  <a:srgbClr val="00FFFF"/>
-                </a:highlight>
-                <a:ea typeface="+mn-lt"/>
-                <a:cs typeface="+mn-lt"/>
-              </a:rPr>
-              <a:t>A2) </a:t>
-            </a:r>
-            <a:r>
-              <a:rPr lang="en-US" altLang="ko-KR" sz="1600" b="1" dirty="0">
-                <a:ea typeface="+mn-lt"/>
-                <a:cs typeface="+mn-lt"/>
-              </a:rPr>
-              <a:t>60% </a:t>
-            </a:r>
-            <a:r>
-              <a:rPr lang="ko-KR" altLang="en-US" sz="1600" b="1" dirty="0">
-                <a:ea typeface="+mn-lt"/>
-                <a:cs typeface="+mn-lt"/>
-              </a:rPr>
-              <a:t>확률</a:t>
-            </a:r>
-            <a:r>
-              <a:rPr lang="ko-KR" altLang="en-US" sz="1600" dirty="0">
-                <a:ea typeface="+mn-lt"/>
-                <a:cs typeface="+mn-lt"/>
-              </a:rPr>
-              <a:t>로</a:t>
-            </a:r>
-            <a:r>
-              <a:rPr lang="en-US" altLang="ko-KR" sz="1600" dirty="0">
-                <a:ea typeface="+mn-lt"/>
-                <a:cs typeface="+mn-lt"/>
-              </a:rPr>
-              <a:t>, Chase</a:t>
-            </a:r>
-            <a:r>
-              <a:rPr lang="ko-KR" altLang="en-US" sz="1600" dirty="0">
-                <a:ea typeface="+mn-lt"/>
-                <a:cs typeface="+mn-lt"/>
-              </a:rPr>
-              <a:t>가 된다</a:t>
-            </a:r>
-            <a:r>
-              <a:rPr lang="en-US" altLang="ko-KR" sz="1600" dirty="0">
-                <a:ea typeface="+mn-lt"/>
-                <a:cs typeface="+mn-lt"/>
-              </a:rPr>
-              <a:t>.</a:t>
-            </a:r>
-          </a:p>
-          <a:p>
-            <a:pPr latinLnBrk="0"/>
-            <a:r>
-              <a:rPr lang="en-US" altLang="ko-KR" sz="1600" dirty="0">
-                <a:ea typeface="+mn-lt"/>
-                <a:cs typeface="+mn-lt"/>
-              </a:rPr>
-              <a:t>Staring</a:t>
-            </a:r>
-            <a:r>
-              <a:rPr lang="ko-KR" altLang="en-US" sz="1600" dirty="0">
-                <a:ea typeface="+mn-lt"/>
-                <a:cs typeface="+mn-lt"/>
-              </a:rPr>
-              <a:t>일 때</a:t>
-            </a:r>
-            <a:r>
-              <a:rPr lang="en-US" altLang="ko-KR" sz="1600" dirty="0">
-                <a:ea typeface="+mn-lt"/>
-                <a:cs typeface="+mn-lt"/>
-              </a:rPr>
-              <a:t>, </a:t>
-            </a:r>
-            <a:r>
-              <a:rPr lang="ko-KR" altLang="en-US" sz="1600" dirty="0">
-                <a:highlight>
-                  <a:srgbClr val="FFFF00"/>
-                </a:highlight>
-                <a:ea typeface="+mn-lt"/>
-                <a:cs typeface="+mn-lt"/>
-              </a:rPr>
-              <a:t>타겟과의 거리가 </a:t>
-            </a:r>
-            <a:r>
-              <a:rPr lang="en-US" altLang="ko-KR" sz="1600" dirty="0">
-                <a:highlight>
-                  <a:srgbClr val="FFFF00"/>
-                </a:highlight>
-                <a:ea typeface="+mn-lt"/>
-                <a:cs typeface="+mn-lt"/>
-              </a:rPr>
-              <a:t>3m </a:t>
-            </a:r>
-            <a:r>
-              <a:rPr lang="ko-KR" altLang="en-US" sz="1600" dirty="0">
-                <a:highlight>
-                  <a:srgbClr val="FFFF00"/>
-                </a:highlight>
-                <a:ea typeface="+mn-lt"/>
-                <a:cs typeface="+mn-lt"/>
-              </a:rPr>
-              <a:t>이하이고 조건 </a:t>
-            </a:r>
-            <a:r>
-              <a:rPr lang="en-US" altLang="ko-KR" sz="1600" dirty="0">
-                <a:highlight>
-                  <a:srgbClr val="FFFF00"/>
-                </a:highlight>
-                <a:ea typeface="+mn-lt"/>
-                <a:cs typeface="+mn-lt"/>
-              </a:rPr>
-              <a:t>A1</a:t>
-            </a:r>
-            <a:r>
-              <a:rPr lang="ko-KR" altLang="en-US" sz="1600" dirty="0">
-                <a:highlight>
-                  <a:srgbClr val="FFFF00"/>
-                </a:highlight>
-                <a:ea typeface="+mn-lt"/>
-                <a:cs typeface="+mn-lt"/>
-              </a:rPr>
-              <a:t>과 </a:t>
-            </a:r>
-            <a:r>
-              <a:rPr lang="en-US" altLang="ko-KR" sz="1600" dirty="0">
-                <a:highlight>
-                  <a:srgbClr val="FFFF00"/>
-                </a:highlight>
-                <a:ea typeface="+mn-lt"/>
-                <a:cs typeface="+mn-lt"/>
-              </a:rPr>
-              <a:t>A2</a:t>
-            </a:r>
-            <a:r>
-              <a:rPr lang="ko-KR" altLang="en-US" sz="1600" dirty="0">
-                <a:highlight>
-                  <a:srgbClr val="FFFF00"/>
-                </a:highlight>
-                <a:ea typeface="+mn-lt"/>
-                <a:cs typeface="+mn-lt"/>
-              </a:rPr>
-              <a:t>의 확률이 실패하거나</a:t>
-            </a:r>
-            <a:r>
-              <a:rPr lang="en-US" altLang="ko-KR" sz="1600" dirty="0">
-                <a:highlight>
-                  <a:srgbClr val="FFFF00"/>
-                </a:highlight>
-                <a:ea typeface="+mn-lt"/>
-                <a:cs typeface="+mn-lt"/>
-              </a:rPr>
-              <a:t>(</a:t>
-            </a:r>
-            <a:r>
-              <a:rPr lang="ko-KR" altLang="en-US" sz="1600" dirty="0">
-                <a:highlight>
-                  <a:srgbClr val="FFFF00"/>
-                </a:highlight>
-                <a:ea typeface="+mn-lt"/>
-                <a:cs typeface="+mn-lt"/>
-              </a:rPr>
-              <a:t>조건 </a:t>
-            </a:r>
-            <a:r>
-              <a:rPr lang="en-US" altLang="ko-KR" sz="1600" dirty="0">
-                <a:highlight>
-                  <a:srgbClr val="FFFF00"/>
-                </a:highlight>
-                <a:ea typeface="+mn-lt"/>
-                <a:cs typeface="+mn-lt"/>
-              </a:rPr>
-              <a:t>B1)</a:t>
-            </a:r>
-            <a:r>
-              <a:rPr lang="en-US" altLang="ko-KR" sz="1600" dirty="0">
-                <a:ea typeface="+mn-lt"/>
-                <a:cs typeface="+mn-lt"/>
-              </a:rPr>
-              <a:t>, </a:t>
-            </a:r>
-            <a:r>
-              <a:rPr lang="ko-KR" altLang="en-US" sz="1600" dirty="0">
-                <a:highlight>
-                  <a:srgbClr val="00FFFF"/>
-                </a:highlight>
-                <a:ea typeface="+mn-lt"/>
-                <a:cs typeface="+mn-lt"/>
-              </a:rPr>
-              <a:t>다른 플레이어와 충돌하면</a:t>
-            </a:r>
-            <a:r>
-              <a:rPr lang="en-US" altLang="ko-KR" sz="1600" dirty="0">
-                <a:highlight>
-                  <a:srgbClr val="00FFFF"/>
-                </a:highlight>
-                <a:ea typeface="+mn-lt"/>
-                <a:cs typeface="+mn-lt"/>
-              </a:rPr>
-              <a:t>(</a:t>
-            </a:r>
-            <a:r>
-              <a:rPr lang="ko-KR" altLang="en-US" sz="1600" dirty="0">
-                <a:highlight>
-                  <a:srgbClr val="00FFFF"/>
-                </a:highlight>
-                <a:ea typeface="+mn-lt"/>
-                <a:cs typeface="+mn-lt"/>
-              </a:rPr>
-              <a:t>조건 </a:t>
-            </a:r>
-            <a:r>
-              <a:rPr lang="en-US" altLang="ko-KR" sz="1600" dirty="0">
-                <a:highlight>
-                  <a:srgbClr val="00FFFF"/>
-                </a:highlight>
-                <a:ea typeface="+mn-lt"/>
-                <a:cs typeface="+mn-lt"/>
-              </a:rPr>
-              <a:t>B2), </a:t>
-            </a:r>
-            <a:r>
-              <a:rPr lang="en-US" altLang="ko-KR" sz="1600" dirty="0">
-                <a:ea typeface="+mn-lt"/>
-                <a:cs typeface="+mn-lt"/>
-              </a:rPr>
-              <a:t>Vanishing</a:t>
-            </a:r>
-            <a:r>
-              <a:rPr lang="ko-KR" altLang="en-US" sz="1600" dirty="0">
-                <a:ea typeface="+mn-lt"/>
-                <a:cs typeface="+mn-lt"/>
-              </a:rPr>
-              <a:t>이 된다</a:t>
-            </a:r>
-            <a:r>
-              <a:rPr lang="en-US" altLang="ko-KR" sz="1600" dirty="0">
-                <a:ea typeface="+mn-lt"/>
-                <a:cs typeface="+mn-lt"/>
-              </a:rPr>
-              <a:t>.</a:t>
-            </a:r>
-          </a:p>
-          <a:p>
-            <a:pPr latinLnBrk="0"/>
-            <a:endParaRPr lang="en-US" altLang="ko-KR" sz="1600" dirty="0">
-              <a:ea typeface="+mn-lt"/>
-              <a:cs typeface="+mn-lt"/>
-            </a:endParaRPr>
-          </a:p>
-          <a:p>
-            <a:pPr latinLnBrk="0"/>
-            <a:r>
-              <a:rPr lang="en-US" altLang="ko-KR" sz="1600" dirty="0">
-                <a:ea typeface="+mn-lt"/>
-                <a:cs typeface="+mn-lt"/>
-              </a:rPr>
-              <a:t>Disappearing</a:t>
-            </a:r>
-            <a:r>
-              <a:rPr lang="ko-KR" altLang="en-US" sz="1600" dirty="0">
-                <a:ea typeface="+mn-lt"/>
-                <a:cs typeface="+mn-lt"/>
-              </a:rPr>
-              <a:t>일 때</a:t>
-            </a:r>
-            <a:r>
-              <a:rPr lang="en-US" altLang="ko-KR" sz="1600" dirty="0">
-                <a:ea typeface="+mn-lt"/>
-                <a:cs typeface="+mn-lt"/>
-              </a:rPr>
-              <a:t>, </a:t>
-            </a:r>
-            <a:r>
-              <a:rPr lang="ko-KR" altLang="en-US" sz="1600" dirty="0">
-                <a:ea typeface="+mn-lt"/>
-                <a:cs typeface="+mn-lt"/>
-              </a:rPr>
-              <a:t>타겟의 카메라에서 벗어나거나</a:t>
-            </a:r>
-            <a:r>
-              <a:rPr lang="en-US" altLang="ko-KR" sz="1600" dirty="0">
-                <a:ea typeface="+mn-lt"/>
-                <a:cs typeface="+mn-lt"/>
-              </a:rPr>
-              <a:t>, </a:t>
-            </a:r>
-            <a:r>
-              <a:rPr lang="ko-KR" altLang="en-US" sz="1600" dirty="0">
-                <a:ea typeface="+mn-lt"/>
-                <a:cs typeface="+mn-lt"/>
-              </a:rPr>
-              <a:t>목적지와의 거리가 </a:t>
-            </a:r>
-            <a:r>
-              <a:rPr lang="en-US" altLang="ko-KR" sz="1600" dirty="0">
-                <a:ea typeface="+mn-lt"/>
-                <a:cs typeface="+mn-lt"/>
-              </a:rPr>
-              <a:t>0.2m </a:t>
-            </a:r>
-            <a:r>
-              <a:rPr lang="ko-KR" altLang="en-US" sz="1600" dirty="0">
-                <a:ea typeface="+mn-lt"/>
-                <a:cs typeface="+mn-lt"/>
-              </a:rPr>
-              <a:t>이하가 되거나</a:t>
-            </a:r>
-            <a:r>
-              <a:rPr lang="en-US" altLang="ko-KR" sz="1600" dirty="0">
-                <a:ea typeface="+mn-lt"/>
-                <a:cs typeface="+mn-lt"/>
-              </a:rPr>
-              <a:t>, </a:t>
-            </a:r>
-            <a:r>
-              <a:rPr lang="ko-KR" altLang="en-US" sz="1600" dirty="0">
-                <a:ea typeface="+mn-lt"/>
-                <a:cs typeface="+mn-lt"/>
-              </a:rPr>
-              <a:t>타겟과의 거리가 </a:t>
-            </a:r>
-            <a:r>
-              <a:rPr lang="en-US" altLang="ko-KR" sz="1600" dirty="0">
-                <a:ea typeface="+mn-lt"/>
-                <a:cs typeface="+mn-lt"/>
-              </a:rPr>
-              <a:t>2.5m</a:t>
-            </a:r>
-            <a:r>
-              <a:rPr lang="ko-KR" altLang="en-US" sz="1600" dirty="0">
-                <a:ea typeface="+mn-lt"/>
-                <a:cs typeface="+mn-lt"/>
-              </a:rPr>
-              <a:t> 이하가 되면</a:t>
-            </a:r>
-            <a:r>
-              <a:rPr lang="en-US" altLang="ko-KR" sz="1600" dirty="0">
-                <a:ea typeface="+mn-lt"/>
-                <a:cs typeface="+mn-lt"/>
-              </a:rPr>
-              <a:t>, Absent </a:t>
-            </a:r>
-            <a:r>
-              <a:rPr lang="ko-KR" altLang="en-US" sz="1600" dirty="0">
-                <a:ea typeface="+mn-lt"/>
-                <a:cs typeface="+mn-lt"/>
-              </a:rPr>
-              <a:t>상태가 된다</a:t>
-            </a:r>
-            <a:r>
-              <a:rPr lang="en-US" altLang="ko-KR" sz="1600" dirty="0">
-                <a:ea typeface="+mn-lt"/>
-                <a:cs typeface="+mn-lt"/>
-              </a:rPr>
-              <a:t>.</a:t>
-            </a:r>
-          </a:p>
-          <a:p>
-            <a:pPr latinLnBrk="0"/>
-            <a:r>
-              <a:rPr lang="en-US" altLang="ko-KR" sz="1600" dirty="0">
-                <a:ea typeface="+mn-lt"/>
-                <a:cs typeface="+mn-lt"/>
-              </a:rPr>
-              <a:t>Disappearing</a:t>
-            </a:r>
-            <a:r>
-              <a:rPr lang="ko-KR" altLang="en-US" sz="1600" dirty="0">
-                <a:ea typeface="+mn-lt"/>
-                <a:cs typeface="+mn-lt"/>
-              </a:rPr>
-              <a:t>일 때</a:t>
-            </a:r>
-            <a:r>
-              <a:rPr lang="en-US" altLang="ko-KR" sz="1600" dirty="0">
-                <a:ea typeface="+mn-lt"/>
-                <a:cs typeface="+mn-lt"/>
-              </a:rPr>
-              <a:t>, </a:t>
-            </a:r>
-            <a:r>
-              <a:rPr lang="ko-KR" altLang="en-US" sz="1600" dirty="0">
-                <a:ea typeface="+mn-lt"/>
-                <a:cs typeface="+mn-lt"/>
-              </a:rPr>
-              <a:t>목적지를 탐색하는데 실패하거나</a:t>
-            </a:r>
-            <a:r>
-              <a:rPr lang="en-US" altLang="ko-KR" sz="1600" dirty="0">
-                <a:ea typeface="+mn-lt"/>
-                <a:cs typeface="+mn-lt"/>
-              </a:rPr>
-              <a:t>, </a:t>
-            </a:r>
-            <a:r>
-              <a:rPr lang="ko-KR" altLang="en-US" sz="1600" dirty="0">
-                <a:ea typeface="+mn-lt"/>
-                <a:cs typeface="+mn-lt"/>
-              </a:rPr>
-              <a:t>다른 플레이어와 충돌하면</a:t>
-            </a:r>
-            <a:r>
-              <a:rPr lang="en-US" altLang="ko-KR" sz="1600" dirty="0">
-                <a:ea typeface="+mn-lt"/>
-                <a:cs typeface="+mn-lt"/>
-              </a:rPr>
-              <a:t>, Vanishing</a:t>
-            </a:r>
-            <a:r>
-              <a:rPr lang="ko-KR" altLang="en-US" sz="1600" dirty="0">
-                <a:ea typeface="+mn-lt"/>
-                <a:cs typeface="+mn-lt"/>
-              </a:rPr>
-              <a:t>이 된다</a:t>
-            </a:r>
-            <a:r>
-              <a:rPr lang="en-US" altLang="ko-KR" sz="1600" dirty="0">
-                <a:ea typeface="+mn-lt"/>
-                <a:cs typeface="+mn-lt"/>
-              </a:rPr>
-              <a:t>.</a:t>
-            </a:r>
-          </a:p>
-        </p:txBody>
-      </p:sp>
-      <p:sp>
-        <p:nvSpPr>
-          <p:cNvPr id="5" name="슬라이드 번호 개체 틀 4">
-            <a:extLst>
-              <a:ext uri="{FF2B5EF4-FFF2-40B4-BE49-F238E27FC236}">
-                <a16:creationId xmlns:a16="http://schemas.microsoft.com/office/drawing/2014/main" id="{8A411847-C7BA-2B55-649C-968000B70E0D}"/>
-              </a:ext>
-            </a:extLst>
-          </p:cNvPr>
-          <p:cNvSpPr>
-            <a:spLocks noGrp="1"/>
-          </p:cNvSpPr>
-          <p:nvPr>
-            <p:ph type="sldNum" sz="quarter" idx="12"/>
-          </p:nvPr>
-        </p:nvSpPr>
-        <p:spPr/>
-        <p:txBody>
-          <a:bodyPr/>
-          <a:lstStyle/>
-          <a:p>
-            <a:fld id="{2A226FEB-661D-4181-84CB-C53DCFE1931A}" type="slidenum">
-              <a:rPr lang="ko-KR" altLang="en-US" smtClean="0"/>
-              <a:t>5</a:t>
-            </a:fld>
-            <a:endParaRPr lang="ko-KR" altLang="en-US"/>
-          </a:p>
-        </p:txBody>
-      </p:sp>
+          <p:cNvPicPr>
+            <a:picLocks noChangeAspect="1"/>
+          </p:cNvPicPr>
+          <p:nvPr/>
+        </p:nvPicPr>
+        <p:blipFill>
+          <a:blip r:embed="rId2"/>
+          <a:stretch>
+            <a:fillRect/>
+          </a:stretch>
+        </p:blipFill>
+        <p:spPr>
+          <a:xfrm>
+            <a:off x="1892300" y="3890910"/>
+            <a:ext cx="8740513" cy="1271640"/>
+          </a:xfrm>
+          <a:prstGeom prst="rect">
+            <a:avLst/>
+          </a:prstGeom>
+        </p:spPr>
+      </p:pic>
     </p:spTree>
     <p:extLst>
       <p:ext uri="{BB962C8B-B14F-4D97-AF65-F5344CB8AC3E}">
-        <p14:creationId xmlns:p14="http://schemas.microsoft.com/office/powerpoint/2010/main" val="3157473569"/>
+        <p14:creationId xmlns:p14="http://schemas.microsoft.com/office/powerpoint/2010/main" val="4181976712"/>
       </p:ext>
     </p:extLst>
   </p:cSld>
@@ -10179,347 +10482,6 @@
 </file>
 
 <file path=ppt/slides/slide6.xml><?xml version="1.0" encoding="utf-8"?>
-<p:sld xmlns:a="http://schemas.openxmlformats.org/drawingml/2006/main" xmlns:r="http://schemas.openxmlformats.org/officeDocument/2006/relationships" xmlns:p="http://schemas.openxmlformats.org/presentationml/2006/main">
-  <p:cSld>
-    <p:spTree>
-      <p:nvGrpSpPr>
-        <p:cNvPr id="1" name="">
-          <a:extLst>
-            <a:ext uri="{FF2B5EF4-FFF2-40B4-BE49-F238E27FC236}">
-              <a16:creationId xmlns:a16="http://schemas.microsoft.com/office/drawing/2014/main" id="{20119EB2-5BFC-2D75-3766-5298F755FB6C}"/>
-            </a:ext>
-          </a:extLst>
-        </p:cNvPr>
-        <p:cNvGrpSpPr/>
-        <p:nvPr/>
-      </p:nvGrpSpPr>
-      <p:grpSpPr>
-        <a:xfrm>
-          <a:off x="0" y="0"/>
-          <a:ext cx="0" cy="0"/>
-          <a:chOff x="0" y="0"/>
-          <a:chExt cx="0" cy="0"/>
-        </a:xfrm>
-      </p:grpSpPr>
-      <p:sp>
-        <p:nvSpPr>
-          <p:cNvPr id="3" name="제목 2">
-            <a:extLst>
-              <a:ext uri="{FF2B5EF4-FFF2-40B4-BE49-F238E27FC236}">
-                <a16:creationId xmlns:a16="http://schemas.microsoft.com/office/drawing/2014/main" id="{598BCDFC-0C57-78C5-DB86-AAC81EE3906A}"/>
-              </a:ext>
-            </a:extLst>
-          </p:cNvPr>
-          <p:cNvSpPr>
-            <a:spLocks noGrp="1"/>
-          </p:cNvSpPr>
-          <p:nvPr>
-            <p:ph type="title"/>
-          </p:nvPr>
-        </p:nvSpPr>
-        <p:spPr>
-          <a:xfrm>
-            <a:off x="0" y="119158"/>
-            <a:ext cx="1600200" cy="535531"/>
-          </a:xfrm>
-        </p:spPr>
-        <p:txBody>
-          <a:bodyPr/>
-          <a:lstStyle/>
-          <a:p>
-            <a:r>
-              <a:rPr lang="ko-KR" altLang="en-US" dirty="0"/>
-              <a:t>설명</a:t>
-            </a:r>
-          </a:p>
-        </p:txBody>
-      </p:sp>
-      <p:sp>
-        <p:nvSpPr>
-          <p:cNvPr id="4" name="내용 개체 틀 3">
-            <a:extLst>
-              <a:ext uri="{FF2B5EF4-FFF2-40B4-BE49-F238E27FC236}">
-                <a16:creationId xmlns:a16="http://schemas.microsoft.com/office/drawing/2014/main" id="{D1E33300-808A-0B23-E09C-6FD790EB59C2}"/>
-              </a:ext>
-            </a:extLst>
-          </p:cNvPr>
-          <p:cNvSpPr>
-            <a:spLocks noGrp="1"/>
-          </p:cNvSpPr>
-          <p:nvPr>
-            <p:ph idx="1"/>
-          </p:nvPr>
-        </p:nvSpPr>
-        <p:spPr/>
-        <p:txBody>
-          <a:bodyPr>
-            <a:normAutofit/>
-          </a:bodyPr>
-          <a:lstStyle/>
-          <a:p>
-            <a:pPr latinLnBrk="0"/>
-            <a:r>
-              <a:rPr lang="en-US" altLang="ko-KR" sz="1600" dirty="0">
-                <a:ea typeface="+mn-lt"/>
-                <a:cs typeface="+mn-lt"/>
-              </a:rPr>
-              <a:t>Vanishing</a:t>
-            </a:r>
-            <a:r>
-              <a:rPr lang="ko-KR" altLang="en-US" sz="1600" dirty="0">
-                <a:ea typeface="+mn-lt"/>
-                <a:cs typeface="+mn-lt"/>
-              </a:rPr>
-              <a:t>이 되면 몬스터는 즉시 해당 위치에서 사라진다</a:t>
-            </a:r>
-            <a:r>
-              <a:rPr lang="en-US" altLang="ko-KR" sz="1600" dirty="0">
-                <a:ea typeface="+mn-lt"/>
-                <a:cs typeface="+mn-lt"/>
-              </a:rPr>
-              <a:t>. </a:t>
-            </a:r>
-            <a:r>
-              <a:rPr lang="en-US" altLang="ko-KR" sz="1600" dirty="0"/>
-              <a:t>Vanishing </a:t>
-            </a:r>
-            <a:r>
-              <a:rPr lang="ko-KR" altLang="en-US" sz="1600" dirty="0"/>
-              <a:t>상태가 된 방의 조명이 </a:t>
-            </a:r>
-            <a:r>
-              <a:rPr lang="ko-KR" altLang="en-US" sz="1600" dirty="0" err="1"/>
-              <a:t>깜빡거린다</a:t>
-            </a:r>
-            <a:r>
-              <a:rPr lang="en-US" altLang="ko-KR" sz="1600" dirty="0"/>
-              <a:t>.</a:t>
-            </a:r>
-          </a:p>
-          <a:p>
-            <a:pPr latinLnBrk="0"/>
-            <a:r>
-              <a:rPr lang="ko-KR" altLang="en-US" sz="1600" dirty="0"/>
-              <a:t>이후 아무 조건 없이 </a:t>
-            </a:r>
-            <a:r>
-              <a:rPr lang="en-US" altLang="ko-KR" sz="1600" dirty="0"/>
-              <a:t>Absent</a:t>
-            </a:r>
-            <a:r>
-              <a:rPr lang="ko-KR" altLang="en-US" sz="1600" dirty="0"/>
-              <a:t>가 된다</a:t>
-            </a:r>
-            <a:r>
-              <a:rPr lang="en-US" altLang="ko-KR" sz="1600" dirty="0"/>
-              <a:t>.</a:t>
-            </a:r>
-          </a:p>
-          <a:p>
-            <a:pPr latinLnBrk="0"/>
-            <a:endParaRPr lang="en-US" altLang="ko-KR" sz="1600" dirty="0">
-              <a:ea typeface="+mn-lt"/>
-              <a:cs typeface="+mn-lt"/>
-            </a:endParaRPr>
-          </a:p>
-          <a:p>
-            <a:pPr latinLnBrk="0"/>
-            <a:r>
-              <a:rPr lang="en-US" altLang="ko-KR" sz="1600" dirty="0">
-                <a:ea typeface="+mn-lt"/>
-                <a:cs typeface="+mn-lt"/>
-              </a:rPr>
-              <a:t>Chase</a:t>
-            </a:r>
-            <a:r>
-              <a:rPr lang="ko-KR" altLang="en-US" sz="1600" dirty="0">
-                <a:ea typeface="+mn-lt"/>
-                <a:cs typeface="+mn-lt"/>
-              </a:rPr>
-              <a:t>일 때</a:t>
-            </a:r>
-            <a:r>
-              <a:rPr lang="en-US" altLang="ko-KR" sz="1600" dirty="0">
-                <a:ea typeface="+mn-lt"/>
-                <a:cs typeface="+mn-lt"/>
-              </a:rPr>
-              <a:t>, </a:t>
-            </a:r>
-            <a:r>
-              <a:rPr lang="ko-KR" altLang="en-US" sz="1600" dirty="0">
-                <a:ea typeface="+mn-lt"/>
-                <a:cs typeface="+mn-lt"/>
-              </a:rPr>
-              <a:t>추적 종료 시간이 경과하거나</a:t>
-            </a:r>
-            <a:r>
-              <a:rPr lang="en-US" altLang="ko-KR" sz="1600" dirty="0">
-                <a:ea typeface="+mn-lt"/>
-                <a:cs typeface="+mn-lt"/>
-              </a:rPr>
-              <a:t>, </a:t>
-            </a:r>
-            <a:r>
-              <a:rPr lang="ko-KR" altLang="en-US" sz="1600" dirty="0">
-                <a:ea typeface="+mn-lt"/>
-                <a:cs typeface="+mn-lt"/>
-              </a:rPr>
-              <a:t>타겟과의 거리가 </a:t>
-            </a:r>
-            <a:r>
-              <a:rPr lang="en-US" altLang="ko-KR" sz="1600" dirty="0">
-                <a:ea typeface="+mn-lt"/>
-                <a:cs typeface="+mn-lt"/>
-              </a:rPr>
-              <a:t>30m</a:t>
-            </a:r>
-            <a:r>
-              <a:rPr lang="ko-KR" altLang="en-US" sz="1600" dirty="0">
-                <a:ea typeface="+mn-lt"/>
-                <a:cs typeface="+mn-lt"/>
-              </a:rPr>
-              <a:t> 이상이 되거나</a:t>
-            </a:r>
-            <a:r>
-              <a:rPr lang="en-US" altLang="ko-KR" sz="1600" dirty="0">
-                <a:ea typeface="+mn-lt"/>
-                <a:cs typeface="+mn-lt"/>
-              </a:rPr>
-              <a:t>, </a:t>
-            </a:r>
-            <a:r>
-              <a:rPr lang="ko-KR" altLang="en-US" sz="1600" dirty="0">
-                <a:ea typeface="+mn-lt"/>
-                <a:cs typeface="+mn-lt"/>
-              </a:rPr>
-              <a:t>타겟이 사망하면</a:t>
-            </a:r>
-            <a:r>
-              <a:rPr lang="en-US" altLang="ko-KR" sz="1600" dirty="0">
-                <a:ea typeface="+mn-lt"/>
-                <a:cs typeface="+mn-lt"/>
-              </a:rPr>
-              <a:t>, Absent</a:t>
-            </a:r>
-            <a:r>
-              <a:rPr lang="ko-KR" altLang="en-US" sz="1600" dirty="0">
-                <a:ea typeface="+mn-lt"/>
-                <a:cs typeface="+mn-lt"/>
-              </a:rPr>
-              <a:t>가 된다</a:t>
-            </a:r>
-            <a:r>
-              <a:rPr lang="en-US" altLang="ko-KR" sz="1600" dirty="0">
-                <a:ea typeface="+mn-lt"/>
-                <a:cs typeface="+mn-lt"/>
-              </a:rPr>
-              <a:t>.</a:t>
-            </a:r>
-          </a:p>
-        </p:txBody>
-      </p:sp>
-      <p:sp>
-        <p:nvSpPr>
-          <p:cNvPr id="5" name="슬라이드 번호 개체 틀 4">
-            <a:extLst>
-              <a:ext uri="{FF2B5EF4-FFF2-40B4-BE49-F238E27FC236}">
-                <a16:creationId xmlns:a16="http://schemas.microsoft.com/office/drawing/2014/main" id="{EE1A9EFB-A750-608E-DA2C-C80C05ADAF7B}"/>
-              </a:ext>
-            </a:extLst>
-          </p:cNvPr>
-          <p:cNvSpPr>
-            <a:spLocks noGrp="1"/>
-          </p:cNvSpPr>
-          <p:nvPr>
-            <p:ph type="sldNum" sz="quarter" idx="12"/>
-          </p:nvPr>
-        </p:nvSpPr>
-        <p:spPr/>
-        <p:txBody>
-          <a:bodyPr/>
-          <a:lstStyle/>
-          <a:p>
-            <a:fld id="{2A226FEB-661D-4181-84CB-C53DCFE1931A}" type="slidenum">
-              <a:rPr lang="ko-KR" altLang="en-US" smtClean="0"/>
-              <a:t>6</a:t>
-            </a:fld>
-            <a:endParaRPr lang="ko-KR" altLang="en-US"/>
-          </a:p>
-        </p:txBody>
-      </p:sp>
-      <p:sp>
-        <p:nvSpPr>
-          <p:cNvPr id="6" name="텍스트 개체 틀 1">
-            <a:extLst>
-              <a:ext uri="{FF2B5EF4-FFF2-40B4-BE49-F238E27FC236}">
-                <a16:creationId xmlns:a16="http://schemas.microsoft.com/office/drawing/2014/main" id="{28C0FBDF-D6BB-A9E0-A9F9-39E9D98BDB7C}"/>
-              </a:ext>
-            </a:extLst>
-          </p:cNvPr>
-          <p:cNvSpPr>
-            <a:spLocks noGrp="1"/>
-          </p:cNvSpPr>
-          <p:nvPr>
-            <p:ph type="body" sz="quarter" idx="13"/>
-          </p:nvPr>
-        </p:nvSpPr>
-        <p:spPr>
-          <a:xfrm>
-            <a:off x="0" y="853328"/>
-            <a:ext cx="1600200" cy="2349500"/>
-          </a:xfrm>
-        </p:spPr>
-        <p:txBody>
-          <a:bodyPr/>
-          <a:lstStyle/>
-          <a:p>
-            <a:r>
-              <a:rPr lang="en-US" altLang="ko-KR" b="1" dirty="0"/>
-              <a:t>FSM </a:t>
-            </a:r>
-            <a:r>
-              <a:rPr lang="ko-KR" altLang="en-US" b="1" dirty="0"/>
-              <a:t>설명</a:t>
-            </a:r>
-            <a:endParaRPr lang="en-US" altLang="ko-KR" b="1" dirty="0"/>
-          </a:p>
-          <a:p>
-            <a:pPr latinLnBrk="0"/>
-            <a:r>
-              <a:rPr lang="ko-KR" altLang="en-US" dirty="0"/>
-              <a:t>타겟 지정</a:t>
-            </a:r>
-            <a:endParaRPr lang="en-US" altLang="ko-KR" dirty="0"/>
-          </a:p>
-          <a:p>
-            <a:pPr latinLnBrk="0"/>
-            <a:r>
-              <a:rPr lang="ko-KR" altLang="en-US" dirty="0"/>
-              <a:t>목적지 탐색 방식</a:t>
-            </a:r>
-          </a:p>
-          <a:p>
-            <a:endParaRPr lang="en-US" altLang="ko-KR" b="1" dirty="0"/>
-          </a:p>
-          <a:p>
-            <a:endParaRPr lang="ko-KR" altLang="en-US" dirty="0"/>
-          </a:p>
-        </p:txBody>
-      </p:sp>
-    </p:spTree>
-    <p:extLst>
-      <p:ext uri="{BB962C8B-B14F-4D97-AF65-F5344CB8AC3E}">
-        <p14:creationId xmlns:p14="http://schemas.microsoft.com/office/powerpoint/2010/main" val="1868735270"/>
-      </p:ext>
-    </p:extLst>
-  </p:cSld>
-  <p:clrMapOvr>
-    <a:masterClrMapping/>
-  </p:clrMapOvr>
-</p:sld>
-</file>
-
-<file path=ppt/slides/slide7.xml><?xml version="1.0" encoding="utf-8"?>
 <p:sld xmlns:a="http://schemas.openxmlformats.org/drawingml/2006/main" xmlns:r="http://schemas.openxmlformats.org/officeDocument/2006/relationships" xmlns:p="http://schemas.openxmlformats.org/presentationml/2006/main">
   <p:cSld>
     <p:spTree>
@@ -10583,7 +10545,7 @@
             <a:pPr latinLnBrk="0"/>
             <a:r>
               <a:rPr lang="ko-KR" altLang="en-US" b="1" dirty="0"/>
-              <a:t>타겟 지정</a:t>
+              <a:t>타겟 지정 조건과 방식</a:t>
             </a:r>
             <a:endParaRPr lang="en-US" altLang="ko-KR" b="1" dirty="0"/>
           </a:p>
@@ -10656,131 +10618,494 @@
           </a:bodyPr>
           <a:lstStyle/>
           <a:p>
-            <a:pPr latinLnBrk="0"/>
-            <a:r>
-              <a:rPr lang="ko-KR" altLang="en-US" sz="1600" dirty="0">
+            <a:pPr marL="342900" indent="-342900" latinLnBrk="0">
+              <a:buAutoNum type="arabicPeriod"/>
+            </a:pPr>
+            <a:r>
+              <a:rPr lang="ko-KR" altLang="en-US" sz="1400" dirty="0">
                 <a:ea typeface="+mn-lt"/>
                 <a:cs typeface="+mn-lt"/>
               </a:rPr>
-              <a:t>게임을 시작하고 </a:t>
-            </a:r>
-            <a:r>
-              <a:rPr lang="en-US" altLang="ko-KR" sz="1600" dirty="0">
+              <a:t>타겟이 지정되지 않았을 때</a:t>
+            </a:r>
+            <a:r>
+              <a:rPr lang="en-US" altLang="ko-KR" sz="1400" dirty="0">
                 <a:ea typeface="+mn-lt"/>
                 <a:cs typeface="+mn-lt"/>
               </a:rPr>
-              <a:t>3</a:t>
-            </a:r>
-            <a:r>
-              <a:rPr lang="ko-KR" altLang="en-US" sz="1600" dirty="0">
+              <a:t>, Absent </a:t>
+            </a:r>
+            <a:r>
+              <a:rPr lang="ko-KR" altLang="en-US" sz="1400" dirty="0">
                 <a:ea typeface="+mn-lt"/>
                 <a:cs typeface="+mn-lt"/>
               </a:rPr>
-              <a:t>분이 지난 후에 활동이 시작된다</a:t>
-            </a:r>
-            <a:r>
-              <a:rPr lang="en-US" altLang="ko-KR" sz="1600" dirty="0">
-                <a:ea typeface="+mn-lt"/>
-                <a:cs typeface="+mn-lt"/>
-              </a:rPr>
-              <a:t>. 3</a:t>
-            </a:r>
-            <a:r>
-              <a:rPr lang="ko-KR" altLang="en-US" sz="1600" dirty="0">
-                <a:ea typeface="+mn-lt"/>
-                <a:cs typeface="+mn-lt"/>
-              </a:rPr>
-              <a:t>분이 지난 후 가장 </a:t>
-            </a:r>
-            <a:r>
-              <a:rPr lang="en-US" altLang="ko-KR" sz="1600" dirty="0">
-                <a:ea typeface="+mn-lt"/>
-                <a:cs typeface="+mn-lt"/>
-              </a:rPr>
-              <a:t>Fear</a:t>
-            </a:r>
-            <a:r>
-              <a:rPr lang="ko-KR" altLang="en-US" sz="1600" dirty="0">
-                <a:ea typeface="+mn-lt"/>
-                <a:cs typeface="+mn-lt"/>
-              </a:rPr>
-              <a:t>이 높았던 유저와 가장 </a:t>
-            </a:r>
-            <a:r>
-              <a:rPr lang="en-US" altLang="ko-KR" sz="1600" dirty="0">
-                <a:ea typeface="+mn-lt"/>
-                <a:cs typeface="+mn-lt"/>
-              </a:rPr>
-              <a:t>Fear</a:t>
-            </a:r>
-            <a:r>
-              <a:rPr lang="ko-KR" altLang="en-US" sz="1600" dirty="0">
-                <a:ea typeface="+mn-lt"/>
-                <a:cs typeface="+mn-lt"/>
-              </a:rPr>
-              <a:t>이 낮았던 유저</a:t>
-            </a:r>
-            <a:r>
-              <a:rPr lang="en-US" altLang="ko-KR" sz="1600" dirty="0">
+              <a:t>가 된 순간을 기준으로</a:t>
+            </a:r>
+            <a:r>
+              <a:rPr lang="en-US" altLang="ko-KR" sz="1400" dirty="0">
                 <a:ea typeface="+mn-lt"/>
                 <a:cs typeface="+mn-lt"/>
               </a:rPr>
               <a:t>, </a:t>
             </a:r>
             <a:r>
-              <a:rPr lang="ko-KR" altLang="en-US" sz="1600" dirty="0">
+              <a:rPr lang="ko-KR" altLang="en-US" sz="1400" dirty="0">
                 <a:ea typeface="+mn-lt"/>
                 <a:cs typeface="+mn-lt"/>
               </a:rPr>
-              <a:t>인벤토리에 스크랩 가격의 총합이 가장 높은 유저 중 랜덤으로 한 명을 골라 </a:t>
-            </a:r>
-            <a:r>
-              <a:rPr lang="en-US" altLang="ko-KR" sz="1600" dirty="0">
+              <a:t>아래 조건을 하나라도 만족하는 플레이어는 </a:t>
+            </a:r>
+            <a:r>
+              <a:rPr lang="en-US" altLang="ko-KR" sz="1400" dirty="0">
                 <a:ea typeface="+mn-lt"/>
                 <a:cs typeface="+mn-lt"/>
               </a:rPr>
               <a:t>‘</a:t>
             </a:r>
             <a:r>
-              <a:rPr lang="ko-KR" altLang="en-US" sz="1600" dirty="0">
+              <a:rPr lang="ko-KR" altLang="en-US" sz="1400" dirty="0">
+                <a:ea typeface="+mn-lt"/>
+                <a:cs typeface="+mn-lt"/>
+              </a:rPr>
+              <a:t>타겟 후보</a:t>
+            </a:r>
+            <a:r>
+              <a:rPr lang="en-US" altLang="ko-KR" sz="1400" dirty="0">
+                <a:ea typeface="+mn-lt"/>
+                <a:cs typeface="+mn-lt"/>
+              </a:rPr>
+              <a:t>’</a:t>
+            </a:r>
+            <a:r>
+              <a:rPr lang="ko-KR" altLang="en-US" sz="1400" dirty="0">
+                <a:ea typeface="+mn-lt"/>
+                <a:cs typeface="+mn-lt"/>
+              </a:rPr>
+              <a:t>가 된다</a:t>
+            </a:r>
+            <a:r>
+              <a:rPr lang="en-US" altLang="ko-KR" sz="1400" dirty="0">
+                <a:ea typeface="+mn-lt"/>
+                <a:cs typeface="+mn-lt"/>
+              </a:rPr>
+              <a:t>.</a:t>
+            </a:r>
+            <a:r>
+              <a:rPr lang="ko-KR" altLang="en-US" sz="1400" dirty="0">
+                <a:ea typeface="+mn-lt"/>
+                <a:cs typeface="+mn-lt"/>
+              </a:rPr>
+              <a:t> </a:t>
+            </a:r>
+            <a:br>
+              <a:rPr lang="en-US" altLang="ko-KR" sz="1400" dirty="0">
+                <a:ea typeface="+mn-lt"/>
+                <a:cs typeface="+mn-lt"/>
+              </a:rPr>
+            </a:br>
+            <a:r>
+              <a:rPr lang="ko-KR" altLang="en-US" sz="1400" dirty="0">
+                <a:ea typeface="+mn-lt"/>
+                <a:cs typeface="+mn-lt"/>
+              </a:rPr>
+              <a:t>타겟 후보 중 무작위로 선택된 </a:t>
+            </a:r>
+            <a:r>
+              <a:rPr lang="en-US" altLang="ko-KR" sz="1400" dirty="0">
+                <a:ea typeface="+mn-lt"/>
+                <a:cs typeface="+mn-lt"/>
+              </a:rPr>
+              <a:t>1 </a:t>
+            </a:r>
+            <a:r>
+              <a:rPr lang="ko-KR" altLang="en-US" sz="1400" dirty="0">
+                <a:ea typeface="+mn-lt"/>
+                <a:cs typeface="+mn-lt"/>
+              </a:rPr>
+              <a:t>인이 </a:t>
+            </a:r>
+            <a:r>
+              <a:rPr lang="en-US" altLang="ko-KR" sz="1400" dirty="0">
+                <a:ea typeface="+mn-lt"/>
+                <a:cs typeface="+mn-lt"/>
+              </a:rPr>
+              <a:t>‘</a:t>
+            </a:r>
+            <a:r>
+              <a:rPr lang="ko-KR" altLang="en-US" sz="1400" dirty="0">
                 <a:ea typeface="+mn-lt"/>
                 <a:cs typeface="+mn-lt"/>
               </a:rPr>
               <a:t>타겟</a:t>
             </a:r>
             <a:r>
-              <a:rPr lang="en-US" altLang="ko-KR" sz="1600" dirty="0">
+              <a:rPr lang="en-US" altLang="ko-KR" sz="1400" dirty="0">
                 <a:ea typeface="+mn-lt"/>
                 <a:cs typeface="+mn-lt"/>
               </a:rPr>
-              <a:t>‘</a:t>
-            </a:r>
-            <a:r>
-              <a:rPr lang="ko-KR" altLang="en-US" sz="1600" dirty="0">
+              <a:t>’</a:t>
+            </a:r>
+            <a:r>
+              <a:rPr lang="ko-KR" altLang="en-US" sz="1400" dirty="0">
                 <a:ea typeface="+mn-lt"/>
                 <a:cs typeface="+mn-lt"/>
               </a:rPr>
-              <a:t>으로 지정한다</a:t>
-            </a:r>
-            <a:r>
-              <a:rPr lang="en-US" altLang="ko-KR" sz="1600" dirty="0">
+              <a:t>이 된다</a:t>
+            </a:r>
+            <a:r>
+              <a:rPr lang="en-US" altLang="ko-KR" sz="1400" dirty="0">
                 <a:ea typeface="+mn-lt"/>
                 <a:cs typeface="+mn-lt"/>
               </a:rPr>
               <a:t>.</a:t>
             </a:r>
-          </a:p>
-          <a:p>
-            <a:pPr latinLnBrk="0"/>
-            <a:r>
-              <a:rPr lang="ko-KR" altLang="en-US" sz="1600" dirty="0">
+            <a:br>
+              <a:rPr lang="en-US" altLang="ko-KR" sz="1400" dirty="0">
                 <a:ea typeface="+mn-lt"/>
                 <a:cs typeface="+mn-lt"/>
               </a:rPr>
-              <a:t>타겟이 사라지면 즉시 곧바로 새로운 타겟을 지정한다</a:t>
-            </a:r>
-            <a:r>
-              <a:rPr lang="en-US" altLang="ko-KR" sz="1600" dirty="0">
+            </a:br>
+            <a:br>
+              <a:rPr lang="en-US" altLang="ko-KR" sz="1400" dirty="0">
+                <a:ea typeface="+mn-lt"/>
+                <a:cs typeface="+mn-lt"/>
+              </a:rPr>
+            </a:br>
+            <a:r>
+              <a:rPr lang="ko-KR" altLang="en-US" sz="1400" dirty="0">
+                <a:ea typeface="+mn-lt"/>
+                <a:cs typeface="+mn-lt"/>
+              </a:rPr>
+              <a:t>조건 </a:t>
+            </a:r>
+            <a:r>
+              <a:rPr lang="en-US" altLang="ko-KR" sz="1400" dirty="0">
+                <a:ea typeface="+mn-lt"/>
+                <a:cs typeface="+mn-lt"/>
+              </a:rPr>
+              <a:t>1. </a:t>
+            </a:r>
+            <a:r>
+              <a:rPr lang="ko-KR" altLang="en-US" sz="1400" dirty="0">
+                <a:ea typeface="+mn-lt"/>
+                <a:cs typeface="+mn-lt"/>
+              </a:rPr>
+              <a:t>누적된 </a:t>
+            </a:r>
+            <a:r>
+              <a:rPr lang="en-US" altLang="ko-KR" sz="1400" dirty="0">
+                <a:ea typeface="+mn-lt"/>
+                <a:cs typeface="+mn-lt"/>
+              </a:rPr>
+              <a:t>Fear </a:t>
+            </a:r>
+            <a:r>
+              <a:rPr lang="ko-KR" altLang="en-US" sz="1400" dirty="0">
+                <a:ea typeface="+mn-lt"/>
+                <a:cs typeface="+mn-lt"/>
+              </a:rPr>
+              <a:t>값이 가장 높음</a:t>
+            </a:r>
+            <a:br>
+              <a:rPr lang="en-US" altLang="ko-KR" sz="1400" dirty="0">
+                <a:ea typeface="+mn-lt"/>
+                <a:cs typeface="+mn-lt"/>
+              </a:rPr>
+            </a:br>
+            <a:r>
+              <a:rPr lang="ko-KR" altLang="en-US" sz="1400" dirty="0">
+                <a:ea typeface="+mn-lt"/>
+                <a:cs typeface="+mn-lt"/>
+              </a:rPr>
+              <a:t>조건 </a:t>
+            </a:r>
+            <a:r>
+              <a:rPr lang="en-US" altLang="ko-KR" sz="1400" dirty="0">
+                <a:ea typeface="+mn-lt"/>
+                <a:cs typeface="+mn-lt"/>
+              </a:rPr>
+              <a:t>2. </a:t>
+            </a:r>
+            <a:r>
+              <a:rPr lang="ko-KR" altLang="en-US" sz="1400" dirty="0">
+                <a:ea typeface="+mn-lt"/>
+                <a:cs typeface="+mn-lt"/>
+              </a:rPr>
+              <a:t>누적된 </a:t>
+            </a:r>
+            <a:r>
+              <a:rPr lang="en-US" altLang="ko-KR" sz="1400" dirty="0">
+                <a:ea typeface="+mn-lt"/>
+                <a:cs typeface="+mn-lt"/>
+              </a:rPr>
+              <a:t>Fear </a:t>
+            </a:r>
+            <a:r>
+              <a:rPr lang="ko-KR" altLang="en-US" sz="1400" dirty="0">
+                <a:ea typeface="+mn-lt"/>
+                <a:cs typeface="+mn-lt"/>
+              </a:rPr>
+              <a:t>값이 가장 낮음</a:t>
+            </a:r>
+            <a:br>
+              <a:rPr lang="en-US" altLang="ko-KR" sz="1400" dirty="0">
+                <a:ea typeface="+mn-lt"/>
+                <a:cs typeface="+mn-lt"/>
+              </a:rPr>
+            </a:br>
+            <a:r>
+              <a:rPr lang="ko-KR" altLang="en-US" sz="1400" dirty="0">
+                <a:ea typeface="+mn-lt"/>
+                <a:cs typeface="+mn-lt"/>
+              </a:rPr>
+              <a:t>조건 </a:t>
+            </a:r>
+            <a:r>
+              <a:rPr lang="en-US" altLang="ko-KR" sz="1400" dirty="0">
+                <a:ea typeface="+mn-lt"/>
+                <a:cs typeface="+mn-lt"/>
+              </a:rPr>
+              <a:t>3. </a:t>
+            </a:r>
+            <a:r>
+              <a:rPr lang="ko-KR" altLang="en-US" sz="1400" dirty="0">
+                <a:ea typeface="+mn-lt"/>
+                <a:cs typeface="+mn-lt"/>
+              </a:rPr>
+              <a:t>습득한 스크랩들의 총 가격이 가장 높음</a:t>
+            </a:r>
+            <a:endParaRPr lang="en-US" altLang="ko-KR" sz="1400" dirty="0">
+              <a:ea typeface="+mn-lt"/>
+              <a:cs typeface="+mn-lt"/>
+            </a:endParaRPr>
+          </a:p>
+          <a:p>
+            <a:pPr marL="342900" indent="-342900" latinLnBrk="0">
+              <a:buAutoNum type="arabicPeriod"/>
+            </a:pPr>
+            <a:r>
+              <a:rPr lang="ko-KR" altLang="en-US" sz="1400" dirty="0">
+                <a:ea typeface="+mn-lt"/>
+                <a:cs typeface="+mn-lt"/>
+              </a:rPr>
+              <a:t>각 조건에 부합하는 플레이어가 여러 명일 경우</a:t>
+            </a:r>
+            <a:r>
+              <a:rPr lang="en-US" altLang="ko-KR" sz="1400" dirty="0">
+                <a:ea typeface="+mn-lt"/>
+                <a:cs typeface="+mn-lt"/>
+              </a:rPr>
+              <a:t>, </a:t>
+            </a:r>
+            <a:r>
+              <a:rPr lang="ko-KR" altLang="en-US" sz="1400" dirty="0">
+                <a:ea typeface="+mn-lt"/>
+                <a:cs typeface="+mn-lt"/>
+              </a:rPr>
+              <a:t>모두 타겟 후보가 된다</a:t>
+            </a:r>
+            <a:r>
+              <a:rPr lang="en-US" altLang="ko-KR" sz="1400" dirty="0">
+                <a:ea typeface="+mn-lt"/>
+                <a:cs typeface="+mn-lt"/>
+              </a:rPr>
+              <a:t>.</a:t>
+            </a:r>
+            <a:br>
+              <a:rPr lang="en-US" altLang="ko-KR" sz="1400" dirty="0">
+                <a:ea typeface="+mn-lt"/>
+                <a:cs typeface="+mn-lt"/>
+              </a:rPr>
+            </a:br>
+            <a:r>
+              <a:rPr lang="en-US" altLang="ko-KR" sz="1400" dirty="0">
+                <a:ea typeface="+mn-lt"/>
+                <a:cs typeface="+mn-lt"/>
+              </a:rPr>
+              <a:t>(Ex. </a:t>
+            </a:r>
+            <a:r>
+              <a:rPr lang="ko-KR" altLang="en-US" sz="1400" dirty="0">
+                <a:ea typeface="+mn-lt"/>
+                <a:cs typeface="+mn-lt"/>
+              </a:rPr>
+              <a:t>모든 플레이어의 누적된 </a:t>
+            </a:r>
+            <a:r>
+              <a:rPr lang="en-US" altLang="ko-KR" sz="1400" dirty="0">
+                <a:ea typeface="+mn-lt"/>
+                <a:cs typeface="+mn-lt"/>
+              </a:rPr>
+              <a:t>Fear </a:t>
+            </a:r>
+            <a:r>
+              <a:rPr lang="ko-KR" altLang="en-US" sz="1400" dirty="0">
+                <a:ea typeface="+mn-lt"/>
+                <a:cs typeface="+mn-lt"/>
+              </a:rPr>
+              <a:t>값이 동일할 경우</a:t>
+            </a:r>
+            <a:r>
+              <a:rPr lang="en-US" altLang="ko-KR" sz="1400" dirty="0">
+                <a:ea typeface="+mn-lt"/>
+                <a:cs typeface="+mn-lt"/>
+              </a:rPr>
+              <a:t>, </a:t>
+            </a:r>
+            <a:r>
+              <a:rPr lang="ko-KR" altLang="en-US" sz="1400" dirty="0">
+                <a:ea typeface="+mn-lt"/>
+                <a:cs typeface="+mn-lt"/>
+              </a:rPr>
+              <a:t>타겟 후보는 전원</a:t>
+            </a:r>
+            <a:r>
+              <a:rPr lang="en-US" altLang="ko-KR" sz="1400" dirty="0">
+                <a:ea typeface="+mn-lt"/>
+                <a:cs typeface="+mn-lt"/>
+              </a:rPr>
+              <a:t>.)</a:t>
+            </a:r>
+          </a:p>
+          <a:p>
+            <a:pPr marL="342900" indent="-342900" latinLnBrk="0">
+              <a:buAutoNum type="arabicPeriod"/>
+            </a:pPr>
+            <a:r>
+              <a:rPr lang="ko-KR" altLang="en-US" sz="1400" dirty="0"/>
+              <a:t>단</a:t>
+            </a:r>
+            <a:r>
+              <a:rPr lang="en-US" altLang="ko-KR" sz="1400" dirty="0"/>
+              <a:t>, </a:t>
+            </a:r>
+            <a:r>
+              <a:rPr lang="ko-KR" altLang="en-US" sz="1400" dirty="0"/>
+              <a:t>한 플레이어가 여러 조건을 동시에 만족하더라도 타겟 후보 목록에는 중복 없이 </a:t>
+            </a:r>
+            <a:r>
+              <a:rPr lang="en-US" altLang="ko-KR" sz="1400" dirty="0"/>
+              <a:t>1</a:t>
+            </a:r>
+            <a:r>
+              <a:rPr lang="ko-KR" altLang="en-US" sz="1400" dirty="0"/>
+              <a:t>번만 등록된다</a:t>
+            </a:r>
+            <a:endParaRPr lang="en-US" altLang="ko-KR" sz="1400" dirty="0">
+              <a:ea typeface="+mn-lt"/>
+              <a:cs typeface="+mn-lt"/>
+            </a:endParaRPr>
+          </a:p>
+          <a:p>
+            <a:pPr marL="342900" indent="-342900" latinLnBrk="0">
+              <a:buAutoNum type="arabicPeriod"/>
+            </a:pPr>
+            <a:r>
+              <a:rPr lang="ko-KR" altLang="en-US" sz="1400" dirty="0">
+                <a:ea typeface="+mn-lt"/>
+                <a:cs typeface="+mn-lt"/>
+              </a:rPr>
+              <a:t>게임 도중</a:t>
+            </a:r>
+            <a:r>
+              <a:rPr lang="en-US" altLang="ko-KR" sz="1400" dirty="0">
+                <a:ea typeface="+mn-lt"/>
+                <a:cs typeface="+mn-lt"/>
+              </a:rPr>
+              <a:t>, </a:t>
+            </a:r>
+            <a:r>
+              <a:rPr lang="ko-KR" altLang="en-US" sz="1400" dirty="0">
+                <a:ea typeface="+mn-lt"/>
+                <a:cs typeface="+mn-lt"/>
+              </a:rPr>
+              <a:t>타겟 플레이어가 게임을 나가거나 사망한다면</a:t>
+            </a:r>
+            <a:r>
+              <a:rPr lang="en-US" altLang="ko-KR" sz="1400" dirty="0">
+                <a:ea typeface="+mn-lt"/>
+                <a:cs typeface="+mn-lt"/>
+              </a:rPr>
+              <a:t>, </a:t>
+            </a:r>
+            <a:r>
+              <a:rPr lang="ko-KR" altLang="en-US" sz="1400" dirty="0">
+                <a:ea typeface="+mn-lt"/>
+                <a:cs typeface="+mn-lt"/>
+              </a:rPr>
+              <a:t>유령은 활동을 멈추고 즉시 사라진다</a:t>
+            </a:r>
+            <a:r>
+              <a:rPr lang="en-US" altLang="ko-KR" sz="1400" dirty="0">
+                <a:ea typeface="+mn-lt"/>
+                <a:cs typeface="+mn-lt"/>
+              </a:rPr>
+              <a:t>. </a:t>
+            </a:r>
+            <a:r>
+              <a:rPr lang="ko-KR" altLang="en-US" sz="1400" dirty="0" err="1">
+                <a:ea typeface="+mn-lt"/>
+                <a:cs typeface="+mn-lt"/>
+              </a:rPr>
+              <a:t>스탯을</a:t>
+            </a:r>
+            <a:r>
+              <a:rPr lang="ko-KR" altLang="en-US" sz="1400" dirty="0">
+                <a:ea typeface="+mn-lt"/>
+                <a:cs typeface="+mn-lt"/>
+              </a:rPr>
+              <a:t> 초기화한다</a:t>
+            </a:r>
+            <a:r>
+              <a:rPr lang="en-US" altLang="ko-KR" sz="1400" dirty="0">
+                <a:ea typeface="+mn-lt"/>
+                <a:cs typeface="+mn-lt"/>
+              </a:rPr>
+              <a:t>.</a:t>
+            </a:r>
+          </a:p>
+          <a:p>
+            <a:pPr marL="342900" indent="-342900" latinLnBrk="0">
+              <a:buAutoNum type="arabicPeriod"/>
+            </a:pPr>
+            <a:r>
+              <a:rPr lang="ko-KR" altLang="en-US" sz="1400" dirty="0">
+                <a:ea typeface="+mn-lt"/>
+                <a:cs typeface="+mn-lt"/>
+              </a:rPr>
+              <a:t>휴식 시간 후</a:t>
+            </a:r>
+            <a:r>
+              <a:rPr lang="en-US" altLang="ko-KR" sz="1400" dirty="0">
+                <a:ea typeface="+mn-lt"/>
+                <a:cs typeface="+mn-lt"/>
+              </a:rPr>
+              <a:t>, </a:t>
+            </a:r>
+            <a:r>
+              <a:rPr lang="ko-KR" altLang="en-US" sz="1400" dirty="0">
+                <a:ea typeface="+mn-lt"/>
+                <a:cs typeface="+mn-lt"/>
+              </a:rPr>
+              <a:t>유령은 </a:t>
+            </a:r>
+            <a:r>
+              <a:rPr lang="en-US" altLang="ko-KR" sz="1400" dirty="0">
+                <a:ea typeface="+mn-lt"/>
+                <a:cs typeface="+mn-lt"/>
+              </a:rPr>
+              <a:t>Idle </a:t>
+            </a:r>
+            <a:r>
+              <a:rPr lang="ko-KR" altLang="en-US" sz="1400" dirty="0">
+                <a:ea typeface="+mn-lt"/>
+                <a:cs typeface="+mn-lt"/>
+              </a:rPr>
+              <a:t>상태에서 다시 시작한다</a:t>
+            </a:r>
+            <a:r>
+              <a:rPr lang="en-US" altLang="ko-KR" sz="1400" dirty="0">
                 <a:ea typeface="+mn-lt"/>
                 <a:cs typeface="+mn-lt"/>
               </a:rPr>
@@ -10812,7 +11137,7 @@
           <a:p>
             <a:fld id="{2A226FEB-661D-4181-84CB-C53DCFE1931A}" type="slidenum">
               <a:rPr lang="ko-KR" altLang="en-US" smtClean="0"/>
-              <a:t>7</a:t>
+              <a:t>6</a:t>
             </a:fld>
             <a:endParaRPr lang="ko-KR" altLang="en-US"/>
           </a:p>
@@ -10831,7 +11156,7 @@
 </p:sld>
 </file>
 
-<file path=ppt/slides/slide8.xml><?xml version="1.0" encoding="utf-8"?>
+<file path=ppt/slides/slide7.xml><?xml version="1.0" encoding="utf-8"?>
 <p:sld xmlns:a="http://schemas.openxmlformats.org/drawingml/2006/main" xmlns:r="http://schemas.openxmlformats.org/officeDocument/2006/relationships" xmlns:p="http://schemas.openxmlformats.org/presentationml/2006/main">
   <p:cSld>
     <p:spTree>
@@ -10895,7 +11220,7 @@
             <a:pPr latinLnBrk="0"/>
             <a:r>
               <a:rPr lang="ko-KR" altLang="en-US" dirty="0"/>
-              <a:t>타겟 지정</a:t>
+              <a:t>타겟 지정 조건과 방식</a:t>
             </a:r>
             <a:endParaRPr lang="en-US" altLang="ko-KR" dirty="0"/>
           </a:p>
@@ -10967,17 +11292,67 @@
             <a:pPr latinLnBrk="0"/>
             <a:r>
               <a:rPr lang="ko-KR" altLang="en-US" sz="1600" b="1" dirty="0">
+                <a:solidFill>
+                  <a:srgbClr val="FF0000"/>
+                </a:solidFill>
                 <a:ea typeface="+mn-lt"/>
                 <a:cs typeface="+mn-lt"/>
               </a:rPr>
-              <a:t>목적지 선정 조건</a:t>
+              <a:t>플레이어와 동일한 큐브 안에서</a:t>
             </a:r>
             <a:r>
               <a:rPr lang="en-US" altLang="ko-KR" sz="1600" b="1" dirty="0">
+                <a:solidFill>
+                  <a:srgbClr val="FF0000"/>
+                </a:solidFill>
                 <a:ea typeface="+mn-lt"/>
                 <a:cs typeface="+mn-lt"/>
               </a:rPr>
-              <a:t>:</a:t>
+              <a:t> </a:t>
+            </a:r>
+            <a:r>
+              <a:rPr lang="ko-KR" altLang="en-US" sz="1600" b="1" dirty="0">
+                <a:solidFill>
+                  <a:srgbClr val="FF0000"/>
+                </a:solidFill>
+                <a:ea typeface="+mn-lt"/>
+                <a:cs typeface="+mn-lt"/>
+              </a:rPr>
+              <a:t>플레이어 방향의 반대 방향 </a:t>
+            </a:r>
+            <a:r>
+              <a:rPr lang="en-US" altLang="ko-KR" sz="1600" b="1" dirty="0">
+                <a:solidFill>
+                  <a:srgbClr val="FF0000"/>
+                </a:solidFill>
+                <a:ea typeface="+mn-lt"/>
+                <a:cs typeface="+mn-lt"/>
+              </a:rPr>
+              <a:t>4m </a:t>
+            </a:r>
+            <a:r>
+              <a:rPr lang="ko-KR" altLang="en-US" sz="1600" b="1" dirty="0">
+                <a:solidFill>
+                  <a:srgbClr val="FF0000"/>
+                </a:solidFill>
+                <a:ea typeface="+mn-lt"/>
+                <a:cs typeface="+mn-lt"/>
+              </a:rPr>
+              <a:t>떨어진 빈 지점</a:t>
+            </a:r>
+            <a:r>
+              <a:rPr lang="ko-KR" altLang="en-US" sz="1600" dirty="0">
+                <a:ea typeface="+mn-lt"/>
+                <a:cs typeface="+mn-lt"/>
+              </a:rPr>
+              <a:t>을 목적지로 설정한다</a:t>
+            </a:r>
+            <a:r>
+              <a:rPr lang="en-US" altLang="ko-KR" sz="1600" dirty="0">
+                <a:ea typeface="+mn-lt"/>
+                <a:cs typeface="+mn-lt"/>
+              </a:rPr>
+              <a:t>.</a:t>
             </a:r>
             <a:br>
               <a:rPr lang="en-US" altLang="ko-KR" sz="1600" dirty="0">
@@ -10986,74 +11361,161 @@
               </a:rPr>
             </a:br>
             <a:r>
+              <a:rPr lang="en-US" altLang="ko-KR" sz="1200" dirty="0">
+                <a:ea typeface="+mn-lt"/>
+                <a:cs typeface="+mn-lt"/>
+              </a:rPr>
+              <a:t>(*</a:t>
+            </a:r>
+            <a:r>
+              <a:rPr lang="ko-KR" altLang="en-US" sz="1200" dirty="0">
+                <a:ea typeface="+mn-lt"/>
+                <a:cs typeface="+mn-lt"/>
+              </a:rPr>
+              <a:t>빈 지점</a:t>
+            </a:r>
+            <a:r>
+              <a:rPr lang="en-US" altLang="ko-KR" sz="1200" dirty="0">
+                <a:ea typeface="+mn-lt"/>
+                <a:cs typeface="+mn-lt"/>
+              </a:rPr>
+              <a:t>: </a:t>
+            </a:r>
+            <a:r>
+              <a:rPr lang="ko-KR" altLang="en-US" sz="1200" dirty="0">
+                <a:ea typeface="+mn-lt"/>
+                <a:cs typeface="+mn-lt"/>
+              </a:rPr>
+              <a:t>해당 위치에 벽</a:t>
+            </a:r>
+            <a:r>
+              <a:rPr lang="en-US" altLang="ko-KR" sz="1200" dirty="0">
+                <a:ea typeface="+mn-lt"/>
+                <a:cs typeface="+mn-lt"/>
+              </a:rPr>
+              <a:t>, </a:t>
+            </a:r>
+            <a:r>
+              <a:rPr lang="ko-KR" altLang="en-US" sz="1200" dirty="0">
+                <a:ea typeface="+mn-lt"/>
+                <a:cs typeface="+mn-lt"/>
+              </a:rPr>
+              <a:t>문</a:t>
+            </a:r>
+            <a:r>
+              <a:rPr lang="en-US" altLang="ko-KR" sz="1200" dirty="0">
+                <a:ea typeface="+mn-lt"/>
+                <a:cs typeface="+mn-lt"/>
+              </a:rPr>
+              <a:t>, </a:t>
+            </a:r>
+            <a:r>
+              <a:rPr lang="ko-KR" altLang="en-US" sz="1200" dirty="0">
+                <a:ea typeface="+mn-lt"/>
+                <a:cs typeface="+mn-lt"/>
+              </a:rPr>
+              <a:t>가구</a:t>
+            </a:r>
+            <a:r>
+              <a:rPr lang="en-US" altLang="ko-KR" sz="1200" dirty="0">
+                <a:ea typeface="+mn-lt"/>
+                <a:cs typeface="+mn-lt"/>
+              </a:rPr>
+              <a:t>(</a:t>
+            </a:r>
+            <a:r>
+              <a:rPr lang="ko-KR" altLang="en-US" sz="1200" dirty="0">
+                <a:ea typeface="+mn-lt"/>
+                <a:cs typeface="+mn-lt"/>
+              </a:rPr>
+              <a:t>선반</a:t>
+            </a:r>
+            <a:r>
+              <a:rPr lang="en-US" altLang="ko-KR" sz="1200" dirty="0">
+                <a:ea typeface="+mn-lt"/>
+                <a:cs typeface="+mn-lt"/>
+              </a:rPr>
+              <a:t>, </a:t>
+            </a:r>
+            <a:r>
+              <a:rPr lang="ko-KR" altLang="en-US" sz="1200" dirty="0">
+                <a:ea typeface="+mn-lt"/>
+                <a:cs typeface="+mn-lt"/>
+              </a:rPr>
+              <a:t>판매기 등</a:t>
+            </a:r>
+            <a:r>
+              <a:rPr lang="en-US" altLang="ko-KR" sz="1200" dirty="0">
+                <a:ea typeface="+mn-lt"/>
+                <a:cs typeface="+mn-lt"/>
+              </a:rPr>
+              <a:t>), </a:t>
+            </a:r>
+            <a:r>
+              <a:rPr lang="ko-KR" altLang="en-US" sz="1200" dirty="0">
+                <a:ea typeface="+mn-lt"/>
+                <a:cs typeface="+mn-lt"/>
+              </a:rPr>
+              <a:t>계단</a:t>
+            </a:r>
+            <a:r>
+              <a:rPr lang="en-US" altLang="ko-KR" sz="1200" dirty="0">
+                <a:ea typeface="+mn-lt"/>
+                <a:cs typeface="+mn-lt"/>
+              </a:rPr>
+              <a:t>, </a:t>
+            </a:r>
+            <a:r>
+              <a:rPr lang="ko-KR" altLang="en-US" sz="1200" dirty="0">
+                <a:ea typeface="+mn-lt"/>
+                <a:cs typeface="+mn-lt"/>
+              </a:rPr>
+              <a:t>다른 플레이어가 없는 지점</a:t>
+            </a:r>
+            <a:r>
+              <a:rPr lang="en-US" altLang="ko-KR" sz="1200" dirty="0">
+                <a:ea typeface="+mn-lt"/>
+                <a:cs typeface="+mn-lt"/>
+              </a:rPr>
+              <a:t>)</a:t>
+            </a:r>
+          </a:p>
+          <a:p>
+            <a:pPr latinLnBrk="0"/>
+            <a:r>
               <a:rPr lang="ko-KR" altLang="en-US" sz="1600" dirty="0">
                 <a:ea typeface="+mn-lt"/>
                 <a:cs typeface="+mn-lt"/>
               </a:rPr>
-              <a:t>몬스터</a:t>
+              <a:t>단</a:t>
             </a:r>
             <a:r>
               <a:rPr lang="en-US" altLang="ko-KR" sz="1600" dirty="0">
                 <a:ea typeface="+mn-lt"/>
                 <a:cs typeface="+mn-lt"/>
               </a:rPr>
-              <a:t>(Ghost)</a:t>
+              <a:t>, </a:t>
             </a:r>
             <a:r>
               <a:rPr lang="ko-KR" altLang="en-US" sz="1600" dirty="0">
                 <a:ea typeface="+mn-lt"/>
                 <a:cs typeface="+mn-lt"/>
               </a:rPr>
-              <a:t>는 반드시 타겟의 뒤편</a:t>
+              <a:t>해당 지점은 플레이어와 같은 평면이어야 하고</a:t>
             </a:r>
             <a:r>
               <a:rPr lang="en-US" altLang="ko-KR" sz="1600" dirty="0">
                 <a:ea typeface="+mn-lt"/>
                 <a:cs typeface="+mn-lt"/>
               </a:rPr>
-              <a:t>(</a:t>
+              <a:t>, </a:t>
             </a:r>
             <a:r>
               <a:rPr lang="ko-KR" altLang="en-US" sz="1600" dirty="0">
                 <a:ea typeface="+mn-lt"/>
                 <a:cs typeface="+mn-lt"/>
               </a:rPr>
-              <a:t>카메라에 보이지 않는</a:t>
-            </a:r>
-            <a:r>
-              <a:rPr lang="en-US" altLang="ko-KR" sz="1600" dirty="0">
-                <a:ea typeface="+mn-lt"/>
-                <a:cs typeface="+mn-lt"/>
-              </a:rPr>
-              <a:t>),</a:t>
-            </a:r>
-            <a:r>
-              <a:rPr lang="ko-KR" altLang="en-US" sz="1600" dirty="0">
-                <a:ea typeface="+mn-lt"/>
-                <a:cs typeface="+mn-lt"/>
-              </a:rPr>
-              <a:t> </a:t>
-            </a:r>
-            <a:r>
-              <a:rPr lang="en-US" altLang="ko-KR" sz="1600" dirty="0">
-                <a:ea typeface="+mn-lt"/>
-                <a:cs typeface="+mn-lt"/>
-              </a:rPr>
-              <a:t>6m </a:t>
-            </a:r>
-            <a:r>
-              <a:rPr lang="ko-KR" altLang="en-US" sz="1600" dirty="0">
-                <a:ea typeface="+mn-lt"/>
-                <a:cs typeface="+mn-lt"/>
-              </a:rPr>
-              <a:t>떨어진 장소에 </a:t>
-            </a:r>
-            <a:r>
-              <a:rPr lang="ko-KR" altLang="en-US" sz="1600" dirty="0" err="1">
-                <a:ea typeface="+mn-lt"/>
-                <a:cs typeface="+mn-lt"/>
-              </a:rPr>
-              <a:t>스폰된다</a:t>
+              <a:t>바닥이 있어야 한다</a:t>
             </a:r>
             <a:r>
               <a:rPr lang="en-US" altLang="ko-KR" sz="1600" dirty="0">
@@ -11062,231 +11524,6 @@
               </a:rPr>
               <a:t>.</a:t>
             </a:r>
-            <a:br>
-              <a:rPr lang="en-US" altLang="ko-KR" sz="1600" dirty="0">
-                <a:ea typeface="+mn-lt"/>
-                <a:cs typeface="+mn-lt"/>
-              </a:rPr>
-            </a:br>
-            <a:r>
-              <a:rPr lang="ko-KR" altLang="en-US" sz="1600" dirty="0">
-                <a:ea typeface="+mn-lt"/>
-                <a:cs typeface="+mn-lt"/>
-              </a:rPr>
-              <a:t>단</a:t>
-            </a:r>
-            <a:r>
-              <a:rPr lang="en-US" altLang="ko-KR" sz="1600" dirty="0">
-                <a:ea typeface="+mn-lt"/>
-                <a:cs typeface="+mn-lt"/>
-              </a:rPr>
-              <a:t>, </a:t>
-            </a:r>
-            <a:r>
-              <a:rPr lang="ko-KR" altLang="en-US" sz="1600" dirty="0">
-                <a:ea typeface="+mn-lt"/>
-                <a:cs typeface="+mn-lt"/>
-              </a:rPr>
-              <a:t>벽이나 다른 장애물로 몬스터와 플레이어의 사이가 막혀 있지 않아야만 한다</a:t>
-            </a:r>
-            <a:r>
-              <a:rPr lang="en-US" altLang="ko-KR" sz="1600" dirty="0">
-                <a:ea typeface="+mn-lt"/>
-                <a:cs typeface="+mn-lt"/>
-              </a:rPr>
-              <a:t>.</a:t>
-            </a:r>
-          </a:p>
-          <a:p>
-            <a:pPr latinLnBrk="0"/>
-            <a:endParaRPr lang="en-US" altLang="ko-KR" sz="1600" dirty="0">
-              <a:ea typeface="+mn-lt"/>
-              <a:cs typeface="+mn-lt"/>
-            </a:endParaRPr>
-          </a:p>
-          <a:p>
-            <a:pPr latinLnBrk="0"/>
-            <a:r>
-              <a:rPr lang="ko-KR" altLang="en-US" sz="1600" dirty="0">
-                <a:ea typeface="+mn-lt"/>
-                <a:cs typeface="+mn-lt"/>
-              </a:rPr>
-              <a:t>목적지 탐색 방식</a:t>
-            </a:r>
-            <a:r>
-              <a:rPr lang="en-US" altLang="ko-KR" sz="1600" dirty="0">
-                <a:ea typeface="+mn-lt"/>
-                <a:cs typeface="+mn-lt"/>
-              </a:rPr>
-              <a:t>:</a:t>
-            </a:r>
-            <a:br>
-              <a:rPr lang="en-US" altLang="ko-KR" sz="1600" dirty="0">
-                <a:ea typeface="+mn-lt"/>
-                <a:cs typeface="+mn-lt"/>
-              </a:rPr>
-            </a:br>
-            <a:r>
-              <a:rPr lang="en-US" altLang="ko-KR" sz="1600" dirty="0">
-                <a:ea typeface="+mn-lt"/>
-                <a:cs typeface="+mn-lt"/>
-              </a:rPr>
-              <a:t>(</a:t>
-            </a:r>
-            <a:r>
-              <a:rPr lang="ko-KR" altLang="en-US" sz="1600" dirty="0" err="1">
-                <a:ea typeface="+mn-lt"/>
-                <a:cs typeface="+mn-lt"/>
-              </a:rPr>
-              <a:t>리썰의</a:t>
-            </a:r>
-            <a:r>
-              <a:rPr lang="ko-KR" altLang="en-US" sz="1600" dirty="0">
-                <a:ea typeface="+mn-lt"/>
-                <a:cs typeface="+mn-lt"/>
-              </a:rPr>
-              <a:t> </a:t>
-            </a:r>
-            <a:r>
-              <a:rPr lang="en-US" altLang="ko-KR" sz="1600" dirty="0">
-                <a:ea typeface="+mn-lt"/>
-                <a:cs typeface="+mn-lt"/>
-              </a:rPr>
-              <a:t>Ghost Girl</a:t>
-            </a:r>
-            <a:r>
-              <a:rPr lang="ko-KR" altLang="en-US" sz="1600" dirty="0">
-                <a:ea typeface="+mn-lt"/>
-                <a:cs typeface="+mn-lt"/>
-              </a:rPr>
-              <a:t>은 </a:t>
-            </a:r>
-            <a:r>
-              <a:rPr lang="en-US" altLang="ko-KR" sz="1600" dirty="0" err="1">
-                <a:ea typeface="+mn-lt"/>
-                <a:cs typeface="+mn-lt"/>
-              </a:rPr>
-              <a:t>Raycast</a:t>
-            </a:r>
-            <a:r>
-              <a:rPr lang="ko-KR" altLang="en-US" sz="1600" dirty="0">
-                <a:ea typeface="+mn-lt"/>
-                <a:cs typeface="+mn-lt"/>
-              </a:rPr>
-              <a:t>라는 방식을 쓰는데</a:t>
-            </a:r>
-            <a:r>
-              <a:rPr lang="en-US" altLang="ko-KR" sz="1600" dirty="0">
-                <a:ea typeface="+mn-lt"/>
-                <a:cs typeface="+mn-lt"/>
-              </a:rPr>
-              <a:t>,</a:t>
-            </a:r>
-            <a:r>
-              <a:rPr lang="ko-KR" altLang="en-US" sz="1600" dirty="0">
-                <a:ea typeface="+mn-lt"/>
-                <a:cs typeface="+mn-lt"/>
-              </a:rPr>
-              <a:t> 그냥 랜덤하게 타겟 뒤쪽 </a:t>
-            </a:r>
-            <a:r>
-              <a:rPr lang="en-US" altLang="ko-KR" sz="1600" dirty="0">
-                <a:ea typeface="+mn-lt"/>
-                <a:cs typeface="+mn-lt"/>
-              </a:rPr>
-              <a:t>6m </a:t>
-            </a:r>
-            <a:r>
-              <a:rPr lang="ko-KR" altLang="en-US" sz="1600" dirty="0">
-                <a:ea typeface="+mn-lt"/>
-                <a:cs typeface="+mn-lt"/>
-              </a:rPr>
-              <a:t>지점이 비었는지 아닌지</a:t>
-            </a:r>
-            <a:r>
-              <a:rPr lang="en-US" altLang="ko-KR" sz="1600" dirty="0">
-                <a:ea typeface="+mn-lt"/>
-                <a:cs typeface="+mn-lt"/>
-              </a:rPr>
-              <a:t>, </a:t>
-            </a:r>
-            <a:r>
-              <a:rPr lang="ko-KR" altLang="en-US" sz="1600" dirty="0">
-                <a:ea typeface="+mn-lt"/>
-                <a:cs typeface="+mn-lt"/>
-              </a:rPr>
-              <a:t>사이가 </a:t>
-            </a:r>
-            <a:r>
-              <a:rPr lang="ko-KR" altLang="en-US" sz="1600" dirty="0" err="1">
-                <a:ea typeface="+mn-lt"/>
-                <a:cs typeface="+mn-lt"/>
-              </a:rPr>
-              <a:t>막혀있는지</a:t>
-            </a:r>
-            <a:r>
-              <a:rPr lang="ko-KR" altLang="en-US" sz="1600" dirty="0">
-                <a:ea typeface="+mn-lt"/>
-                <a:cs typeface="+mn-lt"/>
-              </a:rPr>
-              <a:t> </a:t>
-            </a:r>
-            <a:r>
-              <a:rPr lang="ko-KR" altLang="en-US" sz="1600" dirty="0" err="1">
-                <a:ea typeface="+mn-lt"/>
-                <a:cs typeface="+mn-lt"/>
-              </a:rPr>
-              <a:t>아닌지만</a:t>
-            </a:r>
-            <a:r>
-              <a:rPr lang="ko-KR" altLang="en-US" sz="1600" dirty="0">
-                <a:ea typeface="+mn-lt"/>
-                <a:cs typeface="+mn-lt"/>
-              </a:rPr>
-              <a:t> 확인해도 되지 않나</a:t>
-            </a:r>
-            <a:r>
-              <a:rPr lang="en-US" altLang="ko-KR" sz="1600" dirty="0">
-                <a:ea typeface="+mn-lt"/>
-                <a:cs typeface="+mn-lt"/>
-              </a:rPr>
-              <a:t>? -&gt; </a:t>
-            </a:r>
-            <a:r>
-              <a:rPr lang="ko-KR" altLang="en-US" sz="1600" dirty="0" err="1">
-                <a:ea typeface="+mn-lt"/>
-                <a:cs typeface="+mn-lt"/>
-              </a:rPr>
-              <a:t>제미나이한테</a:t>
-            </a:r>
-            <a:r>
-              <a:rPr lang="ko-KR" altLang="en-US" sz="1600" dirty="0">
-                <a:ea typeface="+mn-lt"/>
-                <a:cs typeface="+mn-lt"/>
-              </a:rPr>
-              <a:t> 물어보니까 안된다고 </a:t>
-            </a:r>
-            <a:r>
-              <a:rPr lang="ko-KR" altLang="en-US" sz="1600" dirty="0" err="1">
-                <a:ea typeface="+mn-lt"/>
-                <a:cs typeface="+mn-lt"/>
-              </a:rPr>
-              <a:t>대답해줬음</a:t>
-            </a:r>
-            <a:r>
-              <a:rPr lang="en-US" altLang="ko-KR" sz="1600" dirty="0">
-                <a:ea typeface="+mn-lt"/>
-                <a:cs typeface="+mn-lt"/>
-              </a:rPr>
-              <a:t>)</a:t>
-            </a:r>
-          </a:p>
-          <a:p>
-            <a:pPr latinLnBrk="0"/>
-            <a:endParaRPr lang="en-US" altLang="ko-KR" sz="1600" dirty="0">
-              <a:ea typeface="+mn-lt"/>
-              <a:cs typeface="+mn-lt"/>
-            </a:endParaRPr>
           </a:p>
         </p:txBody>
       </p:sp>
@@ -11313,12 +11550,1083 @@
           <a:p>
             <a:fld id="{2A226FEB-661D-4181-84CB-C53DCFE1931A}" type="slidenum">
               <a:rPr lang="ko-KR" altLang="en-US" smtClean="0"/>
-              <a:t>8</a:t>
+              <a:t>7</a:t>
             </a:fld>
             <a:endParaRPr lang="ko-KR" altLang="en-US"/>
           </a:p>
         </p:txBody>
       </p:sp>
+      <p:grpSp>
+        <p:nvGrpSpPr>
+          <p:cNvPr id="20" name="그룹 19">
+            <a:extLst>
+              <a:ext uri="{FF2B5EF4-FFF2-40B4-BE49-F238E27FC236}">
+                <a16:creationId xmlns:a16="http://schemas.microsoft.com/office/drawing/2014/main" id="{C8CE6B5F-F6D0-A29E-A994-322AD36317E9}"/>
+              </a:ext>
+            </a:extLst>
+          </p:cNvPr>
+          <p:cNvGrpSpPr/>
+          <p:nvPr/>
+        </p:nvGrpSpPr>
+        <p:grpSpPr>
+          <a:xfrm>
+            <a:off x="2351814" y="3061634"/>
+            <a:ext cx="8787800" cy="3083671"/>
+            <a:chOff x="1892300" y="1079500"/>
+            <a:chExt cx="8385427" cy="2942477"/>
+          </a:xfrm>
+        </p:grpSpPr>
+        <p:pic>
+          <p:nvPicPr>
+            <p:cNvPr id="7" name="그림 6">
+              <a:extLst>
+                <a:ext uri="{FF2B5EF4-FFF2-40B4-BE49-F238E27FC236}">
+                  <a16:creationId xmlns:a16="http://schemas.microsoft.com/office/drawing/2014/main" id="{8D82ED24-A6D3-91CF-0BD8-127AA35FD8F1}"/>
+                </a:ext>
+              </a:extLst>
+            </p:cNvPr>
+            <p:cNvPicPr>
+              <a:picLocks noChangeAspect="1"/>
+            </p:cNvPicPr>
+            <p:nvPr/>
+          </p:nvPicPr>
+          <p:blipFill>
+            <a:blip r:embed="rId3">
+              <a:extLst>
+                <a:ext uri="{28A0092B-C50C-407E-A947-70E740481C1C}">
+                  <a14:useLocalDpi xmlns:a14="http://schemas.microsoft.com/office/drawing/2010/main" val="0"/>
+                </a:ext>
+              </a:extLst>
+            </a:blip>
+            <a:srcRect t="30833" r="67961" b="45208"/>
+            <a:stretch>
+              <a:fillRect/>
+            </a:stretch>
+          </p:blipFill>
+          <p:spPr>
+            <a:xfrm>
+              <a:off x="1892300" y="1559765"/>
+              <a:ext cx="1699133" cy="1643063"/>
+            </a:xfrm>
+            <a:prstGeom prst="rect">
+              <a:avLst/>
+            </a:prstGeom>
+          </p:spPr>
+        </p:pic>
+        <p:sp>
+          <p:nvSpPr>
+            <p:cNvPr id="8" name="텍스트 개체 틀 1">
+              <a:extLst>
+                <a:ext uri="{FF2B5EF4-FFF2-40B4-BE49-F238E27FC236}">
+                  <a16:creationId xmlns:a16="http://schemas.microsoft.com/office/drawing/2014/main" id="{25A9E452-9B49-B36C-D5B5-DBC8993CDDF6}"/>
+                </a:ext>
+              </a:extLst>
+            </p:cNvPr>
+            <p:cNvSpPr txBox="1">
+              <a:spLocks/>
+            </p:cNvSpPr>
+            <p:nvPr/>
+          </p:nvSpPr>
+          <p:spPr>
+            <a:xfrm>
+              <a:off x="1892300" y="1079500"/>
+              <a:ext cx="1600200" cy="2349500"/>
+            </a:xfrm>
+            <a:prstGeom prst="rect">
+              <a:avLst/>
+            </a:prstGeom>
+          </p:spPr>
+          <p:txBody>
+            <a:bodyPr vert="horz" lIns="91440" tIns="45720" rIns="91440" bIns="45720" rtlCol="0">
+              <a:normAutofit/>
+            </a:bodyPr>
+            <a:lstStyle>
+              <a:lvl1pPr marL="342900" indent="-342900" algn="l" defTabSz="914400" rtl="0" eaLnBrk="1" latinLnBrk="1" hangingPunct="1">
+                <a:lnSpc>
+                  <a:spcPct val="100000"/>
+                </a:lnSpc>
+                <a:spcBef>
+                  <a:spcPts val="1000"/>
+                </a:spcBef>
+                <a:buFont typeface="Arial" panose="020B0604020202020204" pitchFamily="34" charset="0"/>
+                <a:buChar char="•"/>
+                <a:defRPr sz="1800" kern="1200">
+                  <a:solidFill>
+                    <a:schemeClr val="tx1"/>
+                  </a:solidFill>
+                  <a:latin typeface="+mn-lt"/>
+                  <a:ea typeface="+mn-ea"/>
+                  <a:cs typeface="+mn-cs"/>
+                </a:defRPr>
+              </a:lvl1pPr>
+              <a:lvl2pPr marL="685800" indent="-228600" algn="l" defTabSz="914400" rtl="0" eaLnBrk="1" latinLnBrk="1" hangingPunct="1">
+                <a:lnSpc>
+                  <a:spcPct val="100000"/>
+                </a:lnSpc>
+                <a:spcBef>
+                  <a:spcPts val="500"/>
+                </a:spcBef>
+                <a:buFont typeface="Arial" panose="020B0604020202020204" pitchFamily="34" charset="0"/>
+                <a:buChar char="•"/>
+                <a:defRPr sz="1600" kern="1200">
+                  <a:solidFill>
+                    <a:schemeClr val="tx1"/>
+                  </a:solidFill>
+                  <a:latin typeface="+mn-lt"/>
+                  <a:ea typeface="+mn-ea"/>
+                  <a:cs typeface="+mn-cs"/>
+                </a:defRPr>
+              </a:lvl2pPr>
+              <a:lvl3pPr marL="1143000" indent="-228600" algn="l" defTabSz="914400" rtl="0" eaLnBrk="1" latinLnBrk="1" hangingPunct="1">
+                <a:lnSpc>
+                  <a:spcPct val="100000"/>
+                </a:lnSpc>
+                <a:spcBef>
+                  <a:spcPts val="500"/>
+                </a:spcBef>
+                <a:buFont typeface="Arial" panose="020B0604020202020204" pitchFamily="34" charset="0"/>
+                <a:buChar char="•"/>
+                <a:defRPr sz="1400" kern="1200">
+                  <a:solidFill>
+                    <a:schemeClr val="tx1"/>
+                  </a:solidFill>
+                  <a:latin typeface="+mn-lt"/>
+                  <a:ea typeface="+mn-ea"/>
+                  <a:cs typeface="+mn-cs"/>
+                </a:defRPr>
+              </a:lvl3pPr>
+              <a:lvl4pPr marL="1600200" indent="-228600" algn="l" defTabSz="914400" rtl="0" eaLnBrk="1" latinLnBrk="1" hangingPunct="1">
+                <a:lnSpc>
+                  <a:spcPct val="100000"/>
+                </a:lnSpc>
+                <a:spcBef>
+                  <a:spcPts val="500"/>
+                </a:spcBef>
+                <a:buFont typeface="Arial" panose="020B0604020202020204" pitchFamily="34" charset="0"/>
+                <a:buChar char="•"/>
+                <a:defRPr sz="1200" kern="1200">
+                  <a:solidFill>
+                    <a:schemeClr val="tx1"/>
+                  </a:solidFill>
+                  <a:latin typeface="+mn-lt"/>
+                  <a:ea typeface="+mn-ea"/>
+                  <a:cs typeface="+mn-cs"/>
+                </a:defRPr>
+              </a:lvl4pPr>
+              <a:lvl5pPr marL="2057400" indent="-228600" algn="l" defTabSz="914400" rtl="0" eaLnBrk="1" latinLnBrk="1" hangingPunct="1">
+                <a:lnSpc>
+                  <a:spcPct val="100000"/>
+                </a:lnSpc>
+                <a:spcBef>
+                  <a:spcPts val="500"/>
+                </a:spcBef>
+                <a:buFont typeface="Arial" panose="020B0604020202020204" pitchFamily="34" charset="0"/>
+                <a:buChar char="•"/>
+                <a:defRPr sz="1100" kern="1200">
+                  <a:solidFill>
+                    <a:schemeClr val="tx1"/>
+                  </a:solidFill>
+                  <a:latin typeface="+mn-lt"/>
+                  <a:ea typeface="+mn-ea"/>
+                  <a:cs typeface="+mn-cs"/>
+                </a:defRPr>
+              </a:lvl5pPr>
+              <a:lvl6pPr marL="2514600" indent="-228600" algn="l" defTabSz="914400" rtl="0" eaLnBrk="1" latinLnBrk="1" hangingPunct="1">
+                <a:lnSpc>
+                  <a:spcPct val="90000"/>
+                </a:lnSpc>
+                <a:spcBef>
+                  <a:spcPts val="500"/>
+                </a:spcBef>
+                <a:buFont typeface="Arial" panose="020B0604020202020204" pitchFamily="34" charset="0"/>
+                <a:buChar char="•"/>
+                <a:defRPr sz="1800" kern="1200">
+                  <a:solidFill>
+                    <a:schemeClr val="tx1"/>
+                  </a:solidFill>
+                  <a:latin typeface="+mn-lt"/>
+                  <a:ea typeface="+mn-ea"/>
+                  <a:cs typeface="+mn-cs"/>
+                </a:defRPr>
+              </a:lvl6pPr>
+              <a:lvl7pPr marL="2971800" indent="-228600" algn="l" defTabSz="914400" rtl="0" eaLnBrk="1" latinLnBrk="1" hangingPunct="1">
+                <a:lnSpc>
+                  <a:spcPct val="90000"/>
+                </a:lnSpc>
+                <a:spcBef>
+                  <a:spcPts val="500"/>
+                </a:spcBef>
+                <a:buFont typeface="Arial" panose="020B0604020202020204" pitchFamily="34" charset="0"/>
+                <a:buChar char="•"/>
+                <a:defRPr sz="1800" kern="1200">
+                  <a:solidFill>
+                    <a:schemeClr val="tx1"/>
+                  </a:solidFill>
+                  <a:latin typeface="+mn-lt"/>
+                  <a:ea typeface="+mn-ea"/>
+                  <a:cs typeface="+mn-cs"/>
+                </a:defRPr>
+              </a:lvl7pPr>
+              <a:lvl8pPr marL="3429000" indent="-228600" algn="l" defTabSz="914400" rtl="0" eaLnBrk="1" latinLnBrk="1" hangingPunct="1">
+                <a:lnSpc>
+                  <a:spcPct val="90000"/>
+                </a:lnSpc>
+                <a:spcBef>
+                  <a:spcPts val="500"/>
+                </a:spcBef>
+                <a:buFont typeface="Arial" panose="020B0604020202020204" pitchFamily="34" charset="0"/>
+                <a:buChar char="•"/>
+                <a:defRPr sz="1800" kern="1200">
+                  <a:solidFill>
+                    <a:schemeClr val="tx1"/>
+                  </a:solidFill>
+                  <a:latin typeface="+mn-lt"/>
+                  <a:ea typeface="+mn-ea"/>
+                  <a:cs typeface="+mn-cs"/>
+                </a:defRPr>
+              </a:lvl8pPr>
+              <a:lvl9pPr marL="3886200" indent="-228600" algn="l" defTabSz="914400" rtl="0" eaLnBrk="1" latinLnBrk="1" hangingPunct="1">
+                <a:lnSpc>
+                  <a:spcPct val="90000"/>
+                </a:lnSpc>
+                <a:spcBef>
+                  <a:spcPts val="500"/>
+                </a:spcBef>
+                <a:buFont typeface="Arial" panose="020B0604020202020204" pitchFamily="34" charset="0"/>
+                <a:buChar char="•"/>
+                <a:defRPr sz="1800" kern="1200">
+                  <a:solidFill>
+                    <a:schemeClr val="tx1"/>
+                  </a:solidFill>
+                  <a:latin typeface="+mn-lt"/>
+                  <a:ea typeface="+mn-ea"/>
+                  <a:cs typeface="+mn-cs"/>
+                </a:defRPr>
+              </a:lvl9pPr>
+            </a:lstStyle>
+            <a:p>
+              <a:pPr marL="0" indent="0" latinLnBrk="0">
+                <a:buNone/>
+              </a:pPr>
+              <a:r>
+                <a:rPr lang="en-US" altLang="ko-KR" sz="1400" b="1" dirty="0"/>
+                <a:t>Case1</a:t>
+              </a:r>
+              <a:br>
+                <a:rPr lang="en-US" altLang="ko-KR" sz="1400" b="1" dirty="0"/>
+              </a:br>
+              <a:r>
+                <a:rPr lang="ko-KR" altLang="en-US" sz="1400" dirty="0"/>
+                <a:t>유령 </a:t>
+              </a:r>
+              <a:r>
+                <a:rPr lang="ko-KR" altLang="en-US" sz="1400" dirty="0" err="1"/>
+                <a:t>스폰됨</a:t>
+              </a:r>
+              <a:endParaRPr lang="ko-KR" altLang="en-US" sz="1400" dirty="0"/>
+            </a:p>
+          </p:txBody>
+        </p:sp>
+        <p:pic>
+          <p:nvPicPr>
+            <p:cNvPr id="10" name="그림 9">
+              <a:extLst>
+                <a:ext uri="{FF2B5EF4-FFF2-40B4-BE49-F238E27FC236}">
+                  <a16:creationId xmlns:a16="http://schemas.microsoft.com/office/drawing/2014/main" id="{DBE16385-8B12-D718-1CDE-4E35AA420137}"/>
+                </a:ext>
+              </a:extLst>
+            </p:cNvPr>
+            <p:cNvPicPr>
+              <a:picLocks noChangeAspect="1"/>
+            </p:cNvPicPr>
+            <p:nvPr/>
+          </p:nvPicPr>
+          <p:blipFill>
+            <a:blip r:embed="rId3">
+              <a:extLst>
+                <a:ext uri="{28A0092B-C50C-407E-A947-70E740481C1C}">
+                  <a14:useLocalDpi xmlns:a14="http://schemas.microsoft.com/office/drawing/2010/main" val="0"/>
+                </a:ext>
+              </a:extLst>
+            </a:blip>
+            <a:srcRect t="55069" r="53353" b="9028"/>
+            <a:stretch>
+              <a:fillRect/>
+            </a:stretch>
+          </p:blipFill>
+          <p:spPr>
+            <a:xfrm>
+              <a:off x="3883533" y="1559765"/>
+              <a:ext cx="2473833" cy="2462212"/>
+            </a:xfrm>
+            <a:prstGeom prst="rect">
+              <a:avLst/>
+            </a:prstGeom>
+          </p:spPr>
+        </p:pic>
+        <p:sp>
+          <p:nvSpPr>
+            <p:cNvPr id="11" name="텍스트 개체 틀 1">
+              <a:extLst>
+                <a:ext uri="{FF2B5EF4-FFF2-40B4-BE49-F238E27FC236}">
+                  <a16:creationId xmlns:a16="http://schemas.microsoft.com/office/drawing/2014/main" id="{A87564E6-67D9-A51C-997C-CBE58A1E3823}"/>
+                </a:ext>
+              </a:extLst>
+            </p:cNvPr>
+            <p:cNvSpPr txBox="1">
+              <a:spLocks/>
+            </p:cNvSpPr>
+            <p:nvPr/>
+          </p:nvSpPr>
+          <p:spPr>
+            <a:xfrm>
+              <a:off x="3883533" y="1079500"/>
+              <a:ext cx="1600200" cy="2349500"/>
+            </a:xfrm>
+            <a:prstGeom prst="rect">
+              <a:avLst/>
+            </a:prstGeom>
+          </p:spPr>
+          <p:txBody>
+            <a:bodyPr vert="horz" lIns="91440" tIns="45720" rIns="91440" bIns="45720" rtlCol="0">
+              <a:normAutofit/>
+            </a:bodyPr>
+            <a:lstStyle>
+              <a:lvl1pPr marL="342900" indent="-342900" algn="l" defTabSz="914400" rtl="0" eaLnBrk="1" latinLnBrk="1" hangingPunct="1">
+                <a:lnSpc>
+                  <a:spcPct val="100000"/>
+                </a:lnSpc>
+                <a:spcBef>
+                  <a:spcPts val="1000"/>
+                </a:spcBef>
+                <a:buFont typeface="Arial" panose="020B0604020202020204" pitchFamily="34" charset="0"/>
+                <a:buChar char="•"/>
+                <a:defRPr sz="1800" kern="1200">
+                  <a:solidFill>
+                    <a:schemeClr val="tx1"/>
+                  </a:solidFill>
+                  <a:latin typeface="+mn-lt"/>
+                  <a:ea typeface="+mn-ea"/>
+                  <a:cs typeface="+mn-cs"/>
+                </a:defRPr>
+              </a:lvl1pPr>
+              <a:lvl2pPr marL="685800" indent="-228600" algn="l" defTabSz="914400" rtl="0" eaLnBrk="1" latinLnBrk="1" hangingPunct="1">
+                <a:lnSpc>
+                  <a:spcPct val="100000"/>
+                </a:lnSpc>
+                <a:spcBef>
+                  <a:spcPts val="500"/>
+                </a:spcBef>
+                <a:buFont typeface="Arial" panose="020B0604020202020204" pitchFamily="34" charset="0"/>
+                <a:buChar char="•"/>
+                <a:defRPr sz="1600" kern="1200">
+                  <a:solidFill>
+                    <a:schemeClr val="tx1"/>
+                  </a:solidFill>
+                  <a:latin typeface="+mn-lt"/>
+                  <a:ea typeface="+mn-ea"/>
+                  <a:cs typeface="+mn-cs"/>
+                </a:defRPr>
+              </a:lvl2pPr>
+              <a:lvl3pPr marL="1143000" indent="-228600" algn="l" defTabSz="914400" rtl="0" eaLnBrk="1" latinLnBrk="1" hangingPunct="1">
+                <a:lnSpc>
+                  <a:spcPct val="100000"/>
+                </a:lnSpc>
+                <a:spcBef>
+                  <a:spcPts val="500"/>
+                </a:spcBef>
+                <a:buFont typeface="Arial" panose="020B0604020202020204" pitchFamily="34" charset="0"/>
+                <a:buChar char="•"/>
+                <a:defRPr sz="1400" kern="1200">
+                  <a:solidFill>
+                    <a:schemeClr val="tx1"/>
+                  </a:solidFill>
+                  <a:latin typeface="+mn-lt"/>
+                  <a:ea typeface="+mn-ea"/>
+                  <a:cs typeface="+mn-cs"/>
+                </a:defRPr>
+              </a:lvl3pPr>
+              <a:lvl4pPr marL="1600200" indent="-228600" algn="l" defTabSz="914400" rtl="0" eaLnBrk="1" latinLnBrk="1" hangingPunct="1">
+                <a:lnSpc>
+                  <a:spcPct val="100000"/>
+                </a:lnSpc>
+                <a:spcBef>
+                  <a:spcPts val="500"/>
+                </a:spcBef>
+                <a:buFont typeface="Arial" panose="020B0604020202020204" pitchFamily="34" charset="0"/>
+                <a:buChar char="•"/>
+                <a:defRPr sz="1200" kern="1200">
+                  <a:solidFill>
+                    <a:schemeClr val="tx1"/>
+                  </a:solidFill>
+                  <a:latin typeface="+mn-lt"/>
+                  <a:ea typeface="+mn-ea"/>
+                  <a:cs typeface="+mn-cs"/>
+                </a:defRPr>
+              </a:lvl4pPr>
+              <a:lvl5pPr marL="2057400" indent="-228600" algn="l" defTabSz="914400" rtl="0" eaLnBrk="1" latinLnBrk="1" hangingPunct="1">
+                <a:lnSpc>
+                  <a:spcPct val="100000"/>
+                </a:lnSpc>
+                <a:spcBef>
+                  <a:spcPts val="500"/>
+                </a:spcBef>
+                <a:buFont typeface="Arial" panose="020B0604020202020204" pitchFamily="34" charset="0"/>
+                <a:buChar char="•"/>
+                <a:defRPr sz="1100" kern="1200">
+                  <a:solidFill>
+                    <a:schemeClr val="tx1"/>
+                  </a:solidFill>
+                  <a:latin typeface="+mn-lt"/>
+                  <a:ea typeface="+mn-ea"/>
+                  <a:cs typeface="+mn-cs"/>
+                </a:defRPr>
+              </a:lvl5pPr>
+              <a:lvl6pPr marL="2514600" indent="-228600" algn="l" defTabSz="914400" rtl="0" eaLnBrk="1" latinLnBrk="1" hangingPunct="1">
+                <a:lnSpc>
+                  <a:spcPct val="90000"/>
+                </a:lnSpc>
+                <a:spcBef>
+                  <a:spcPts val="500"/>
+                </a:spcBef>
+                <a:buFont typeface="Arial" panose="020B0604020202020204" pitchFamily="34" charset="0"/>
+                <a:buChar char="•"/>
+                <a:defRPr sz="1800" kern="1200">
+                  <a:solidFill>
+                    <a:schemeClr val="tx1"/>
+                  </a:solidFill>
+                  <a:latin typeface="+mn-lt"/>
+                  <a:ea typeface="+mn-ea"/>
+                  <a:cs typeface="+mn-cs"/>
+                </a:defRPr>
+              </a:lvl6pPr>
+              <a:lvl7pPr marL="2971800" indent="-228600" algn="l" defTabSz="914400" rtl="0" eaLnBrk="1" latinLnBrk="1" hangingPunct="1">
+                <a:lnSpc>
+                  <a:spcPct val="90000"/>
+                </a:lnSpc>
+                <a:spcBef>
+                  <a:spcPts val="500"/>
+                </a:spcBef>
+                <a:buFont typeface="Arial" panose="020B0604020202020204" pitchFamily="34" charset="0"/>
+                <a:buChar char="•"/>
+                <a:defRPr sz="1800" kern="1200">
+                  <a:solidFill>
+                    <a:schemeClr val="tx1"/>
+                  </a:solidFill>
+                  <a:latin typeface="+mn-lt"/>
+                  <a:ea typeface="+mn-ea"/>
+                  <a:cs typeface="+mn-cs"/>
+                </a:defRPr>
+              </a:lvl7pPr>
+              <a:lvl8pPr marL="3429000" indent="-228600" algn="l" defTabSz="914400" rtl="0" eaLnBrk="1" latinLnBrk="1" hangingPunct="1">
+                <a:lnSpc>
+                  <a:spcPct val="90000"/>
+                </a:lnSpc>
+                <a:spcBef>
+                  <a:spcPts val="500"/>
+                </a:spcBef>
+                <a:buFont typeface="Arial" panose="020B0604020202020204" pitchFamily="34" charset="0"/>
+                <a:buChar char="•"/>
+                <a:defRPr sz="1800" kern="1200">
+                  <a:solidFill>
+                    <a:schemeClr val="tx1"/>
+                  </a:solidFill>
+                  <a:latin typeface="+mn-lt"/>
+                  <a:ea typeface="+mn-ea"/>
+                  <a:cs typeface="+mn-cs"/>
+                </a:defRPr>
+              </a:lvl8pPr>
+              <a:lvl9pPr marL="3886200" indent="-228600" algn="l" defTabSz="914400" rtl="0" eaLnBrk="1" latinLnBrk="1" hangingPunct="1">
+                <a:lnSpc>
+                  <a:spcPct val="90000"/>
+                </a:lnSpc>
+                <a:spcBef>
+                  <a:spcPts val="500"/>
+                </a:spcBef>
+                <a:buFont typeface="Arial" panose="020B0604020202020204" pitchFamily="34" charset="0"/>
+                <a:buChar char="•"/>
+                <a:defRPr sz="1800" kern="1200">
+                  <a:solidFill>
+                    <a:schemeClr val="tx1"/>
+                  </a:solidFill>
+                  <a:latin typeface="+mn-lt"/>
+                  <a:ea typeface="+mn-ea"/>
+                  <a:cs typeface="+mn-cs"/>
+                </a:defRPr>
+              </a:lvl9pPr>
+            </a:lstStyle>
+            <a:p>
+              <a:pPr marL="0" indent="0" latinLnBrk="0">
+                <a:buNone/>
+              </a:pPr>
+              <a:r>
+                <a:rPr lang="en-US" altLang="ko-KR" sz="1400" b="1" dirty="0"/>
+                <a:t>Case2</a:t>
+              </a:r>
+              <a:br>
+                <a:rPr lang="en-US" altLang="ko-KR" sz="1400" b="1" dirty="0"/>
+              </a:br>
+              <a:r>
+                <a:rPr lang="ko-KR" altLang="en-US" sz="1400" dirty="0"/>
+                <a:t>유령 </a:t>
+              </a:r>
+              <a:r>
+                <a:rPr lang="ko-KR" altLang="en-US" sz="1400" dirty="0" err="1"/>
+                <a:t>스폰</a:t>
+              </a:r>
+              <a:r>
+                <a:rPr lang="ko-KR" altLang="en-US" sz="1400" dirty="0"/>
+                <a:t> 안됨</a:t>
+              </a:r>
+            </a:p>
+          </p:txBody>
+        </p:sp>
+        <p:pic>
+          <p:nvPicPr>
+            <p:cNvPr id="13" name="그림 12">
+              <a:extLst>
+                <a:ext uri="{FF2B5EF4-FFF2-40B4-BE49-F238E27FC236}">
+                  <a16:creationId xmlns:a16="http://schemas.microsoft.com/office/drawing/2014/main" id="{549013A6-1641-8983-A93C-1B54BC4CF3DF}"/>
+                </a:ext>
+              </a:extLst>
+            </p:cNvPr>
+            <p:cNvPicPr>
+              <a:picLocks noChangeAspect="1"/>
+            </p:cNvPicPr>
+            <p:nvPr/>
+          </p:nvPicPr>
+          <p:blipFill>
+            <a:blip r:embed="rId3">
+              <a:extLst>
+                <a:ext uri="{28A0092B-C50C-407E-A947-70E740481C1C}">
+                  <a14:useLocalDpi xmlns:a14="http://schemas.microsoft.com/office/drawing/2010/main" val="0"/>
+                </a:ext>
+              </a:extLst>
+            </a:blip>
+            <a:srcRect l="46767" t="57639" r="28627" b="8472"/>
+            <a:stretch>
+              <a:fillRect/>
+            </a:stretch>
+          </p:blipFill>
+          <p:spPr>
+            <a:xfrm>
+              <a:off x="6785227" y="1559765"/>
+              <a:ext cx="1304926" cy="2324101"/>
+            </a:xfrm>
+            <a:prstGeom prst="rect">
+              <a:avLst/>
+            </a:prstGeom>
+          </p:spPr>
+        </p:pic>
+        <p:sp>
+          <p:nvSpPr>
+            <p:cNvPr id="14" name="텍스트 개체 틀 1">
+              <a:extLst>
+                <a:ext uri="{FF2B5EF4-FFF2-40B4-BE49-F238E27FC236}">
+                  <a16:creationId xmlns:a16="http://schemas.microsoft.com/office/drawing/2014/main" id="{B66B0BD6-F74D-4C9E-E119-C05C34134D93}"/>
+                </a:ext>
+              </a:extLst>
+            </p:cNvPr>
+            <p:cNvSpPr txBox="1">
+              <a:spLocks/>
+            </p:cNvSpPr>
+            <p:nvPr/>
+          </p:nvSpPr>
+          <p:spPr>
+            <a:xfrm>
+              <a:off x="6785227" y="1079500"/>
+              <a:ext cx="1600200" cy="2349500"/>
+            </a:xfrm>
+            <a:prstGeom prst="rect">
+              <a:avLst/>
+            </a:prstGeom>
+          </p:spPr>
+          <p:txBody>
+            <a:bodyPr vert="horz" lIns="91440" tIns="45720" rIns="91440" bIns="45720" rtlCol="0">
+              <a:normAutofit/>
+            </a:bodyPr>
+            <a:lstStyle>
+              <a:lvl1pPr marL="342900" indent="-342900" algn="l" defTabSz="914400" rtl="0" eaLnBrk="1" latinLnBrk="1" hangingPunct="1">
+                <a:lnSpc>
+                  <a:spcPct val="100000"/>
+                </a:lnSpc>
+                <a:spcBef>
+                  <a:spcPts val="1000"/>
+                </a:spcBef>
+                <a:buFont typeface="Arial" panose="020B0604020202020204" pitchFamily="34" charset="0"/>
+                <a:buChar char="•"/>
+                <a:defRPr sz="1800" kern="1200">
+                  <a:solidFill>
+                    <a:schemeClr val="tx1"/>
+                  </a:solidFill>
+                  <a:latin typeface="+mn-lt"/>
+                  <a:ea typeface="+mn-ea"/>
+                  <a:cs typeface="+mn-cs"/>
+                </a:defRPr>
+              </a:lvl1pPr>
+              <a:lvl2pPr marL="685800" indent="-228600" algn="l" defTabSz="914400" rtl="0" eaLnBrk="1" latinLnBrk="1" hangingPunct="1">
+                <a:lnSpc>
+                  <a:spcPct val="100000"/>
+                </a:lnSpc>
+                <a:spcBef>
+                  <a:spcPts val="500"/>
+                </a:spcBef>
+                <a:buFont typeface="Arial" panose="020B0604020202020204" pitchFamily="34" charset="0"/>
+                <a:buChar char="•"/>
+                <a:defRPr sz="1600" kern="1200">
+                  <a:solidFill>
+                    <a:schemeClr val="tx1"/>
+                  </a:solidFill>
+                  <a:latin typeface="+mn-lt"/>
+                  <a:ea typeface="+mn-ea"/>
+                  <a:cs typeface="+mn-cs"/>
+                </a:defRPr>
+              </a:lvl2pPr>
+              <a:lvl3pPr marL="1143000" indent="-228600" algn="l" defTabSz="914400" rtl="0" eaLnBrk="1" latinLnBrk="1" hangingPunct="1">
+                <a:lnSpc>
+                  <a:spcPct val="100000"/>
+                </a:lnSpc>
+                <a:spcBef>
+                  <a:spcPts val="500"/>
+                </a:spcBef>
+                <a:buFont typeface="Arial" panose="020B0604020202020204" pitchFamily="34" charset="0"/>
+                <a:buChar char="•"/>
+                <a:defRPr sz="1400" kern="1200">
+                  <a:solidFill>
+                    <a:schemeClr val="tx1"/>
+                  </a:solidFill>
+                  <a:latin typeface="+mn-lt"/>
+                  <a:ea typeface="+mn-ea"/>
+                  <a:cs typeface="+mn-cs"/>
+                </a:defRPr>
+              </a:lvl3pPr>
+              <a:lvl4pPr marL="1600200" indent="-228600" algn="l" defTabSz="914400" rtl="0" eaLnBrk="1" latinLnBrk="1" hangingPunct="1">
+                <a:lnSpc>
+                  <a:spcPct val="100000"/>
+                </a:lnSpc>
+                <a:spcBef>
+                  <a:spcPts val="500"/>
+                </a:spcBef>
+                <a:buFont typeface="Arial" panose="020B0604020202020204" pitchFamily="34" charset="0"/>
+                <a:buChar char="•"/>
+                <a:defRPr sz="1200" kern="1200">
+                  <a:solidFill>
+                    <a:schemeClr val="tx1"/>
+                  </a:solidFill>
+                  <a:latin typeface="+mn-lt"/>
+                  <a:ea typeface="+mn-ea"/>
+                  <a:cs typeface="+mn-cs"/>
+                </a:defRPr>
+              </a:lvl4pPr>
+              <a:lvl5pPr marL="2057400" indent="-228600" algn="l" defTabSz="914400" rtl="0" eaLnBrk="1" latinLnBrk="1" hangingPunct="1">
+                <a:lnSpc>
+                  <a:spcPct val="100000"/>
+                </a:lnSpc>
+                <a:spcBef>
+                  <a:spcPts val="500"/>
+                </a:spcBef>
+                <a:buFont typeface="Arial" panose="020B0604020202020204" pitchFamily="34" charset="0"/>
+                <a:buChar char="•"/>
+                <a:defRPr sz="1100" kern="1200">
+                  <a:solidFill>
+                    <a:schemeClr val="tx1"/>
+                  </a:solidFill>
+                  <a:latin typeface="+mn-lt"/>
+                  <a:ea typeface="+mn-ea"/>
+                  <a:cs typeface="+mn-cs"/>
+                </a:defRPr>
+              </a:lvl5pPr>
+              <a:lvl6pPr marL="2514600" indent="-228600" algn="l" defTabSz="914400" rtl="0" eaLnBrk="1" latinLnBrk="1" hangingPunct="1">
+                <a:lnSpc>
+                  <a:spcPct val="90000"/>
+                </a:lnSpc>
+                <a:spcBef>
+                  <a:spcPts val="500"/>
+                </a:spcBef>
+                <a:buFont typeface="Arial" panose="020B0604020202020204" pitchFamily="34" charset="0"/>
+                <a:buChar char="•"/>
+                <a:defRPr sz="1800" kern="1200">
+                  <a:solidFill>
+                    <a:schemeClr val="tx1"/>
+                  </a:solidFill>
+                  <a:latin typeface="+mn-lt"/>
+                  <a:ea typeface="+mn-ea"/>
+                  <a:cs typeface="+mn-cs"/>
+                </a:defRPr>
+              </a:lvl6pPr>
+              <a:lvl7pPr marL="2971800" indent="-228600" algn="l" defTabSz="914400" rtl="0" eaLnBrk="1" latinLnBrk="1" hangingPunct="1">
+                <a:lnSpc>
+                  <a:spcPct val="90000"/>
+                </a:lnSpc>
+                <a:spcBef>
+                  <a:spcPts val="500"/>
+                </a:spcBef>
+                <a:buFont typeface="Arial" panose="020B0604020202020204" pitchFamily="34" charset="0"/>
+                <a:buChar char="•"/>
+                <a:defRPr sz="1800" kern="1200">
+                  <a:solidFill>
+                    <a:schemeClr val="tx1"/>
+                  </a:solidFill>
+                  <a:latin typeface="+mn-lt"/>
+                  <a:ea typeface="+mn-ea"/>
+                  <a:cs typeface="+mn-cs"/>
+                </a:defRPr>
+              </a:lvl7pPr>
+              <a:lvl8pPr marL="3429000" indent="-228600" algn="l" defTabSz="914400" rtl="0" eaLnBrk="1" latinLnBrk="1" hangingPunct="1">
+                <a:lnSpc>
+                  <a:spcPct val="90000"/>
+                </a:lnSpc>
+                <a:spcBef>
+                  <a:spcPts val="500"/>
+                </a:spcBef>
+                <a:buFont typeface="Arial" panose="020B0604020202020204" pitchFamily="34" charset="0"/>
+                <a:buChar char="•"/>
+                <a:defRPr sz="1800" kern="1200">
+                  <a:solidFill>
+                    <a:schemeClr val="tx1"/>
+                  </a:solidFill>
+                  <a:latin typeface="+mn-lt"/>
+                  <a:ea typeface="+mn-ea"/>
+                  <a:cs typeface="+mn-cs"/>
+                </a:defRPr>
+              </a:lvl8pPr>
+              <a:lvl9pPr marL="3886200" indent="-228600" algn="l" defTabSz="914400" rtl="0" eaLnBrk="1" latinLnBrk="1" hangingPunct="1">
+                <a:lnSpc>
+                  <a:spcPct val="90000"/>
+                </a:lnSpc>
+                <a:spcBef>
+                  <a:spcPts val="500"/>
+                </a:spcBef>
+                <a:buFont typeface="Arial" panose="020B0604020202020204" pitchFamily="34" charset="0"/>
+                <a:buChar char="•"/>
+                <a:defRPr sz="1800" kern="1200">
+                  <a:solidFill>
+                    <a:schemeClr val="tx1"/>
+                  </a:solidFill>
+                  <a:latin typeface="+mn-lt"/>
+                  <a:ea typeface="+mn-ea"/>
+                  <a:cs typeface="+mn-cs"/>
+                </a:defRPr>
+              </a:lvl9pPr>
+            </a:lstStyle>
+            <a:p>
+              <a:pPr marL="0" indent="0" latinLnBrk="0">
+                <a:buNone/>
+              </a:pPr>
+              <a:r>
+                <a:rPr lang="en-US" altLang="ko-KR" sz="1400" b="1" dirty="0"/>
+                <a:t>Case3</a:t>
+              </a:r>
+              <a:br>
+                <a:rPr lang="en-US" altLang="ko-KR" sz="1400" b="1" dirty="0"/>
+              </a:br>
+              <a:r>
+                <a:rPr lang="ko-KR" altLang="en-US" sz="1400" dirty="0"/>
+                <a:t>유령 </a:t>
+              </a:r>
+              <a:r>
+                <a:rPr lang="ko-KR" altLang="en-US" sz="1400" dirty="0" err="1"/>
+                <a:t>스폰</a:t>
+              </a:r>
+              <a:r>
+                <a:rPr lang="ko-KR" altLang="en-US" sz="1400" dirty="0"/>
+                <a:t> 안됨</a:t>
+              </a:r>
+            </a:p>
+          </p:txBody>
+        </p:sp>
+        <p:pic>
+          <p:nvPicPr>
+            <p:cNvPr id="16" name="그림 15">
+              <a:extLst>
+                <a:ext uri="{FF2B5EF4-FFF2-40B4-BE49-F238E27FC236}">
+                  <a16:creationId xmlns:a16="http://schemas.microsoft.com/office/drawing/2014/main" id="{C3F3F31C-83D3-1465-889B-F263AEC77203}"/>
+                </a:ext>
+              </a:extLst>
+            </p:cNvPr>
+            <p:cNvPicPr>
+              <a:picLocks noChangeAspect="1"/>
+            </p:cNvPicPr>
+            <p:nvPr/>
+          </p:nvPicPr>
+          <p:blipFill>
+            <a:blip r:embed="rId3">
+              <a:extLst>
+                <a:ext uri="{28A0092B-C50C-407E-A947-70E740481C1C}">
+                  <a14:useLocalDpi xmlns:a14="http://schemas.microsoft.com/office/drawing/2010/main" val="0"/>
+                </a:ext>
+              </a:extLst>
+            </a:blip>
+            <a:srcRect l="71643" t="57083" b="21250"/>
+            <a:stretch>
+              <a:fillRect/>
+            </a:stretch>
+          </p:blipFill>
+          <p:spPr>
+            <a:xfrm>
+              <a:off x="8696865" y="1559765"/>
+              <a:ext cx="1503870" cy="1485901"/>
+            </a:xfrm>
+            <a:prstGeom prst="rect">
+              <a:avLst/>
+            </a:prstGeom>
+          </p:spPr>
+        </p:pic>
+        <p:sp>
+          <p:nvSpPr>
+            <p:cNvPr id="17" name="텍스트 개체 틀 1">
+              <a:extLst>
+                <a:ext uri="{FF2B5EF4-FFF2-40B4-BE49-F238E27FC236}">
+                  <a16:creationId xmlns:a16="http://schemas.microsoft.com/office/drawing/2014/main" id="{45DA32FC-3F06-96F7-59F6-384500102DE3}"/>
+                </a:ext>
+              </a:extLst>
+            </p:cNvPr>
+            <p:cNvSpPr txBox="1">
+              <a:spLocks/>
+            </p:cNvSpPr>
+            <p:nvPr/>
+          </p:nvSpPr>
+          <p:spPr>
+            <a:xfrm>
+              <a:off x="8677527" y="1079500"/>
+              <a:ext cx="1600200" cy="2349500"/>
+            </a:xfrm>
+            <a:prstGeom prst="rect">
+              <a:avLst/>
+            </a:prstGeom>
+          </p:spPr>
+          <p:txBody>
+            <a:bodyPr vert="horz" lIns="91440" tIns="45720" rIns="91440" bIns="45720" rtlCol="0">
+              <a:normAutofit/>
+            </a:bodyPr>
+            <a:lstStyle>
+              <a:lvl1pPr marL="342900" indent="-342900" algn="l" defTabSz="914400" rtl="0" eaLnBrk="1" latinLnBrk="1" hangingPunct="1">
+                <a:lnSpc>
+                  <a:spcPct val="100000"/>
+                </a:lnSpc>
+                <a:spcBef>
+                  <a:spcPts val="1000"/>
+                </a:spcBef>
+                <a:buFont typeface="Arial" panose="020B0604020202020204" pitchFamily="34" charset="0"/>
+                <a:buChar char="•"/>
+                <a:defRPr sz="1800" kern="1200">
+                  <a:solidFill>
+                    <a:schemeClr val="tx1"/>
+                  </a:solidFill>
+                  <a:latin typeface="+mn-lt"/>
+                  <a:ea typeface="+mn-ea"/>
+                  <a:cs typeface="+mn-cs"/>
+                </a:defRPr>
+              </a:lvl1pPr>
+              <a:lvl2pPr marL="685800" indent="-228600" algn="l" defTabSz="914400" rtl="0" eaLnBrk="1" latinLnBrk="1" hangingPunct="1">
+                <a:lnSpc>
+                  <a:spcPct val="100000"/>
+                </a:lnSpc>
+                <a:spcBef>
+                  <a:spcPts val="500"/>
+                </a:spcBef>
+                <a:buFont typeface="Arial" panose="020B0604020202020204" pitchFamily="34" charset="0"/>
+                <a:buChar char="•"/>
+                <a:defRPr sz="1600" kern="1200">
+                  <a:solidFill>
+                    <a:schemeClr val="tx1"/>
+                  </a:solidFill>
+                  <a:latin typeface="+mn-lt"/>
+                  <a:ea typeface="+mn-ea"/>
+                  <a:cs typeface="+mn-cs"/>
+                </a:defRPr>
+              </a:lvl2pPr>
+              <a:lvl3pPr marL="1143000" indent="-228600" algn="l" defTabSz="914400" rtl="0" eaLnBrk="1" latinLnBrk="1" hangingPunct="1">
+                <a:lnSpc>
+                  <a:spcPct val="100000"/>
+                </a:lnSpc>
+                <a:spcBef>
+                  <a:spcPts val="500"/>
+                </a:spcBef>
+                <a:buFont typeface="Arial" panose="020B0604020202020204" pitchFamily="34" charset="0"/>
+                <a:buChar char="•"/>
+                <a:defRPr sz="1400" kern="1200">
+                  <a:solidFill>
+                    <a:schemeClr val="tx1"/>
+                  </a:solidFill>
+                  <a:latin typeface="+mn-lt"/>
+                  <a:ea typeface="+mn-ea"/>
+                  <a:cs typeface="+mn-cs"/>
+                </a:defRPr>
+              </a:lvl3pPr>
+              <a:lvl4pPr marL="1600200" indent="-228600" algn="l" defTabSz="914400" rtl="0" eaLnBrk="1" latinLnBrk="1" hangingPunct="1">
+                <a:lnSpc>
+                  <a:spcPct val="100000"/>
+                </a:lnSpc>
+                <a:spcBef>
+                  <a:spcPts val="500"/>
+                </a:spcBef>
+                <a:buFont typeface="Arial" panose="020B0604020202020204" pitchFamily="34" charset="0"/>
+                <a:buChar char="•"/>
+                <a:defRPr sz="1200" kern="1200">
+                  <a:solidFill>
+                    <a:schemeClr val="tx1"/>
+                  </a:solidFill>
+                  <a:latin typeface="+mn-lt"/>
+                  <a:ea typeface="+mn-ea"/>
+                  <a:cs typeface="+mn-cs"/>
+                </a:defRPr>
+              </a:lvl4pPr>
+              <a:lvl5pPr marL="2057400" indent="-228600" algn="l" defTabSz="914400" rtl="0" eaLnBrk="1" latinLnBrk="1" hangingPunct="1">
+                <a:lnSpc>
+                  <a:spcPct val="100000"/>
+                </a:lnSpc>
+                <a:spcBef>
+                  <a:spcPts val="500"/>
+                </a:spcBef>
+                <a:buFont typeface="Arial" panose="020B0604020202020204" pitchFamily="34" charset="0"/>
+                <a:buChar char="•"/>
+                <a:defRPr sz="1100" kern="1200">
+                  <a:solidFill>
+                    <a:schemeClr val="tx1"/>
+                  </a:solidFill>
+                  <a:latin typeface="+mn-lt"/>
+                  <a:ea typeface="+mn-ea"/>
+                  <a:cs typeface="+mn-cs"/>
+                </a:defRPr>
+              </a:lvl5pPr>
+              <a:lvl6pPr marL="2514600" indent="-228600" algn="l" defTabSz="914400" rtl="0" eaLnBrk="1" latinLnBrk="1" hangingPunct="1">
+                <a:lnSpc>
+                  <a:spcPct val="90000"/>
+                </a:lnSpc>
+                <a:spcBef>
+                  <a:spcPts val="500"/>
+                </a:spcBef>
+                <a:buFont typeface="Arial" panose="020B0604020202020204" pitchFamily="34" charset="0"/>
+                <a:buChar char="•"/>
+                <a:defRPr sz="1800" kern="1200">
+                  <a:solidFill>
+                    <a:schemeClr val="tx1"/>
+                  </a:solidFill>
+                  <a:latin typeface="+mn-lt"/>
+                  <a:ea typeface="+mn-ea"/>
+                  <a:cs typeface="+mn-cs"/>
+                </a:defRPr>
+              </a:lvl6pPr>
+              <a:lvl7pPr marL="2971800" indent="-228600" algn="l" defTabSz="914400" rtl="0" eaLnBrk="1" latinLnBrk="1" hangingPunct="1">
+                <a:lnSpc>
+                  <a:spcPct val="90000"/>
+                </a:lnSpc>
+                <a:spcBef>
+                  <a:spcPts val="500"/>
+                </a:spcBef>
+                <a:buFont typeface="Arial" panose="020B0604020202020204" pitchFamily="34" charset="0"/>
+                <a:buChar char="•"/>
+                <a:defRPr sz="1800" kern="1200">
+                  <a:solidFill>
+                    <a:schemeClr val="tx1"/>
+                  </a:solidFill>
+                  <a:latin typeface="+mn-lt"/>
+                  <a:ea typeface="+mn-ea"/>
+                  <a:cs typeface="+mn-cs"/>
+                </a:defRPr>
+              </a:lvl7pPr>
+              <a:lvl8pPr marL="3429000" indent="-228600" algn="l" defTabSz="914400" rtl="0" eaLnBrk="1" latinLnBrk="1" hangingPunct="1">
+                <a:lnSpc>
+                  <a:spcPct val="90000"/>
+                </a:lnSpc>
+                <a:spcBef>
+                  <a:spcPts val="500"/>
+                </a:spcBef>
+                <a:buFont typeface="Arial" panose="020B0604020202020204" pitchFamily="34" charset="0"/>
+                <a:buChar char="•"/>
+                <a:defRPr sz="1800" kern="1200">
+                  <a:solidFill>
+                    <a:schemeClr val="tx1"/>
+                  </a:solidFill>
+                  <a:latin typeface="+mn-lt"/>
+                  <a:ea typeface="+mn-ea"/>
+                  <a:cs typeface="+mn-cs"/>
+                </a:defRPr>
+              </a:lvl8pPr>
+              <a:lvl9pPr marL="3886200" indent="-228600" algn="l" defTabSz="914400" rtl="0" eaLnBrk="1" latinLnBrk="1" hangingPunct="1">
+                <a:lnSpc>
+                  <a:spcPct val="90000"/>
+                </a:lnSpc>
+                <a:spcBef>
+                  <a:spcPts val="500"/>
+                </a:spcBef>
+                <a:buFont typeface="Arial" panose="020B0604020202020204" pitchFamily="34" charset="0"/>
+                <a:buChar char="•"/>
+                <a:defRPr sz="1800" kern="1200">
+                  <a:solidFill>
+                    <a:schemeClr val="tx1"/>
+                  </a:solidFill>
+                  <a:latin typeface="+mn-lt"/>
+                  <a:ea typeface="+mn-ea"/>
+                  <a:cs typeface="+mn-cs"/>
+                </a:defRPr>
+              </a:lvl9pPr>
+            </a:lstStyle>
+            <a:p>
+              <a:pPr marL="0" indent="0" latinLnBrk="0">
+                <a:buNone/>
+              </a:pPr>
+              <a:r>
+                <a:rPr lang="en-US" altLang="ko-KR" sz="1400" b="1" dirty="0"/>
+                <a:t>Case4</a:t>
+              </a:r>
+              <a:br>
+                <a:rPr lang="en-US" altLang="ko-KR" sz="1400" b="1" dirty="0"/>
+              </a:br>
+              <a:r>
+                <a:rPr lang="ko-KR" altLang="en-US" sz="1400" dirty="0"/>
+                <a:t>유령 </a:t>
+              </a:r>
+              <a:r>
+                <a:rPr lang="ko-KR" altLang="en-US" sz="1400" dirty="0" err="1"/>
+                <a:t>스폰</a:t>
+              </a:r>
+              <a:r>
+                <a:rPr lang="ko-KR" altLang="en-US" sz="1400" dirty="0"/>
+                <a:t> 안됨</a:t>
+              </a:r>
+            </a:p>
+          </p:txBody>
+        </p:sp>
+      </p:grpSp>
+      <p:pic>
+        <p:nvPicPr>
+          <p:cNvPr id="22" name="그림 21">
+            <a:extLst>
+              <a:ext uri="{FF2B5EF4-FFF2-40B4-BE49-F238E27FC236}">
+                <a16:creationId xmlns:a16="http://schemas.microsoft.com/office/drawing/2014/main" id="{1888834E-4353-E8E4-7990-C9C008BE3C86}"/>
+              </a:ext>
+            </a:extLst>
+          </p:cNvPr>
+          <p:cNvPicPr>
+            <a:picLocks noChangeAspect="1"/>
+          </p:cNvPicPr>
+          <p:nvPr/>
+        </p:nvPicPr>
+        <p:blipFill>
+          <a:blip r:embed="rId3">
+            <a:extLst>
+              <a:ext uri="{28A0092B-C50C-407E-A947-70E740481C1C}">
+                <a14:useLocalDpi xmlns:a14="http://schemas.microsoft.com/office/drawing/2010/main" val="0"/>
+              </a:ext>
+            </a:extLst>
+          </a:blip>
+          <a:srcRect l="46050" t="29166" r="8420" b="48333"/>
+          <a:stretch>
+            <a:fillRect/>
+          </a:stretch>
+        </p:blipFill>
+        <p:spPr>
+          <a:xfrm>
+            <a:off x="5650630" y="1334126"/>
+            <a:ext cx="2592539" cy="1656769"/>
+          </a:xfrm>
+          <a:prstGeom prst="rect">
+            <a:avLst/>
+          </a:prstGeom>
+        </p:spPr>
+      </p:pic>
     </p:spTree>
     <p:extLst>
       <p:ext uri="{BB962C8B-B14F-4D97-AF65-F5344CB8AC3E}">

--- a/기획/몬스터 기획서_Ghost.pptx
+++ b/기획/몬스터 기획서_Ghost.pptx
@@ -232,7 +232,7 @@
           <a:p>
             <a:fld id="{90ADBB8C-8191-4AEC-B0E4-021A6DCC5E88}" type="datetimeFigureOut">
               <a:rPr lang="ko-KR" altLang="en-US" smtClean="0"/>
-              <a:t>2026-05-09</a:t>
+              <a:t>2026-05-10</a:t>
             </a:fld>
             <a:endParaRPr lang="ko-KR" altLang="en-US"/>
           </a:p>
@@ -409,7 +409,7 @@
           <a:p>
             <a:fld id="{9A139F74-74AF-4C37-AE84-1000E0D0E51D}" type="datetimeFigureOut">
               <a:rPr lang="ko-KR" altLang="en-US" smtClean="0"/>
-              <a:t>2026-05-09</a:t>
+              <a:t>2026-05-10</a:t>
             </a:fld>
             <a:endParaRPr lang="ko-KR" altLang="en-US"/>
           </a:p>
@@ -1061,7 +1061,7 @@
           <a:p>
             <a:fld id="{FBFF74CB-B97E-448A-8613-336F71D317F5}" type="datetime1">
               <a:rPr lang="ko-KR" altLang="en-US" smtClean="0"/>
-              <a:t>2026-05-09</a:t>
+              <a:t>2026-05-10</a:t>
             </a:fld>
             <a:endParaRPr lang="ko-KR" altLang="en-US"/>
           </a:p>
@@ -1352,7 +1352,7 @@
           <a:p>
             <a:fld id="{6D5A3F2E-880D-4AB2-BE87-1DABB4D9D36B}" type="datetime1">
               <a:rPr lang="ko-KR" altLang="en-US" smtClean="0"/>
-              <a:t>2026-05-09</a:t>
+              <a:t>2026-05-10</a:t>
             </a:fld>
             <a:endParaRPr lang="ko-KR" altLang="en-US"/>
           </a:p>
@@ -1550,7 +1550,7 @@
           <a:p>
             <a:fld id="{E225792B-2F2C-46B3-9536-A6BE584A3133}" type="datetime1">
               <a:rPr lang="ko-KR" altLang="en-US" smtClean="0"/>
-              <a:t>2026-05-09</a:t>
+              <a:t>2026-05-10</a:t>
             </a:fld>
             <a:endParaRPr lang="ko-KR" altLang="en-US"/>
           </a:p>
@@ -1758,7 +1758,7 @@
           <a:p>
             <a:fld id="{B959B1C4-1FB0-4ED1-88EC-81D9419D81DC}" type="datetime1">
               <a:rPr lang="ko-KR" altLang="en-US" smtClean="0"/>
-              <a:t>2026-05-09</a:t>
+              <a:t>2026-05-10</a:t>
             </a:fld>
             <a:endParaRPr lang="ko-KR" altLang="en-US"/>
           </a:p>
@@ -2029,7 +2029,7 @@
           <a:p>
             <a:fld id="{644DB65B-E6AE-4B39-8D08-8DC3DC9B3DE6}" type="datetime1">
               <a:rPr lang="ko-KR" altLang="en-US" smtClean="0"/>
-              <a:t>2026-05-09</a:t>
+              <a:t>2026-05-10</a:t>
             </a:fld>
             <a:endParaRPr lang="ko-KR" altLang="en-US"/>
           </a:p>
@@ -2300,7 +2300,7 @@
           <a:p>
             <a:fld id="{644DB65B-E6AE-4B39-8D08-8DC3DC9B3DE6}" type="datetime1">
               <a:rPr lang="ko-KR" altLang="en-US" smtClean="0"/>
-              <a:t>2026-05-09</a:t>
+              <a:t>2026-05-10</a:t>
             </a:fld>
             <a:endParaRPr lang="ko-KR" altLang="en-US"/>
           </a:p>
@@ -2612,7 +2612,7 @@
           <a:p>
             <a:fld id="{A80E6DAD-F59F-4DF2-B36E-B1403061A098}" type="datetime1">
               <a:rPr lang="ko-KR" altLang="en-US" smtClean="0"/>
-              <a:t>2026-05-09</a:t>
+              <a:t>2026-05-10</a:t>
             </a:fld>
             <a:endParaRPr lang="ko-KR" altLang="en-US"/>
           </a:p>
@@ -2877,7 +2877,7 @@
           <a:p>
             <a:fld id="{65E7A435-D09E-4012-8A5A-CB367CE86DE7}" type="datetime1">
               <a:rPr lang="ko-KR" altLang="en-US" smtClean="0"/>
-              <a:t>2026-05-09</a:t>
+              <a:t>2026-05-10</a:t>
             </a:fld>
             <a:endParaRPr lang="ko-KR" altLang="en-US"/>
           </a:p>
@@ -3289,7 +3289,7 @@
           <a:p>
             <a:fld id="{EAEE4FE5-8155-4A7B-B9F1-1277B556A678}" type="datetime1">
               <a:rPr lang="ko-KR" altLang="en-US" smtClean="0"/>
-              <a:t>2026-05-09</a:t>
+              <a:t>2026-05-10</a:t>
             </a:fld>
             <a:endParaRPr lang="ko-KR" altLang="en-US"/>
           </a:p>
@@ -3430,7 +3430,7 @@
           <a:p>
             <a:fld id="{A5DDFFB1-F462-49A1-A952-F86898531EFC}" type="datetime1">
               <a:rPr lang="ko-KR" altLang="en-US" smtClean="0"/>
-              <a:t>2026-05-09</a:t>
+              <a:t>2026-05-10</a:t>
             </a:fld>
             <a:endParaRPr lang="ko-KR" altLang="en-US"/>
           </a:p>
@@ -3543,7 +3543,7 @@
           <a:p>
             <a:fld id="{DF307744-A7EE-42A9-B4BD-A75049B592B9}" type="datetime1">
               <a:rPr lang="ko-KR" altLang="en-US" smtClean="0"/>
-              <a:t>2026-05-09</a:t>
+              <a:t>2026-05-10</a:t>
             </a:fld>
             <a:endParaRPr lang="ko-KR" altLang="en-US"/>
           </a:p>
@@ -3854,7 +3854,7 @@
           <a:p>
             <a:fld id="{DEB58597-5F16-46FB-9810-19206F29ADC7}" type="datetime1">
               <a:rPr lang="ko-KR" altLang="en-US" smtClean="0"/>
-              <a:t>2026-05-09</a:t>
+              <a:t>2026-05-10</a:t>
             </a:fld>
             <a:endParaRPr lang="ko-KR" altLang="en-US"/>
           </a:p>
@@ -4095,7 +4095,7 @@
           <a:p>
             <a:fld id="{F9163AAC-BAFF-4F5F-9CEA-0445F100C3E2}" type="datetime1">
               <a:rPr lang="ko-KR" altLang="en-US" smtClean="0"/>
-              <a:t>2026-05-09</a:t>
+              <a:t>2026-05-10</a:t>
             </a:fld>
             <a:endParaRPr lang="ko-KR" altLang="en-US"/>
           </a:p>
@@ -9784,6 +9784,26 @@
             <a:normAutofit/>
           </a:bodyPr>
           <a:lstStyle/>
+          <a:p>
+            <a:pPr latinLnBrk="0"/>
+            <a:r>
+              <a:rPr lang="ko-KR" altLang="en-US" sz="1600" dirty="0"/>
+              <a:t>유령은 </a:t>
+            </a:r>
+            <a:r>
+              <a:rPr lang="en-US" altLang="ko-KR" sz="1600" dirty="0"/>
+              <a:t>Chase</a:t>
+            </a:r>
+            <a:r>
+              <a:rPr lang="ko-KR" altLang="en-US" sz="1600" dirty="0"/>
+              <a:t>할 때 문 통과할 수 있음</a:t>
+            </a:r>
+            <a:endParaRPr lang="en-US" altLang="ko-KR" sz="1600" dirty="0"/>
+          </a:p>
+          <a:p>
+            <a:pPr latinLnBrk="0"/>
+            <a:endParaRPr lang="en-US" altLang="ko-KR" sz="1600" dirty="0"/>
+          </a:p>
           <a:p>
             <a:pPr latinLnBrk="0"/>
             <a:r>

--- a/기획/몬스터 기획서_Ghost.pptx
+++ b/기획/몬스터 기획서_Ghost.pptx
@@ -232,7 +232,7 @@
           <a:p>
             <a:fld id="{90ADBB8C-8191-4AEC-B0E4-021A6DCC5E88}" type="datetimeFigureOut">
               <a:rPr lang="ko-KR" altLang="en-US" smtClean="0"/>
-              <a:t>2026-05-10</a:t>
+              <a:t>2026-05-18</a:t>
             </a:fld>
             <a:endParaRPr lang="ko-KR" altLang="en-US"/>
           </a:p>
@@ -409,7 +409,7 @@
           <a:p>
             <a:fld id="{9A139F74-74AF-4C37-AE84-1000E0D0E51D}" type="datetimeFigureOut">
               <a:rPr lang="ko-KR" altLang="en-US" smtClean="0"/>
-              <a:t>2026-05-10</a:t>
+              <a:t>2026-05-18</a:t>
             </a:fld>
             <a:endParaRPr lang="ko-KR" altLang="en-US"/>
           </a:p>
@@ -1061,7 +1061,7 @@
           <a:p>
             <a:fld id="{FBFF74CB-B97E-448A-8613-336F71D317F5}" type="datetime1">
               <a:rPr lang="ko-KR" altLang="en-US" smtClean="0"/>
-              <a:t>2026-05-10</a:t>
+              <a:t>2026-05-18</a:t>
             </a:fld>
             <a:endParaRPr lang="ko-KR" altLang="en-US"/>
           </a:p>
@@ -1352,7 +1352,7 @@
           <a:p>
             <a:fld id="{6D5A3F2E-880D-4AB2-BE87-1DABB4D9D36B}" type="datetime1">
               <a:rPr lang="ko-KR" altLang="en-US" smtClean="0"/>
-              <a:t>2026-05-10</a:t>
+              <a:t>2026-05-18</a:t>
             </a:fld>
             <a:endParaRPr lang="ko-KR" altLang="en-US"/>
           </a:p>
@@ -1550,7 +1550,7 @@
           <a:p>
             <a:fld id="{E225792B-2F2C-46B3-9536-A6BE584A3133}" type="datetime1">
               <a:rPr lang="ko-KR" altLang="en-US" smtClean="0"/>
-              <a:t>2026-05-10</a:t>
+              <a:t>2026-05-18</a:t>
             </a:fld>
             <a:endParaRPr lang="ko-KR" altLang="en-US"/>
           </a:p>
@@ -1758,7 +1758,7 @@
           <a:p>
             <a:fld id="{B959B1C4-1FB0-4ED1-88EC-81D9419D81DC}" type="datetime1">
               <a:rPr lang="ko-KR" altLang="en-US" smtClean="0"/>
-              <a:t>2026-05-10</a:t>
+              <a:t>2026-05-18</a:t>
             </a:fld>
             <a:endParaRPr lang="ko-KR" altLang="en-US"/>
           </a:p>
@@ -2029,7 +2029,7 @@
           <a:p>
             <a:fld id="{644DB65B-E6AE-4B39-8D08-8DC3DC9B3DE6}" type="datetime1">
               <a:rPr lang="ko-KR" altLang="en-US" smtClean="0"/>
-              <a:t>2026-05-10</a:t>
+              <a:t>2026-05-18</a:t>
             </a:fld>
             <a:endParaRPr lang="ko-KR" altLang="en-US"/>
           </a:p>
@@ -2300,7 +2300,7 @@
           <a:p>
             <a:fld id="{644DB65B-E6AE-4B39-8D08-8DC3DC9B3DE6}" type="datetime1">
               <a:rPr lang="ko-KR" altLang="en-US" smtClean="0"/>
-              <a:t>2026-05-10</a:t>
+              <a:t>2026-05-18</a:t>
             </a:fld>
             <a:endParaRPr lang="ko-KR" altLang="en-US"/>
           </a:p>
@@ -2612,7 +2612,7 @@
           <a:p>
             <a:fld id="{A80E6DAD-F59F-4DF2-B36E-B1403061A098}" type="datetime1">
               <a:rPr lang="ko-KR" altLang="en-US" smtClean="0"/>
-              <a:t>2026-05-10</a:t>
+              <a:t>2026-05-18</a:t>
             </a:fld>
             <a:endParaRPr lang="ko-KR" altLang="en-US"/>
           </a:p>
@@ -2877,7 +2877,7 @@
           <a:p>
             <a:fld id="{65E7A435-D09E-4012-8A5A-CB367CE86DE7}" type="datetime1">
               <a:rPr lang="ko-KR" altLang="en-US" smtClean="0"/>
-              <a:t>2026-05-10</a:t>
+              <a:t>2026-05-18</a:t>
             </a:fld>
             <a:endParaRPr lang="ko-KR" altLang="en-US"/>
           </a:p>
@@ -3289,7 +3289,7 @@
           <a:p>
             <a:fld id="{EAEE4FE5-8155-4A7B-B9F1-1277B556A678}" type="datetime1">
               <a:rPr lang="ko-KR" altLang="en-US" smtClean="0"/>
-              <a:t>2026-05-10</a:t>
+              <a:t>2026-05-18</a:t>
             </a:fld>
             <a:endParaRPr lang="ko-KR" altLang="en-US"/>
           </a:p>
@@ -3430,7 +3430,7 @@
           <a:p>
             <a:fld id="{A5DDFFB1-F462-49A1-A952-F86898531EFC}" type="datetime1">
               <a:rPr lang="ko-KR" altLang="en-US" smtClean="0"/>
-              <a:t>2026-05-10</a:t>
+              <a:t>2026-05-18</a:t>
             </a:fld>
             <a:endParaRPr lang="ko-KR" altLang="en-US"/>
           </a:p>
@@ -3543,7 +3543,7 @@
           <a:p>
             <a:fld id="{DF307744-A7EE-42A9-B4BD-A75049B592B9}" type="datetime1">
               <a:rPr lang="ko-KR" altLang="en-US" smtClean="0"/>
-              <a:t>2026-05-10</a:t>
+              <a:t>2026-05-18</a:t>
             </a:fld>
             <a:endParaRPr lang="ko-KR" altLang="en-US"/>
           </a:p>
@@ -3854,7 +3854,7 @@
           <a:p>
             <a:fld id="{DEB58597-5F16-46FB-9810-19206F29ADC7}" type="datetime1">
               <a:rPr lang="ko-KR" altLang="en-US" smtClean="0"/>
-              <a:t>2026-05-10</a:t>
+              <a:t>2026-05-18</a:t>
             </a:fld>
             <a:endParaRPr lang="ko-KR" altLang="en-US"/>
           </a:p>
@@ -4095,7 +4095,7 @@
           <a:p>
             <a:fld id="{F9163AAC-BAFF-4F5F-9CEA-0445F100C3E2}" type="datetime1">
               <a:rPr lang="ko-KR" altLang="en-US" smtClean="0"/>
-              <a:t>2026-05-10</a:t>
+              <a:t>2026-05-18</a:t>
             </a:fld>
             <a:endParaRPr lang="ko-KR" altLang="en-US"/>
           </a:p>
@@ -4964,13 +4964,13 @@
           <p:nvPr>
             <p:extLst>
               <p:ext uri="{D42A27DB-BD31-4B8C-83A1-F6EECF244321}">
-                <p14:modId xmlns:p14="http://schemas.microsoft.com/office/powerpoint/2010/main" val="501449819"/>
+                <p14:modId xmlns:p14="http://schemas.microsoft.com/office/powerpoint/2010/main" val="1619509026"/>
               </p:ext>
             </p:extLst>
           </p:nvPr>
         </p:nvGraphicFramePr>
         <p:xfrm>
-          <a:off x="1892300" y="137130"/>
+          <a:off x="1892300" y="-51"/>
           <a:ext cx="5876424" cy="2829172"/>
         </p:xfrm>
         <a:graphic>
@@ -6295,14 +6295,14 @@
           <p:nvPr>
             <p:extLst>
               <p:ext uri="{D42A27DB-BD31-4B8C-83A1-F6EECF244321}">
-                <p14:modId xmlns:p14="http://schemas.microsoft.com/office/powerpoint/2010/main" val="340643566"/>
+                <p14:modId xmlns:p14="http://schemas.microsoft.com/office/powerpoint/2010/main" val="1135620094"/>
               </p:ext>
             </p:extLst>
           </p:nvPr>
         </p:nvGraphicFramePr>
         <p:xfrm>
-          <a:off x="1892300" y="3066556"/>
-          <a:ext cx="8359254" cy="3616184"/>
+          <a:off x="1892300" y="2899627"/>
+          <a:ext cx="8359254" cy="3919617"/>
         </p:xfrm>
         <a:graphic>
           <a:graphicData uri="http://schemas.openxmlformats.org/drawingml/2006/table">
@@ -7095,6 +7095,257 @@
                 <a:extLst>
                   <a:ext uri="{0D108BD9-81ED-4DB2-BD59-A6C34878D82A}">
                     <a16:rowId xmlns:a16="http://schemas.microsoft.com/office/drawing/2014/main" val="2549169645"/>
+                  </a:ext>
+                </a:extLst>
+              </a:tr>
+              <a:tr h="303433">
+                <a:tc>
+                  <a:txBody>
+                    <a:bodyPr/>
+                    <a:lstStyle/>
+                    <a:p>
+                      <a:pPr algn="l" latinLnBrk="0"/>
+                      <a:r>
+                        <a:rPr lang="ko-KR" altLang="en-US" sz="1100" b="1" dirty="0">
+                          <a:solidFill>
+                            <a:schemeClr val="tx1"/>
+                          </a:solidFill>
+                        </a:rPr>
+                        <a:t>파워 레벨</a:t>
+                      </a:r>
+                    </a:p>
+                  </a:txBody>
+                  <a:tcPr anchor="ctr">
+                    <a:lnL w="12700" cap="flat" cmpd="sng" algn="ctr">
+                      <a:solidFill>
+                        <a:schemeClr val="tx1"/>
+                      </a:solidFill>
+                      <a:prstDash val="solid"/>
+                      <a:round/>
+                      <a:headEnd type="none" w="med" len="med"/>
+                      <a:tailEnd type="none" w="med" len="med"/>
+                    </a:lnL>
+                    <a:lnR w="12700" cap="flat" cmpd="sng" algn="ctr">
+                      <a:solidFill>
+                        <a:schemeClr val="tx1"/>
+                      </a:solidFill>
+                      <a:prstDash val="solid"/>
+                      <a:round/>
+                      <a:headEnd type="none" w="med" len="med"/>
+                      <a:tailEnd type="none" w="med" len="med"/>
+                    </a:lnR>
+                    <a:lnT w="12700" cap="flat" cmpd="sng" algn="ctr">
+                      <a:solidFill>
+                        <a:schemeClr val="tx1"/>
+                      </a:solidFill>
+                      <a:prstDash val="solid"/>
+                      <a:round/>
+                      <a:headEnd type="none" w="med" len="med"/>
+                      <a:tailEnd type="none" w="med" len="med"/>
+                    </a:lnT>
+                    <a:lnB w="12700" cap="flat" cmpd="sng" algn="ctr">
+                      <a:solidFill>
+                        <a:schemeClr val="tx1"/>
+                      </a:solidFill>
+                      <a:prstDash val="solid"/>
+                      <a:round/>
+                      <a:headEnd type="none" w="med" len="med"/>
+                      <a:tailEnd type="none" w="med" len="med"/>
+                    </a:lnB>
+                    <a:solidFill>
+                      <a:schemeClr val="bg1">
+                        <a:lumMod val="85000"/>
+                      </a:schemeClr>
+                    </a:solidFill>
+                  </a:tcPr>
+                </a:tc>
+                <a:tc>
+                  <a:txBody>
+                    <a:bodyPr/>
+                    <a:lstStyle/>
+                    <a:p>
+                      <a:pPr algn="ctr" latinLnBrk="0"/>
+                      <a:r>
+                        <a:rPr lang="en-US" altLang="ko-KR" sz="1100" b="0" dirty="0">
+                          <a:solidFill>
+                            <a:schemeClr val="tx1"/>
+                          </a:solidFill>
+                        </a:rPr>
+                        <a:t>int</a:t>
+                      </a:r>
+                      <a:endParaRPr lang="ko-KR" altLang="en-US" sz="1100" b="0" dirty="0">
+                        <a:solidFill>
+                          <a:schemeClr val="tx1"/>
+                        </a:solidFill>
+                      </a:endParaRPr>
+                    </a:p>
+                  </a:txBody>
+                  <a:tcPr anchor="ctr">
+                    <a:lnL w="12700" cap="flat" cmpd="sng" algn="ctr">
+                      <a:solidFill>
+                        <a:schemeClr val="tx1"/>
+                      </a:solidFill>
+                      <a:prstDash val="solid"/>
+                      <a:round/>
+                      <a:headEnd type="none" w="med" len="med"/>
+                      <a:tailEnd type="none" w="med" len="med"/>
+                    </a:lnL>
+                    <a:lnR w="12700" cap="flat" cmpd="sng" algn="ctr">
+                      <a:solidFill>
+                        <a:schemeClr val="tx1"/>
+                      </a:solidFill>
+                      <a:prstDash val="solid"/>
+                      <a:round/>
+                      <a:headEnd type="none" w="med" len="med"/>
+                      <a:tailEnd type="none" w="med" len="med"/>
+                    </a:lnR>
+                    <a:lnT w="12700" cap="flat" cmpd="sng" algn="ctr">
+                      <a:solidFill>
+                        <a:schemeClr val="tx1"/>
+                      </a:solidFill>
+                      <a:prstDash val="solid"/>
+                      <a:round/>
+                      <a:headEnd type="none" w="med" len="med"/>
+                      <a:tailEnd type="none" w="med" len="med"/>
+                    </a:lnT>
+                    <a:lnB w="12700" cap="flat" cmpd="sng" algn="ctr">
+                      <a:solidFill>
+                        <a:schemeClr val="tx1"/>
+                      </a:solidFill>
+                      <a:prstDash val="solid"/>
+                      <a:round/>
+                      <a:headEnd type="none" w="med" len="med"/>
+                      <a:tailEnd type="none" w="med" len="med"/>
+                    </a:lnB>
+                    <a:solidFill>
+                      <a:schemeClr val="bg1"/>
+                    </a:solidFill>
+                  </a:tcPr>
+                </a:tc>
+                <a:tc>
+                  <a:txBody>
+                    <a:bodyPr/>
+                    <a:lstStyle/>
+                    <a:p>
+                      <a:pPr algn="ctr" latinLnBrk="0"/>
+                      <a:r>
+                        <a:rPr lang="en-US" altLang="ko-KR" sz="1100" b="0" dirty="0">
+                          <a:solidFill>
+                            <a:schemeClr val="tx1"/>
+                          </a:solidFill>
+                        </a:rPr>
+                        <a:t>8</a:t>
+                      </a:r>
+                      <a:endParaRPr lang="ko-KR" altLang="en-US" sz="1100" b="0" dirty="0">
+                        <a:solidFill>
+                          <a:schemeClr val="tx1"/>
+                        </a:solidFill>
+                      </a:endParaRPr>
+                    </a:p>
+                  </a:txBody>
+                  <a:tcPr anchor="ctr">
+                    <a:lnL w="12700" cap="flat" cmpd="sng" algn="ctr">
+                      <a:solidFill>
+                        <a:schemeClr val="tx1"/>
+                      </a:solidFill>
+                      <a:prstDash val="solid"/>
+                      <a:round/>
+                      <a:headEnd type="none" w="med" len="med"/>
+                      <a:tailEnd type="none" w="med" len="med"/>
+                    </a:lnL>
+                    <a:lnR w="12700" cap="flat" cmpd="sng" algn="ctr">
+                      <a:solidFill>
+                        <a:schemeClr val="tx1"/>
+                      </a:solidFill>
+                      <a:prstDash val="solid"/>
+                      <a:round/>
+                      <a:headEnd type="none" w="med" len="med"/>
+                      <a:tailEnd type="none" w="med" len="med"/>
+                    </a:lnR>
+                    <a:lnT w="12700" cap="flat" cmpd="sng" algn="ctr">
+                      <a:solidFill>
+                        <a:schemeClr val="tx1"/>
+                      </a:solidFill>
+                      <a:prstDash val="solid"/>
+                      <a:round/>
+                      <a:headEnd type="none" w="med" len="med"/>
+                      <a:tailEnd type="none" w="med" len="med"/>
+                    </a:lnT>
+                    <a:lnB w="12700" cap="flat" cmpd="sng" algn="ctr">
+                      <a:solidFill>
+                        <a:schemeClr val="tx1"/>
+                      </a:solidFill>
+                      <a:prstDash val="solid"/>
+                      <a:round/>
+                      <a:headEnd type="none" w="med" len="med"/>
+                      <a:tailEnd type="none" w="med" len="med"/>
+                    </a:lnB>
+                    <a:solidFill>
+                      <a:schemeClr val="bg1"/>
+                    </a:solidFill>
+                  </a:tcPr>
+                </a:tc>
+                <a:tc>
+                  <a:txBody>
+                    <a:bodyPr/>
+                    <a:lstStyle/>
+                    <a:p>
+                      <a:pPr marL="171450" indent="-171450" algn="l" latinLnBrk="0">
+                        <a:buFont typeface="Arial" panose="020B0604020202020204" pitchFamily="34" charset="0"/>
+                        <a:buChar char="•"/>
+                      </a:pPr>
+                      <a:endParaRPr lang="ko-KR" altLang="en-US" sz="1000" b="0" dirty="0">
+                        <a:solidFill>
+                          <a:schemeClr val="tx1"/>
+                        </a:solidFill>
+                      </a:endParaRPr>
+                    </a:p>
+                  </a:txBody>
+                  <a:tcPr anchor="ctr">
+                    <a:lnL w="12700" cap="flat" cmpd="sng" algn="ctr">
+                      <a:solidFill>
+                        <a:schemeClr val="tx1"/>
+                      </a:solidFill>
+                      <a:prstDash val="solid"/>
+                      <a:round/>
+                      <a:headEnd type="none" w="med" len="med"/>
+                      <a:tailEnd type="none" w="med" len="med"/>
+                    </a:lnL>
+                    <a:lnR w="12700" cap="flat" cmpd="sng" algn="ctr">
+                      <a:solidFill>
+                        <a:schemeClr val="tx1"/>
+                      </a:solidFill>
+                      <a:prstDash val="solid"/>
+                      <a:round/>
+                      <a:headEnd type="none" w="med" len="med"/>
+                      <a:tailEnd type="none" w="med" len="med"/>
+                    </a:lnR>
+                    <a:lnT w="12700" cap="flat" cmpd="sng" algn="ctr">
+                      <a:solidFill>
+                        <a:schemeClr val="tx1"/>
+                      </a:solidFill>
+                      <a:prstDash val="solid"/>
+                      <a:round/>
+                      <a:headEnd type="none" w="med" len="med"/>
+                      <a:tailEnd type="none" w="med" len="med"/>
+                    </a:lnT>
+                    <a:lnB w="12700" cap="flat" cmpd="sng" algn="ctr">
+                      <a:solidFill>
+                        <a:schemeClr val="tx1"/>
+                      </a:solidFill>
+                      <a:prstDash val="solid"/>
+                      <a:round/>
+                      <a:headEnd type="none" w="med" len="med"/>
+                      <a:tailEnd type="none" w="med" len="med"/>
+                    </a:lnB>
+                    <a:solidFill>
+                      <a:schemeClr val="bg1"/>
+                    </a:solidFill>
+                  </a:tcPr>
+                </a:tc>
+                <a:extLst>
+                  <a:ext uri="{0D108BD9-81ED-4DB2-BD59-A6C34878D82A}">
+                    <a16:rowId xmlns:a16="http://schemas.microsoft.com/office/drawing/2014/main" val="934974834"/>
                   </a:ext>
                 </a:extLst>
               </a:tr>

--- a/기획/몬스터 기획서_Ghost.pptx
+++ b/기획/몬스터 기획서_Ghost.pptx
@@ -5,19 +5,20 @@
     <p:sldMasterId id="2147483648" r:id="rId1"/>
   </p:sldMasterIdLst>
   <p:notesMasterIdLst>
-    <p:notesMasterId r:id="rId9"/>
+    <p:notesMasterId r:id="rId10"/>
   </p:notesMasterIdLst>
   <p:handoutMasterIdLst>
-    <p:handoutMasterId r:id="rId10"/>
+    <p:handoutMasterId r:id="rId11"/>
   </p:handoutMasterIdLst>
   <p:sldIdLst>
     <p:sldId id="256" r:id="rId2"/>
-    <p:sldId id="288" r:id="rId3"/>
-    <p:sldId id="276" r:id="rId4"/>
-    <p:sldId id="283" r:id="rId5"/>
-    <p:sldId id="289" r:id="rId6"/>
-    <p:sldId id="286" r:id="rId7"/>
-    <p:sldId id="287" r:id="rId8"/>
+    <p:sldId id="290" r:id="rId3"/>
+    <p:sldId id="288" r:id="rId4"/>
+    <p:sldId id="276" r:id="rId5"/>
+    <p:sldId id="283" r:id="rId6"/>
+    <p:sldId id="289" r:id="rId7"/>
+    <p:sldId id="286" r:id="rId8"/>
+    <p:sldId id="287" r:id="rId9"/>
   </p:sldIdLst>
   <p:sldSz cx="12192000" cy="6858000"/>
   <p:notesSz cx="6858000" cy="9144000"/>
@@ -232,7 +233,7 @@
           <a:p>
             <a:fld id="{90ADBB8C-8191-4AEC-B0E4-021A6DCC5E88}" type="datetimeFigureOut">
               <a:rPr lang="ko-KR" altLang="en-US" smtClean="0"/>
-              <a:t>2026-05-18</a:t>
+              <a:t>2026-05-26</a:t>
             </a:fld>
             <a:endParaRPr lang="ko-KR" altLang="en-US"/>
           </a:p>
@@ -409,7 +410,7 @@
           <a:p>
             <a:fld id="{9A139F74-74AF-4C37-AE84-1000E0D0E51D}" type="datetimeFigureOut">
               <a:rPr lang="ko-KR" altLang="en-US" smtClean="0"/>
-              <a:t>2026-05-18</a:t>
+              <a:t>2026-05-26</a:t>
             </a:fld>
             <a:endParaRPr lang="ko-KR" altLang="en-US"/>
           </a:p>
@@ -776,7 +777,7 @@
           <a:p>
             <a:fld id="{76F76A66-B71B-41D7-B3D7-EDD47844D175}" type="slidenum">
               <a:rPr lang="ko-KR" altLang="en-US" smtClean="0"/>
-              <a:t>6</a:t>
+              <a:t>7</a:t>
             </a:fld>
             <a:endParaRPr lang="ko-KR" altLang="en-US"/>
           </a:p>
@@ -895,7 +896,7 @@
           <a:p>
             <a:fld id="{76F76A66-B71B-41D7-B3D7-EDD47844D175}" type="slidenum">
               <a:rPr lang="ko-KR" altLang="en-US" smtClean="0"/>
-              <a:t>7</a:t>
+              <a:t>8</a:t>
             </a:fld>
             <a:endParaRPr lang="ko-KR" altLang="en-US"/>
           </a:p>
@@ -1061,7 +1062,7 @@
           <a:p>
             <a:fld id="{FBFF74CB-B97E-448A-8613-336F71D317F5}" type="datetime1">
               <a:rPr lang="ko-KR" altLang="en-US" smtClean="0"/>
-              <a:t>2026-05-18</a:t>
+              <a:t>2026-05-26</a:t>
             </a:fld>
             <a:endParaRPr lang="ko-KR" altLang="en-US"/>
           </a:p>
@@ -1352,7 +1353,7 @@
           <a:p>
             <a:fld id="{6D5A3F2E-880D-4AB2-BE87-1DABB4D9D36B}" type="datetime1">
               <a:rPr lang="ko-KR" altLang="en-US" smtClean="0"/>
-              <a:t>2026-05-18</a:t>
+              <a:t>2026-05-26</a:t>
             </a:fld>
             <a:endParaRPr lang="ko-KR" altLang="en-US"/>
           </a:p>
@@ -1550,7 +1551,7 @@
           <a:p>
             <a:fld id="{E225792B-2F2C-46B3-9536-A6BE584A3133}" type="datetime1">
               <a:rPr lang="ko-KR" altLang="en-US" smtClean="0"/>
-              <a:t>2026-05-18</a:t>
+              <a:t>2026-05-26</a:t>
             </a:fld>
             <a:endParaRPr lang="ko-KR" altLang="en-US"/>
           </a:p>
@@ -1758,7 +1759,7 @@
           <a:p>
             <a:fld id="{B959B1C4-1FB0-4ED1-88EC-81D9419D81DC}" type="datetime1">
               <a:rPr lang="ko-KR" altLang="en-US" smtClean="0"/>
-              <a:t>2026-05-18</a:t>
+              <a:t>2026-05-26</a:t>
             </a:fld>
             <a:endParaRPr lang="ko-KR" altLang="en-US"/>
           </a:p>
@@ -2029,7 +2030,7 @@
           <a:p>
             <a:fld id="{644DB65B-E6AE-4B39-8D08-8DC3DC9B3DE6}" type="datetime1">
               <a:rPr lang="ko-KR" altLang="en-US" smtClean="0"/>
-              <a:t>2026-05-18</a:t>
+              <a:t>2026-05-26</a:t>
             </a:fld>
             <a:endParaRPr lang="ko-KR" altLang="en-US"/>
           </a:p>
@@ -2300,7 +2301,7 @@
           <a:p>
             <a:fld id="{644DB65B-E6AE-4B39-8D08-8DC3DC9B3DE6}" type="datetime1">
               <a:rPr lang="ko-KR" altLang="en-US" smtClean="0"/>
-              <a:t>2026-05-18</a:t>
+              <a:t>2026-05-26</a:t>
             </a:fld>
             <a:endParaRPr lang="ko-KR" altLang="en-US"/>
           </a:p>
@@ -2612,7 +2613,7 @@
           <a:p>
             <a:fld id="{A80E6DAD-F59F-4DF2-B36E-B1403061A098}" type="datetime1">
               <a:rPr lang="ko-KR" altLang="en-US" smtClean="0"/>
-              <a:t>2026-05-18</a:t>
+              <a:t>2026-05-26</a:t>
             </a:fld>
             <a:endParaRPr lang="ko-KR" altLang="en-US"/>
           </a:p>
@@ -2877,7 +2878,7 @@
           <a:p>
             <a:fld id="{65E7A435-D09E-4012-8A5A-CB367CE86DE7}" type="datetime1">
               <a:rPr lang="ko-KR" altLang="en-US" smtClean="0"/>
-              <a:t>2026-05-18</a:t>
+              <a:t>2026-05-26</a:t>
             </a:fld>
             <a:endParaRPr lang="ko-KR" altLang="en-US"/>
           </a:p>
@@ -3289,7 +3290,7 @@
           <a:p>
             <a:fld id="{EAEE4FE5-8155-4A7B-B9F1-1277B556A678}" type="datetime1">
               <a:rPr lang="ko-KR" altLang="en-US" smtClean="0"/>
-              <a:t>2026-05-18</a:t>
+              <a:t>2026-05-26</a:t>
             </a:fld>
             <a:endParaRPr lang="ko-KR" altLang="en-US"/>
           </a:p>
@@ -3430,7 +3431,7 @@
           <a:p>
             <a:fld id="{A5DDFFB1-F462-49A1-A952-F86898531EFC}" type="datetime1">
               <a:rPr lang="ko-KR" altLang="en-US" smtClean="0"/>
-              <a:t>2026-05-18</a:t>
+              <a:t>2026-05-26</a:t>
             </a:fld>
             <a:endParaRPr lang="ko-KR" altLang="en-US"/>
           </a:p>
@@ -3543,7 +3544,7 @@
           <a:p>
             <a:fld id="{DF307744-A7EE-42A9-B4BD-A75049B592B9}" type="datetime1">
               <a:rPr lang="ko-KR" altLang="en-US" smtClean="0"/>
-              <a:t>2026-05-18</a:t>
+              <a:t>2026-05-26</a:t>
             </a:fld>
             <a:endParaRPr lang="ko-KR" altLang="en-US"/>
           </a:p>
@@ -3854,7 +3855,7 @@
           <a:p>
             <a:fld id="{DEB58597-5F16-46FB-9810-19206F29ADC7}" type="datetime1">
               <a:rPr lang="ko-KR" altLang="en-US" smtClean="0"/>
-              <a:t>2026-05-18</a:t>
+              <a:t>2026-05-26</a:t>
             </a:fld>
             <a:endParaRPr lang="ko-KR" altLang="en-US"/>
           </a:p>
@@ -4095,7 +4096,7 @@
           <a:p>
             <a:fld id="{F9163AAC-BAFF-4F5F-9CEA-0445F100C3E2}" type="datetime1">
               <a:rPr lang="ko-KR" altLang="en-US" smtClean="0"/>
-              <a:t>2026-05-18</a:t>
+              <a:t>2026-05-26</a:t>
             </a:fld>
             <a:endParaRPr lang="ko-KR" altLang="en-US"/>
           </a:p>
@@ -4663,6 +4664,233 @@
           <p:cNvPr id="2" name="텍스트 개체 틀 1">
             <a:extLst>
               <a:ext uri="{FF2B5EF4-FFF2-40B4-BE49-F238E27FC236}">
+                <a16:creationId xmlns:a16="http://schemas.microsoft.com/office/drawing/2014/main" id="{C9A0CE61-FF2A-D923-1144-77488DC6CDEF}"/>
+              </a:ext>
+            </a:extLst>
+          </p:cNvPr>
+          <p:cNvSpPr>
+            <a:spLocks noGrp="1"/>
+          </p:cNvSpPr>
+          <p:nvPr>
+            <p:ph type="body" sz="quarter" idx="13"/>
+          </p:nvPr>
+        </p:nvSpPr>
+        <p:spPr/>
+        <p:txBody>
+          <a:bodyPr/>
+          <a:lstStyle/>
+          <a:p>
+            <a:endParaRPr lang="ko-KR" altLang="en-US"/>
+          </a:p>
+        </p:txBody>
+      </p:sp>
+      <p:sp>
+        <p:nvSpPr>
+          <p:cNvPr id="3" name="제목 2">
+            <a:extLst>
+              <a:ext uri="{FF2B5EF4-FFF2-40B4-BE49-F238E27FC236}">
+                <a16:creationId xmlns:a16="http://schemas.microsoft.com/office/drawing/2014/main" id="{0AC1B3E0-AEA6-FB11-B255-2B9524CF9172}"/>
+              </a:ext>
+            </a:extLst>
+          </p:cNvPr>
+          <p:cNvSpPr>
+            <a:spLocks noGrp="1"/>
+          </p:cNvSpPr>
+          <p:nvPr>
+            <p:ph type="title"/>
+          </p:nvPr>
+        </p:nvSpPr>
+        <p:spPr>
+          <a:xfrm>
+            <a:off x="0" y="119158"/>
+            <a:ext cx="1600200" cy="978729"/>
+          </a:xfrm>
+        </p:spPr>
+        <p:txBody>
+          <a:bodyPr/>
+          <a:lstStyle/>
+          <a:p>
+            <a:r>
+              <a:rPr lang="ko-KR" altLang="en-US" dirty="0"/>
+              <a:t>몬스터 사이즈</a:t>
+            </a:r>
+          </a:p>
+        </p:txBody>
+      </p:sp>
+      <p:sp>
+        <p:nvSpPr>
+          <p:cNvPr id="4" name="내용 개체 틀 3">
+            <a:extLst>
+              <a:ext uri="{FF2B5EF4-FFF2-40B4-BE49-F238E27FC236}">
+                <a16:creationId xmlns:a16="http://schemas.microsoft.com/office/drawing/2014/main" id="{E7812DB0-BA26-A038-D3D2-D607D035864A}"/>
+              </a:ext>
+            </a:extLst>
+          </p:cNvPr>
+          <p:cNvSpPr>
+            <a:spLocks noGrp="1"/>
+          </p:cNvSpPr>
+          <p:nvPr>
+            <p:ph idx="1"/>
+          </p:nvPr>
+        </p:nvSpPr>
+        <p:spPr/>
+        <p:txBody>
+          <a:bodyPr/>
+          <a:lstStyle/>
+          <a:p>
+            <a:endParaRPr lang="ko-KR" altLang="en-US" dirty="0"/>
+          </a:p>
+        </p:txBody>
+      </p:sp>
+      <p:sp>
+        <p:nvSpPr>
+          <p:cNvPr id="5" name="슬라이드 번호 개체 틀 4">
+            <a:extLst>
+              <a:ext uri="{FF2B5EF4-FFF2-40B4-BE49-F238E27FC236}">
+                <a16:creationId xmlns:a16="http://schemas.microsoft.com/office/drawing/2014/main" id="{941E3C93-D63E-EBA3-34FB-21A5E8865910}"/>
+              </a:ext>
+            </a:extLst>
+          </p:cNvPr>
+          <p:cNvSpPr>
+            <a:spLocks noGrp="1"/>
+          </p:cNvSpPr>
+          <p:nvPr>
+            <p:ph type="sldNum" sz="quarter" idx="12"/>
+          </p:nvPr>
+        </p:nvSpPr>
+        <p:spPr/>
+        <p:txBody>
+          <a:bodyPr/>
+          <a:lstStyle/>
+          <a:p>
+            <a:fld id="{2A226FEB-661D-4181-84CB-C53DCFE1931A}" type="slidenum">
+              <a:rPr lang="ko-KR" altLang="en-US" smtClean="0"/>
+              <a:t>2</a:t>
+            </a:fld>
+            <a:endParaRPr lang="ko-KR" altLang="en-US"/>
+          </a:p>
+        </p:txBody>
+      </p:sp>
+      <p:pic>
+        <p:nvPicPr>
+          <p:cNvPr id="7" name="그림 6">
+            <a:extLst>
+              <a:ext uri="{FF2B5EF4-FFF2-40B4-BE49-F238E27FC236}">
+                <a16:creationId xmlns:a16="http://schemas.microsoft.com/office/drawing/2014/main" id="{D67AD035-E9BF-E41F-A516-4A73B686FD47}"/>
+              </a:ext>
+            </a:extLst>
+          </p:cNvPr>
+          <p:cNvPicPr>
+            <a:picLocks noChangeAspect="1"/>
+          </p:cNvPicPr>
+          <p:nvPr/>
+        </p:nvPicPr>
+        <p:blipFill>
+          <a:blip r:embed="rId2"/>
+          <a:stretch>
+            <a:fillRect/>
+          </a:stretch>
+        </p:blipFill>
+        <p:spPr>
+          <a:xfrm>
+            <a:off x="1892300" y="118363"/>
+            <a:ext cx="4181475" cy="4324350"/>
+          </a:xfrm>
+          <a:prstGeom prst="rect">
+            <a:avLst/>
+          </a:prstGeom>
+        </p:spPr>
+      </p:pic>
+      <p:sp>
+        <p:nvSpPr>
+          <p:cNvPr id="8" name="제목 2">
+            <a:extLst>
+              <a:ext uri="{FF2B5EF4-FFF2-40B4-BE49-F238E27FC236}">
+                <a16:creationId xmlns:a16="http://schemas.microsoft.com/office/drawing/2014/main" id="{AD85AA83-A5CB-FE0C-1156-D15A37765574}"/>
+              </a:ext>
+            </a:extLst>
+          </p:cNvPr>
+          <p:cNvSpPr txBox="1">
+            <a:spLocks/>
+          </p:cNvSpPr>
+          <p:nvPr/>
+        </p:nvSpPr>
+        <p:spPr>
+          <a:xfrm>
+            <a:off x="6118227" y="340756"/>
+            <a:ext cx="3094875" cy="535531"/>
+          </a:xfrm>
+          <a:prstGeom prst="rect">
+            <a:avLst/>
+          </a:prstGeom>
+        </p:spPr>
+        <p:txBody>
+          <a:bodyPr vert="horz" wrap="square" lIns="91440" tIns="45720" rIns="91440" bIns="45720" rtlCol="0" anchor="t">
+            <a:spAutoFit/>
+          </a:bodyPr>
+          <a:lstStyle>
+            <a:lvl1pPr algn="l" defTabSz="914400" rtl="0" eaLnBrk="1" latinLnBrk="0" hangingPunct="1">
+              <a:lnSpc>
+                <a:spcPct val="90000"/>
+              </a:lnSpc>
+              <a:spcBef>
+                <a:spcPct val="0"/>
+              </a:spcBef>
+              <a:buNone/>
+              <a:defRPr sz="3200" b="1" kern="1200">
+                <a:solidFill>
+                  <a:schemeClr val="tx1"/>
+                </a:solidFill>
+                <a:latin typeface="+mj-lt"/>
+                <a:ea typeface="+mj-ea"/>
+                <a:cs typeface="+mj-cs"/>
+              </a:defRPr>
+            </a:lvl1pPr>
+          </a:lstStyle>
+          <a:p>
+            <a:r>
+              <a:rPr lang="en-US" altLang="ko-KR" b="0" dirty="0"/>
+              <a:t>72, 65, 108</a:t>
+            </a:r>
+            <a:endParaRPr lang="ko-KR" altLang="en-US" b="0" dirty="0"/>
+          </a:p>
+        </p:txBody>
+      </p:sp>
+    </p:spTree>
+    <p:extLst>
+      <p:ext uri="{BB962C8B-B14F-4D97-AF65-F5344CB8AC3E}">
+        <p14:creationId xmlns:p14="http://schemas.microsoft.com/office/powerpoint/2010/main" val="1952385904"/>
+      </p:ext>
+    </p:extLst>
+  </p:cSld>
+  <p:clrMapOvr>
+    <a:masterClrMapping/>
+  </p:clrMapOvr>
+</p:sld>
+</file>
+
+<file path=ppt/slides/slide3.xml><?xml version="1.0" encoding="utf-8"?>
+<p:sld xmlns:a="http://schemas.openxmlformats.org/drawingml/2006/main" xmlns:r="http://schemas.openxmlformats.org/officeDocument/2006/relationships" xmlns:p="http://schemas.openxmlformats.org/presentationml/2006/main">
+  <p:cSld>
+    <p:spTree>
+      <p:nvGrpSpPr>
+        <p:cNvPr id="1" name=""/>
+        <p:cNvGrpSpPr/>
+        <p:nvPr/>
+      </p:nvGrpSpPr>
+      <p:grpSpPr>
+        <a:xfrm>
+          <a:off x="0" y="0"/>
+          <a:ext cx="0" cy="0"/>
+          <a:chOff x="0" y="0"/>
+          <a:chExt cx="0" cy="0"/>
+        </a:xfrm>
+      </p:grpSpPr>
+      <p:sp>
+        <p:nvSpPr>
+          <p:cNvPr id="2" name="텍스트 개체 틀 1">
+            <a:extLst>
+              <a:ext uri="{FF2B5EF4-FFF2-40B4-BE49-F238E27FC236}">
                 <a16:creationId xmlns:a16="http://schemas.microsoft.com/office/drawing/2014/main" id="{7F33C3F7-F721-7467-D619-FC48D47C5DBA}"/>
               </a:ext>
             </a:extLst>
@@ -4795,7 +5023,7 @@
           <a:p>
             <a:fld id="{2A226FEB-661D-4181-84CB-C53DCFE1931A}" type="slidenum">
               <a:rPr lang="ko-KR" altLang="en-US" smtClean="0"/>
-              <a:t>2</a:t>
+              <a:t>3</a:t>
             </a:fld>
             <a:endParaRPr lang="ko-KR" altLang="en-US"/>
           </a:p>
@@ -4814,7 +5042,7 @@
 </p:sld>
 </file>
 
-<file path=ppt/slides/slide3.xml><?xml version="1.0" encoding="utf-8"?>
+<file path=ppt/slides/slide4.xml><?xml version="1.0" encoding="utf-8"?>
 <p:sld xmlns:a="http://schemas.openxmlformats.org/drawingml/2006/main" xmlns:r="http://schemas.openxmlformats.org/officeDocument/2006/relationships" xmlns:p="http://schemas.openxmlformats.org/presentationml/2006/main">
   <p:cSld>
     <p:spTree>
@@ -4943,7 +5171,7 @@
           <a:p>
             <a:fld id="{2A226FEB-661D-4181-84CB-C53DCFE1931A}" type="slidenum">
               <a:rPr lang="ko-KR" altLang="en-US" smtClean="0"/>
-              <a:t>3</a:t>
+              <a:t>4</a:t>
             </a:fld>
             <a:endParaRPr lang="ko-KR" altLang="en-US"/>
           </a:p>
@@ -9755,7 +9983,7 @@
 </p:sld>
 </file>
 
-<file path=ppt/slides/slide4.xml><?xml version="1.0" encoding="utf-8"?>
+<file path=ppt/slides/slide5.xml><?xml version="1.0" encoding="utf-8"?>
 <p:sld xmlns:a="http://schemas.openxmlformats.org/drawingml/2006/main" xmlns:r="http://schemas.openxmlformats.org/officeDocument/2006/relationships" xmlns:p="http://schemas.openxmlformats.org/presentationml/2006/main">
   <p:cSld>
     <p:spTree>
@@ -9873,7 +10101,7 @@
           <a:p>
             <a:fld id="{2A226FEB-661D-4181-84CB-C53DCFE1931A}" type="slidenum">
               <a:rPr lang="ko-KR" altLang="en-US" smtClean="0"/>
-              <a:t>4</a:t>
+              <a:t>5</a:t>
             </a:fld>
             <a:endParaRPr lang="ko-KR" altLang="en-US"/>
           </a:p>
@@ -9996,7 +10224,7 @@
 </p:sld>
 </file>
 
-<file path=ppt/slides/slide5.xml><?xml version="1.0" encoding="utf-8"?>
+<file path=ppt/slides/slide6.xml><?xml version="1.0" encoding="utf-8"?>
 <p:sld xmlns:a="http://schemas.openxmlformats.org/drawingml/2006/main" xmlns:r="http://schemas.openxmlformats.org/officeDocument/2006/relationships" xmlns:p="http://schemas.openxmlformats.org/presentationml/2006/main">
   <p:cSld>
     <p:spTree>
@@ -10612,7 +10840,7 @@
           <a:p>
             <a:fld id="{2A226FEB-661D-4181-84CB-C53DCFE1931A}" type="slidenum">
               <a:rPr lang="ko-KR" altLang="en-US" smtClean="0"/>
-              <a:t>5</a:t>
+              <a:t>6</a:t>
             </a:fld>
             <a:endParaRPr lang="ko-KR" altLang="en-US"/>
           </a:p>
@@ -10752,7 +10980,7 @@
 </p:sld>
 </file>
 
-<file path=ppt/slides/slide6.xml><?xml version="1.0" encoding="utf-8"?>
+<file path=ppt/slides/slide7.xml><?xml version="1.0" encoding="utf-8"?>
 <p:sld xmlns:a="http://schemas.openxmlformats.org/drawingml/2006/main" xmlns:r="http://schemas.openxmlformats.org/officeDocument/2006/relationships" xmlns:p="http://schemas.openxmlformats.org/presentationml/2006/main">
   <p:cSld>
     <p:spTree>
@@ -11408,7 +11636,7 @@
           <a:p>
             <a:fld id="{2A226FEB-661D-4181-84CB-C53DCFE1931A}" type="slidenum">
               <a:rPr lang="ko-KR" altLang="en-US" smtClean="0"/>
-              <a:t>6</a:t>
+              <a:t>7</a:t>
             </a:fld>
             <a:endParaRPr lang="ko-KR" altLang="en-US"/>
           </a:p>
@@ -11427,7 +11655,7 @@
 </p:sld>
 </file>
 
-<file path=ppt/slides/slide7.xml><?xml version="1.0" encoding="utf-8"?>
+<file path=ppt/slides/slide8.xml><?xml version="1.0" encoding="utf-8"?>
 <p:sld xmlns:a="http://schemas.openxmlformats.org/drawingml/2006/main" xmlns:r="http://schemas.openxmlformats.org/officeDocument/2006/relationships" xmlns:p="http://schemas.openxmlformats.org/presentationml/2006/main">
   <p:cSld>
     <p:spTree>
@@ -11821,7 +12049,7 @@
           <a:p>
             <a:fld id="{2A226FEB-661D-4181-84CB-C53DCFE1931A}" type="slidenum">
               <a:rPr lang="ko-KR" altLang="en-US" smtClean="0"/>
-              <a:t>7</a:t>
+              <a:t>8</a:t>
             </a:fld>
             <a:endParaRPr lang="ko-KR" altLang="en-US"/>
           </a:p>
